--- a/public/assets/aqualogic/templates/Aqualogic_Policy_at_a_Glance_Template.pptx
+++ b/public/assets/aqualogic/templates/Aqualogic_Policy_at_a_Glance_Template.pptx
@@ -209,7 +209,7 @@
           <a:p>
             <a:fld id="{5282F153-3F37-0F45-9E97-73ACFA13230C}" type="datetimeFigureOut">
               <a:rPr lang="en-US"/>
-              <a:t>6/18/26</a:t>
+              <a:t>6/19/26</a:t>
             </a:fld>
             <a:endParaRPr lang="en-US"/>
           </a:p>
@@ -3655,7 +3655,7 @@
                 <a:ea typeface="Manrope" pitchFamily="34" charset="-122"/>
                 <a:cs typeface="Manrope" pitchFamily="34" charset="-120"/>
               </a:rPr>
-              <a:t>Health &amp; Safety, HR and Fleet include a worked example. Colours are a proposal and can be adjusted. Built in the Aqualogic brand (Manrope); install Manrope for correct rendering.</a:t>
+              <a:t>Health &amp; Safety, HR and Fleet include a worked, illustrative example. Colours are a proposal and can be adjusted. Built in the Aqualogic brand (Manrope); install Manrope for correct rendering.</a:t>
             </a:r>
             <a:endParaRPr lang="en-US" sz="950" dirty="0"/>
           </a:p>
@@ -14694,7 +14694,68 @@
       </p:sp>
       <p:sp>
         <p:nvSpPr>
-          <p:cNvPr id="5" name="Text 2"/>
+          <p:cNvPr id="5" name="Shape 2"/>
+          <p:cNvSpPr/>
+          <p:nvPr/>
+        </p:nvSpPr>
+        <p:spPr>
+          <a:xfrm>
+            <a:off x="5413248" y="749808"/>
+            <a:ext cx="1691640" cy="329184"/>
+          </a:xfrm>
+          <a:prstGeom prst="roundRect">
+            <a:avLst>
+              <a:gd name="adj" fmla="val 50000"/>
+            </a:avLst>
+          </a:prstGeom>
+          <a:solidFill>
+            <a:srgbClr val="FFFFFF"/>
+          </a:solidFill>
+          <a:ln/>
+        </p:spPr>
+      </p:sp>
+      <p:sp>
+        <p:nvSpPr>
+          <p:cNvPr id="6" name="Text 3"/>
+          <p:cNvSpPr/>
+          <p:nvPr/>
+        </p:nvSpPr>
+        <p:spPr>
+          <a:xfrm>
+            <a:off x="5413248" y="749808"/>
+            <a:ext cx="1691640" cy="329184"/>
+          </a:xfrm>
+          <a:prstGeom prst="rect">
+            <a:avLst/>
+          </a:prstGeom>
+          <a:noFill/>
+          <a:ln/>
+        </p:spPr>
+        <p:txBody>
+          <a:bodyPr wrap="square" lIns="0" tIns="0" rIns="0" bIns="0" rtlCol="0" anchor="ctr"/>
+          <a:lstStyle/>
+          <a:p>
+            <a:pPr marL="0" indent="0" algn="ctr">
+              <a:buNone/>
+            </a:pPr>
+            <a:r>
+              <a:rPr lang="en-US" sz="1050" b="1" kern="0" spc="100" dirty="0">
+                <a:solidFill>
+                  <a:srgbClr val="D6453D"/>
+                </a:solidFill>
+                <a:latin typeface="Manrope" pitchFamily="34" charset="0"/>
+                <a:ea typeface="Manrope" pitchFamily="34" charset="-122"/>
+                <a:cs typeface="Manrope" pitchFamily="34" charset="-120"/>
+              </a:rPr>
+              <a:t>EXAMPLE ONLY</a:t>
+            </a:r>
+            <a:endParaRPr lang="en-US" sz="1050" dirty="0"/>
+          </a:p>
+        </p:txBody>
+      </p:sp>
+      <p:sp>
+        <p:nvSpPr>
+          <p:cNvPr id="7" name="Text 4"/>
           <p:cNvSpPr/>
           <p:nvPr/>
         </p:nvSpPr>
@@ -14733,7 +14794,7 @@
       </p:sp>
       <p:sp>
         <p:nvSpPr>
-          <p:cNvPr id="6" name="Text 3"/>
+          <p:cNvPr id="8" name="Text 5"/>
           <p:cNvSpPr/>
           <p:nvPr/>
         </p:nvSpPr>
@@ -14772,7 +14833,7 @@
       </p:sp>
       <p:sp>
         <p:nvSpPr>
-          <p:cNvPr id="7" name="Shape 4"/>
+          <p:cNvPr id="9" name="Shape 6"/>
           <p:cNvSpPr/>
           <p:nvPr/>
         </p:nvSpPr>
@@ -14799,7 +14860,7 @@
       </p:sp>
       <p:sp>
         <p:nvSpPr>
-          <p:cNvPr id="8" name="Text 5"/>
+          <p:cNvPr id="10" name="Text 7"/>
           <p:cNvSpPr/>
           <p:nvPr/>
         </p:nvSpPr>
@@ -14852,7 +14913,7 @@
       </p:sp>
       <p:sp>
         <p:nvSpPr>
-          <p:cNvPr id="9" name="Text 6"/>
+          <p:cNvPr id="11" name="Text 8"/>
           <p:cNvSpPr/>
           <p:nvPr/>
         </p:nvSpPr>
@@ -14891,7 +14952,7 @@
       </p:sp>
       <p:sp>
         <p:nvSpPr>
-          <p:cNvPr id="10" name="Shape 7"/>
+          <p:cNvPr id="12" name="Shape 9"/>
           <p:cNvSpPr/>
           <p:nvPr/>
         </p:nvSpPr>
@@ -14913,7 +14974,7 @@
       </p:sp>
       <p:sp>
         <p:nvSpPr>
-          <p:cNvPr id="11" name="Text 8"/>
+          <p:cNvPr id="13" name="Text 10"/>
           <p:cNvSpPr/>
           <p:nvPr/>
         </p:nvSpPr>
@@ -14955,7 +15016,7 @@
       </p:sp>
       <p:sp>
         <p:nvSpPr>
-          <p:cNvPr id="12" name="Shape 9"/>
+          <p:cNvPr id="14" name="Shape 11"/>
           <p:cNvSpPr/>
           <p:nvPr/>
         </p:nvSpPr>
@@ -14975,7 +15036,7 @@
       </p:sp>
       <p:sp>
         <p:nvSpPr>
-          <p:cNvPr id="13" name="Shape 10"/>
+          <p:cNvPr id="15" name="Shape 12"/>
           <p:cNvSpPr/>
           <p:nvPr/>
         </p:nvSpPr>
@@ -14995,7 +15056,7 @@
       </p:sp>
       <p:sp>
         <p:nvSpPr>
-          <p:cNvPr id="14" name="Shape 11"/>
+          <p:cNvPr id="16" name="Shape 13"/>
           <p:cNvSpPr/>
           <p:nvPr/>
         </p:nvSpPr>
@@ -15015,7 +15076,7 @@
       </p:sp>
       <p:sp>
         <p:nvSpPr>
-          <p:cNvPr id="15" name="Shape 12"/>
+          <p:cNvPr id="17" name="Shape 14"/>
           <p:cNvSpPr/>
           <p:nvPr/>
         </p:nvSpPr>
@@ -15035,7 +15096,7 @@
       </p:sp>
       <p:sp>
         <p:nvSpPr>
-          <p:cNvPr id="16" name="Text 13"/>
+          <p:cNvPr id="18" name="Text 15"/>
           <p:cNvSpPr/>
           <p:nvPr/>
         </p:nvSpPr>
@@ -15074,7 +15135,7 @@
       </p:sp>
       <p:sp>
         <p:nvSpPr>
-          <p:cNvPr id="17" name="Text 14"/>
+          <p:cNvPr id="19" name="Text 16"/>
           <p:cNvSpPr/>
           <p:nvPr/>
         </p:nvSpPr>
@@ -15113,7 +15174,7 @@
       </p:sp>
       <p:sp>
         <p:nvSpPr>
-          <p:cNvPr id="18" name="Text 15"/>
+          <p:cNvPr id="20" name="Text 17"/>
           <p:cNvSpPr/>
           <p:nvPr/>
         </p:nvSpPr>
@@ -15152,7 +15213,7 @@
       </p:sp>
       <p:sp>
         <p:nvSpPr>
-          <p:cNvPr id="19" name="Text 16"/>
+          <p:cNvPr id="21" name="Text 18"/>
           <p:cNvSpPr/>
           <p:nvPr/>
         </p:nvSpPr>
@@ -15191,7 +15252,7 @@
       </p:sp>
       <p:sp>
         <p:nvSpPr>
-          <p:cNvPr id="20" name="Shape 17"/>
+          <p:cNvPr id="22" name="Shape 19"/>
           <p:cNvSpPr/>
           <p:nvPr/>
         </p:nvSpPr>
@@ -15218,7 +15279,7 @@
       </p:sp>
       <p:sp>
         <p:nvSpPr>
-          <p:cNvPr id="21" name="Text 18"/>
+          <p:cNvPr id="23" name="Text 20"/>
           <p:cNvSpPr/>
           <p:nvPr/>
         </p:nvSpPr>
@@ -15260,7 +15321,7 @@
       </p:sp>
       <p:sp>
         <p:nvSpPr>
-          <p:cNvPr id="22" name="Text 19"/>
+          <p:cNvPr id="24" name="Text 21"/>
           <p:cNvSpPr/>
           <p:nvPr/>
         </p:nvSpPr>
@@ -15299,7 +15360,7 @@
       </p:sp>
       <p:sp>
         <p:nvSpPr>
-          <p:cNvPr id="23" name="Shape 20"/>
+          <p:cNvPr id="25" name="Shape 22"/>
           <p:cNvSpPr/>
           <p:nvPr/>
         </p:nvSpPr>
@@ -15326,7 +15387,7 @@
       </p:sp>
       <p:sp>
         <p:nvSpPr>
-          <p:cNvPr id="24" name="Text 21"/>
+          <p:cNvPr id="26" name="Text 23"/>
           <p:cNvSpPr/>
           <p:nvPr/>
         </p:nvSpPr>
@@ -15368,7 +15429,7 @@
       </p:sp>
       <p:sp>
         <p:nvSpPr>
-          <p:cNvPr id="25" name="Shape 22"/>
+          <p:cNvPr id="27" name="Shape 24"/>
           <p:cNvSpPr/>
           <p:nvPr/>
         </p:nvSpPr>
@@ -15395,7 +15456,7 @@
       </p:sp>
       <p:sp>
         <p:nvSpPr>
-          <p:cNvPr id="26" name="Text 23"/>
+          <p:cNvPr id="28" name="Text 25"/>
           <p:cNvSpPr/>
           <p:nvPr/>
         </p:nvSpPr>
@@ -15437,7 +15498,7 @@
       </p:sp>
       <p:sp>
         <p:nvSpPr>
-          <p:cNvPr id="27" name="Text 24"/>
+          <p:cNvPr id="29" name="Text 26"/>
           <p:cNvSpPr/>
           <p:nvPr/>
         </p:nvSpPr>
@@ -15476,7 +15537,7 @@
       </p:sp>
       <p:sp>
         <p:nvSpPr>
-          <p:cNvPr id="28" name="Shape 25"/>
+          <p:cNvPr id="30" name="Shape 27"/>
           <p:cNvSpPr/>
           <p:nvPr/>
         </p:nvSpPr>
@@ -15503,7 +15564,7 @@
       </p:sp>
       <p:sp>
         <p:nvSpPr>
-          <p:cNvPr id="29" name="Text 26"/>
+          <p:cNvPr id="31" name="Text 28"/>
           <p:cNvSpPr/>
           <p:nvPr/>
         </p:nvSpPr>
@@ -15545,7 +15606,7 @@
       </p:sp>
       <p:sp>
         <p:nvSpPr>
-          <p:cNvPr id="30" name="Shape 27"/>
+          <p:cNvPr id="32" name="Shape 29"/>
           <p:cNvSpPr/>
           <p:nvPr/>
         </p:nvSpPr>
@@ -15565,7 +15626,7 @@
       </p:sp>
       <p:sp>
         <p:nvSpPr>
-          <p:cNvPr id="31" name="Shape 28"/>
+          <p:cNvPr id="33" name="Shape 30"/>
           <p:cNvSpPr/>
           <p:nvPr/>
         </p:nvSpPr>
@@ -15585,7 +15646,7 @@
       </p:sp>
       <p:sp>
         <p:nvSpPr>
-          <p:cNvPr id="32" name="Shape 29"/>
+          <p:cNvPr id="34" name="Shape 31"/>
           <p:cNvSpPr/>
           <p:nvPr/>
         </p:nvSpPr>
@@ -15605,7 +15666,7 @@
       </p:sp>
       <p:sp>
         <p:nvSpPr>
-          <p:cNvPr id="33" name="Shape 30"/>
+          <p:cNvPr id="35" name="Shape 32"/>
           <p:cNvSpPr/>
           <p:nvPr/>
         </p:nvSpPr>
@@ -15625,7 +15686,7 @@
       </p:sp>
       <p:sp>
         <p:nvSpPr>
-          <p:cNvPr id="34" name="Text 31"/>
+          <p:cNvPr id="36" name="Text 33"/>
           <p:cNvSpPr/>
           <p:nvPr/>
         </p:nvSpPr>
@@ -15664,7 +15725,7 @@
       </p:sp>
       <p:sp>
         <p:nvSpPr>
-          <p:cNvPr id="35" name="Shape 32"/>
+          <p:cNvPr id="37" name="Shape 34"/>
           <p:cNvSpPr/>
           <p:nvPr/>
         </p:nvSpPr>
@@ -15686,7 +15747,7 @@
       </p:sp>
       <p:sp>
         <p:nvSpPr>
-          <p:cNvPr id="36" name="Text 33"/>
+          <p:cNvPr id="38" name="Text 35"/>
           <p:cNvSpPr/>
           <p:nvPr/>
         </p:nvSpPr>
@@ -15728,7 +15789,7 @@
       </p:sp>
       <p:pic>
         <p:nvPicPr>
-          <p:cNvPr id="37" name="Image 1" descr="/home/claude/deck/img/mark.png"/>
+          <p:cNvPr id="39" name="Image 1" descr="/home/claude/deck/img/mark.png"/>
           <p:cNvPicPr>
             <a:picLocks noChangeAspect="1"/>
           </p:cNvPicPr>
@@ -15752,7 +15813,7 @@
       </p:pic>
       <p:sp>
         <p:nvSpPr>
-          <p:cNvPr id="38" name="Text 34"/>
+          <p:cNvPr id="40" name="Text 36"/>
           <p:cNvSpPr/>
           <p:nvPr/>
         </p:nvSpPr>
@@ -15791,7 +15852,7 @@
       </p:sp>
       <p:sp>
         <p:nvSpPr>
-          <p:cNvPr id="39" name="Text 35"/>
+          <p:cNvPr id="41" name="Text 37"/>
           <p:cNvSpPr/>
           <p:nvPr/>
         </p:nvSpPr>
@@ -15822,7 +15883,7 @@
                 <a:ea typeface="Manrope" pitchFamily="34" charset="-122"/>
                 <a:cs typeface="Manrope" pitchFamily="34" charset="-120"/>
               </a:rPr>
-              <a:t>For the detail, see the full procedure in the IMS.</a:t>
+              <a:t>Example content. Replace with your own.</a:t>
             </a:r>
             <a:endParaRPr lang="en-US" sz="900" dirty="0"/>
           </a:p>
@@ -15946,7 +16007,68 @@
       </p:sp>
       <p:sp>
         <p:nvSpPr>
-          <p:cNvPr id="5" name="Text 2"/>
+          <p:cNvPr id="5" name="Shape 2"/>
+          <p:cNvSpPr/>
+          <p:nvPr/>
+        </p:nvSpPr>
+        <p:spPr>
+          <a:xfrm>
+            <a:off x="5413248" y="749808"/>
+            <a:ext cx="1691640" cy="329184"/>
+          </a:xfrm>
+          <a:prstGeom prst="roundRect">
+            <a:avLst>
+              <a:gd name="adj" fmla="val 50000"/>
+            </a:avLst>
+          </a:prstGeom>
+          <a:solidFill>
+            <a:srgbClr val="FFFFFF"/>
+          </a:solidFill>
+          <a:ln/>
+        </p:spPr>
+      </p:sp>
+      <p:sp>
+        <p:nvSpPr>
+          <p:cNvPr id="6" name="Text 3"/>
+          <p:cNvSpPr/>
+          <p:nvPr/>
+        </p:nvSpPr>
+        <p:spPr>
+          <a:xfrm>
+            <a:off x="5413248" y="749808"/>
+            <a:ext cx="1691640" cy="329184"/>
+          </a:xfrm>
+          <a:prstGeom prst="rect">
+            <a:avLst/>
+          </a:prstGeom>
+          <a:noFill/>
+          <a:ln/>
+        </p:spPr>
+        <p:txBody>
+          <a:bodyPr wrap="square" lIns="0" tIns="0" rIns="0" bIns="0" rtlCol="0" anchor="ctr"/>
+          <a:lstStyle/>
+          <a:p>
+            <a:pPr marL="0" indent="0" algn="ctr">
+              <a:buNone/>
+            </a:pPr>
+            <a:r>
+              <a:rPr lang="en-US" sz="1050" b="1" kern="0" spc="100" dirty="0">
+                <a:solidFill>
+                  <a:srgbClr val="2E9E78"/>
+                </a:solidFill>
+                <a:latin typeface="Manrope" pitchFamily="34" charset="0"/>
+                <a:ea typeface="Manrope" pitchFamily="34" charset="-122"/>
+                <a:cs typeface="Manrope" pitchFamily="34" charset="-120"/>
+              </a:rPr>
+              <a:t>EXAMPLE ONLY</a:t>
+            </a:r>
+            <a:endParaRPr lang="en-US" sz="1050" dirty="0"/>
+          </a:p>
+        </p:txBody>
+      </p:sp>
+      <p:sp>
+        <p:nvSpPr>
+          <p:cNvPr id="7" name="Text 4"/>
           <p:cNvSpPr/>
           <p:nvPr/>
         </p:nvSpPr>
@@ -15985,7 +16107,7 @@
       </p:sp>
       <p:sp>
         <p:nvSpPr>
-          <p:cNvPr id="6" name="Text 3"/>
+          <p:cNvPr id="8" name="Text 5"/>
           <p:cNvSpPr/>
           <p:nvPr/>
         </p:nvSpPr>
@@ -16024,7 +16146,7 @@
       </p:sp>
       <p:sp>
         <p:nvSpPr>
-          <p:cNvPr id="7" name="Shape 4"/>
+          <p:cNvPr id="9" name="Shape 6"/>
           <p:cNvSpPr/>
           <p:nvPr/>
         </p:nvSpPr>
@@ -16044,7 +16166,7 @@
       </p:sp>
       <p:pic>
         <p:nvPicPr>
-          <p:cNvPr id="8" name="Image 1" descr="preencoded.png"/>
+          <p:cNvPr id="10" name="Image 1" descr="preencoded.png"/>
           <p:cNvPicPr>
             <a:picLocks noChangeAspect="1"/>
           </p:cNvPicPr>
@@ -16068,7 +16190,7 @@
       </p:pic>
       <p:sp>
         <p:nvSpPr>
-          <p:cNvPr id="9" name="Text 5"/>
+          <p:cNvPr id="11" name="Text 7"/>
           <p:cNvSpPr/>
           <p:nvPr/>
         </p:nvSpPr>
@@ -16110,7 +16232,7 @@
       </p:sp>
       <p:sp>
         <p:nvSpPr>
-          <p:cNvPr id="10" name="Text 6"/>
+          <p:cNvPr id="12" name="Text 8"/>
           <p:cNvSpPr/>
           <p:nvPr/>
         </p:nvSpPr>
@@ -16180,7 +16302,7 @@
       </p:sp>
       <p:sp>
         <p:nvSpPr>
-          <p:cNvPr id="11" name="Shape 7"/>
+          <p:cNvPr id="13" name="Shape 9"/>
           <p:cNvSpPr/>
           <p:nvPr/>
         </p:nvSpPr>
@@ -16200,7 +16322,7 @@
       </p:sp>
       <p:pic>
         <p:nvPicPr>
-          <p:cNvPr id="12" name="Image 2" descr="preencoded.png"/>
+          <p:cNvPr id="14" name="Image 2" descr="preencoded.png"/>
           <p:cNvPicPr>
             <a:picLocks noChangeAspect="1"/>
           </p:cNvPicPr>
@@ -16224,7 +16346,7 @@
       </p:pic>
       <p:sp>
         <p:nvSpPr>
-          <p:cNvPr id="13" name="Text 8"/>
+          <p:cNvPr id="15" name="Text 10"/>
           <p:cNvSpPr/>
           <p:nvPr/>
         </p:nvSpPr>
@@ -16266,7 +16388,7 @@
       </p:sp>
       <p:sp>
         <p:nvSpPr>
-          <p:cNvPr id="14" name="Text 9"/>
+          <p:cNvPr id="16" name="Text 11"/>
           <p:cNvSpPr/>
           <p:nvPr/>
         </p:nvSpPr>
@@ -16360,7 +16482,7 @@
       </p:sp>
       <p:sp>
         <p:nvSpPr>
-          <p:cNvPr id="15" name="Shape 10"/>
+          <p:cNvPr id="17" name="Shape 12"/>
           <p:cNvSpPr/>
           <p:nvPr/>
         </p:nvSpPr>
@@ -16380,7 +16502,7 @@
       </p:sp>
       <p:pic>
         <p:nvPicPr>
-          <p:cNvPr id="16" name="Image 3" descr="preencoded.png"/>
+          <p:cNvPr id="18" name="Image 3" descr="preencoded.png"/>
           <p:cNvPicPr>
             <a:picLocks noChangeAspect="1"/>
           </p:cNvPicPr>
@@ -16404,7 +16526,7 @@
       </p:pic>
       <p:sp>
         <p:nvSpPr>
-          <p:cNvPr id="17" name="Text 11"/>
+          <p:cNvPr id="19" name="Text 13"/>
           <p:cNvSpPr/>
           <p:nvPr/>
         </p:nvSpPr>
@@ -16446,7 +16568,7 @@
       </p:sp>
       <p:sp>
         <p:nvSpPr>
-          <p:cNvPr id="18" name="Text 12"/>
+          <p:cNvPr id="20" name="Text 14"/>
           <p:cNvSpPr/>
           <p:nvPr/>
         </p:nvSpPr>
@@ -16516,7 +16638,7 @@
       </p:sp>
       <p:sp>
         <p:nvSpPr>
-          <p:cNvPr id="19" name="Shape 13"/>
+          <p:cNvPr id="21" name="Shape 15"/>
           <p:cNvSpPr/>
           <p:nvPr/>
         </p:nvSpPr>
@@ -16536,7 +16658,7 @@
       </p:sp>
       <p:pic>
         <p:nvPicPr>
-          <p:cNvPr id="20" name="Image 4" descr="preencoded.png"/>
+          <p:cNvPr id="22" name="Image 4" descr="preencoded.png"/>
           <p:cNvPicPr>
             <a:picLocks noChangeAspect="1"/>
           </p:cNvPicPr>
@@ -16560,7 +16682,7 @@
       </p:pic>
       <p:sp>
         <p:nvSpPr>
-          <p:cNvPr id="21" name="Text 14"/>
+          <p:cNvPr id="23" name="Text 16"/>
           <p:cNvSpPr/>
           <p:nvPr/>
         </p:nvSpPr>
@@ -16602,7 +16724,7 @@
       </p:sp>
       <p:sp>
         <p:nvSpPr>
-          <p:cNvPr id="22" name="Text 15"/>
+          <p:cNvPr id="24" name="Text 17"/>
           <p:cNvSpPr/>
           <p:nvPr/>
         </p:nvSpPr>
@@ -16672,7 +16794,7 @@
       </p:sp>
       <p:sp>
         <p:nvSpPr>
-          <p:cNvPr id="23" name="Shape 16"/>
+          <p:cNvPr id="25" name="Shape 18"/>
           <p:cNvSpPr/>
           <p:nvPr/>
         </p:nvSpPr>
@@ -16692,7 +16814,7 @@
       </p:sp>
       <p:pic>
         <p:nvPicPr>
-          <p:cNvPr id="24" name="Image 5" descr="preencoded.png"/>
+          <p:cNvPr id="26" name="Image 5" descr="preencoded.png"/>
           <p:cNvPicPr>
             <a:picLocks noChangeAspect="1"/>
           </p:cNvPicPr>
@@ -16716,7 +16838,7 @@
       </p:pic>
       <p:sp>
         <p:nvSpPr>
-          <p:cNvPr id="25" name="Text 17"/>
+          <p:cNvPr id="27" name="Text 19"/>
           <p:cNvSpPr/>
           <p:nvPr/>
         </p:nvSpPr>
@@ -16758,7 +16880,7 @@
       </p:sp>
       <p:sp>
         <p:nvSpPr>
-          <p:cNvPr id="26" name="Text 18"/>
+          <p:cNvPr id="28" name="Text 20"/>
           <p:cNvSpPr/>
           <p:nvPr/>
         </p:nvSpPr>
@@ -16852,7 +16974,7 @@
       </p:sp>
       <p:sp>
         <p:nvSpPr>
-          <p:cNvPr id="27" name="Shape 19"/>
+          <p:cNvPr id="29" name="Shape 21"/>
           <p:cNvSpPr/>
           <p:nvPr/>
         </p:nvSpPr>
@@ -16874,7 +16996,7 @@
       </p:sp>
       <p:sp>
         <p:nvSpPr>
-          <p:cNvPr id="28" name="Text 20"/>
+          <p:cNvPr id="30" name="Text 22"/>
           <p:cNvSpPr/>
           <p:nvPr/>
         </p:nvSpPr>
@@ -16913,7 +17035,7 @@
       </p:sp>
       <p:sp>
         <p:nvSpPr>
-          <p:cNvPr id="29" name="Text 21"/>
+          <p:cNvPr id="31" name="Text 23"/>
           <p:cNvSpPr/>
           <p:nvPr/>
         </p:nvSpPr>
@@ -16963,7 +17085,7 @@
       </p:sp>
       <p:sp>
         <p:nvSpPr>
-          <p:cNvPr id="30" name="Text 22"/>
+          <p:cNvPr id="32" name="Text 24"/>
           <p:cNvSpPr/>
           <p:nvPr/>
         </p:nvSpPr>
@@ -16997,7 +17119,7 @@
                 <a:ea typeface="Manrope" pitchFamily="34" charset="-122"/>
                 <a:cs typeface="Manrope" pitchFamily="34" charset="-120"/>
               </a:rPr>
-              <a:t>3 absences in 26 weeks or 4 in 12 months. Documented discussion. 6-month review.</a:t>
+              <a:t>X absences in Y weeks, or X in Y months. Documented discussion. Y-month review.</a:t>
             </a:r>
             <a:endParaRPr lang="en-US" sz="950" dirty="0"/>
           </a:p>
@@ -17005,7 +17127,7 @@
       </p:sp>
       <p:sp>
         <p:nvSpPr>
-          <p:cNvPr id="31" name="Text 23"/>
+          <p:cNvPr id="33" name="Text 25"/>
           <p:cNvSpPr/>
           <p:nvPr/>
         </p:nvSpPr>
@@ -17055,7 +17177,7 @@
       </p:sp>
       <p:sp>
         <p:nvSpPr>
-          <p:cNvPr id="32" name="Text 24"/>
+          <p:cNvPr id="34" name="Text 26"/>
           <p:cNvSpPr/>
           <p:nvPr/>
         </p:nvSpPr>
@@ -17089,7 +17211,7 @@
                 <a:ea typeface="Manrope" pitchFamily="34" charset="-122"/>
                 <a:cs typeface="Manrope" pitchFamily="34" charset="-120"/>
               </a:rPr>
-              <a:t>Further absence in the review period. Formal meeting. 12-month review.</a:t>
+              <a:t>Further absence in the review period. Formal meeting. Y-month review.</a:t>
             </a:r>
             <a:endParaRPr lang="en-US" sz="950" dirty="0"/>
           </a:p>
@@ -17097,7 +17219,7 @@
       </p:sp>
       <p:sp>
         <p:nvSpPr>
-          <p:cNvPr id="33" name="Text 25"/>
+          <p:cNvPr id="35" name="Text 27"/>
           <p:cNvSpPr/>
           <p:nvPr/>
         </p:nvSpPr>
@@ -17147,7 +17269,7 @@
       </p:sp>
       <p:sp>
         <p:nvSpPr>
-          <p:cNvPr id="34" name="Text 26"/>
+          <p:cNvPr id="36" name="Text 28"/>
           <p:cNvSpPr/>
           <p:nvPr/>
         </p:nvSpPr>
@@ -17181,7 +17303,7 @@
                 <a:ea typeface="Manrope" pitchFamily="34" charset="-122"/>
                 <a:cs typeface="Manrope" pitchFamily="34" charset="-120"/>
               </a:rPr>
-              <a:t>Further absence in the review period. Formal meeting. 12-month review.</a:t>
+              <a:t>Further absence in the review period. Formal meeting. Y-month review.</a:t>
             </a:r>
             <a:endParaRPr lang="en-US" sz="950" dirty="0"/>
           </a:p>
@@ -17189,7 +17311,7 @@
       </p:sp>
       <p:sp>
         <p:nvSpPr>
-          <p:cNvPr id="35" name="Text 27"/>
+          <p:cNvPr id="37" name="Text 29"/>
           <p:cNvSpPr/>
           <p:nvPr/>
         </p:nvSpPr>
@@ -17239,7 +17361,7 @@
       </p:sp>
       <p:sp>
         <p:nvSpPr>
-          <p:cNvPr id="36" name="Text 28"/>
+          <p:cNvPr id="38" name="Text 30"/>
           <p:cNvSpPr/>
           <p:nvPr/>
         </p:nvSpPr>
@@ -17281,7 +17403,7 @@
       </p:sp>
       <p:sp>
         <p:nvSpPr>
-          <p:cNvPr id="37" name="Shape 29"/>
+          <p:cNvPr id="39" name="Shape 31"/>
           <p:cNvSpPr/>
           <p:nvPr/>
         </p:nvSpPr>
@@ -17303,7 +17425,7 @@
       </p:sp>
       <p:sp>
         <p:nvSpPr>
-          <p:cNvPr id="38" name="Text 30"/>
+          <p:cNvPr id="40" name="Text 32"/>
           <p:cNvSpPr/>
           <p:nvPr/>
         </p:nvSpPr>
@@ -17342,7 +17464,7 @@
       </p:sp>
       <p:sp>
         <p:nvSpPr>
-          <p:cNvPr id="39" name="Text 31"/>
+          <p:cNvPr id="41" name="Text 33"/>
           <p:cNvSpPr/>
           <p:nvPr/>
         </p:nvSpPr>
@@ -17484,7 +17606,7 @@
       </p:sp>
       <p:pic>
         <p:nvPicPr>
-          <p:cNvPr id="40" name="Image 6" descr="/home/claude/deck/img/mark.png"/>
+          <p:cNvPr id="42" name="Image 6" descr="/home/claude/deck/img/mark.png"/>
           <p:cNvPicPr>
             <a:picLocks noChangeAspect="1"/>
           </p:cNvPicPr>
@@ -17508,7 +17630,7 @@
       </p:pic>
       <p:sp>
         <p:nvSpPr>
-          <p:cNvPr id="41" name="Text 32"/>
+          <p:cNvPr id="43" name="Text 34"/>
           <p:cNvSpPr/>
           <p:nvPr/>
         </p:nvSpPr>
@@ -17547,7 +17669,7 @@
       </p:sp>
       <p:sp>
         <p:nvSpPr>
-          <p:cNvPr id="42" name="Text 33"/>
+          <p:cNvPr id="44" name="Text 35"/>
           <p:cNvSpPr/>
           <p:nvPr/>
         </p:nvSpPr>
@@ -17578,7 +17700,7 @@
                 <a:ea typeface="Manrope" pitchFamily="34" charset="-122"/>
                 <a:cs typeface="Manrope" pitchFamily="34" charset="-120"/>
               </a:rPr>
-              <a:t>For the detail, see the full policy in the employee handbook.</a:t>
+              <a:t>Example content. Replace with your own.</a:t>
             </a:r>
             <a:endParaRPr lang="en-US" sz="900" dirty="0"/>
           </a:p>
@@ -21310,7 +21432,68 @@
       </p:sp>
       <p:sp>
         <p:nvSpPr>
-          <p:cNvPr id="5" name="Text 2"/>
+          <p:cNvPr id="5" name="Shape 2"/>
+          <p:cNvSpPr/>
+          <p:nvPr/>
+        </p:nvSpPr>
+        <p:spPr>
+          <a:xfrm>
+            <a:off x="5413248" y="749808"/>
+            <a:ext cx="1691640" cy="329184"/>
+          </a:xfrm>
+          <a:prstGeom prst="roundRect">
+            <a:avLst>
+              <a:gd name="adj" fmla="val 50000"/>
+            </a:avLst>
+          </a:prstGeom>
+          <a:solidFill>
+            <a:srgbClr val="FFFFFF"/>
+          </a:solidFill>
+          <a:ln/>
+        </p:spPr>
+      </p:sp>
+      <p:sp>
+        <p:nvSpPr>
+          <p:cNvPr id="6" name="Text 3"/>
+          <p:cNvSpPr/>
+          <p:nvPr/>
+        </p:nvSpPr>
+        <p:spPr>
+          <a:xfrm>
+            <a:off x="5413248" y="749808"/>
+            <a:ext cx="1691640" cy="329184"/>
+          </a:xfrm>
+          <a:prstGeom prst="rect">
+            <a:avLst/>
+          </a:prstGeom>
+          <a:noFill/>
+          <a:ln/>
+        </p:spPr>
+        <p:txBody>
+          <a:bodyPr wrap="square" lIns="0" tIns="0" rIns="0" bIns="0" rtlCol="0" anchor="ctr"/>
+          <a:lstStyle/>
+          <a:p>
+            <a:pPr marL="0" indent="0" algn="ctr">
+              <a:buNone/>
+            </a:pPr>
+            <a:r>
+              <a:rPr lang="en-US" sz="1050" b="1" kern="0" spc="100" dirty="0">
+                <a:solidFill>
+                  <a:srgbClr val="E0922F"/>
+                </a:solidFill>
+                <a:latin typeface="Manrope" pitchFamily="34" charset="0"/>
+                <a:ea typeface="Manrope" pitchFamily="34" charset="-122"/>
+                <a:cs typeface="Manrope" pitchFamily="34" charset="-120"/>
+              </a:rPr>
+              <a:t>EXAMPLE ONLY</a:t>
+            </a:r>
+            <a:endParaRPr lang="en-US" sz="1050" dirty="0"/>
+          </a:p>
+        </p:txBody>
+      </p:sp>
+      <p:sp>
+        <p:nvSpPr>
+          <p:cNvPr id="7" name="Text 4"/>
           <p:cNvSpPr/>
           <p:nvPr/>
         </p:nvSpPr>
@@ -21349,7 +21532,7 @@
       </p:sp>
       <p:sp>
         <p:nvSpPr>
-          <p:cNvPr id="6" name="Text 3"/>
+          <p:cNvPr id="8" name="Text 5"/>
           <p:cNvSpPr/>
           <p:nvPr/>
         </p:nvSpPr>
@@ -21388,7 +21571,7 @@
       </p:sp>
       <p:sp>
         <p:nvSpPr>
-          <p:cNvPr id="7" name="Shape 4"/>
+          <p:cNvPr id="9" name="Shape 6"/>
           <p:cNvSpPr/>
           <p:nvPr/>
         </p:nvSpPr>
@@ -21410,7 +21593,7 @@
       </p:sp>
       <p:sp>
         <p:nvSpPr>
-          <p:cNvPr id="8" name="Shape 5"/>
+          <p:cNvPr id="10" name="Shape 7"/>
           <p:cNvSpPr/>
           <p:nvPr/>
         </p:nvSpPr>
@@ -21430,7 +21613,7 @@
       </p:sp>
       <p:pic>
         <p:nvPicPr>
-          <p:cNvPr id="9" name="Image 1" descr="preencoded.png"/>
+          <p:cNvPr id="11" name="Image 1" descr="preencoded.png"/>
           <p:cNvPicPr>
             <a:picLocks noChangeAspect="1"/>
           </p:cNvPicPr>
@@ -21454,7 +21637,7 @@
       </p:pic>
       <p:sp>
         <p:nvSpPr>
-          <p:cNvPr id="10" name="Text 6"/>
+          <p:cNvPr id="12" name="Text 8"/>
           <p:cNvSpPr/>
           <p:nvPr/>
         </p:nvSpPr>
@@ -21507,7 +21690,7 @@
       </p:sp>
       <p:sp>
         <p:nvSpPr>
-          <p:cNvPr id="11" name="Shape 7"/>
+          <p:cNvPr id="13" name="Shape 9"/>
           <p:cNvSpPr/>
           <p:nvPr/>
         </p:nvSpPr>
@@ -21534,7 +21717,7 @@
       </p:sp>
       <p:sp>
         <p:nvSpPr>
-          <p:cNvPr id="12" name="Shape 8"/>
+          <p:cNvPr id="14" name="Shape 10"/>
           <p:cNvSpPr/>
           <p:nvPr/>
         </p:nvSpPr>
@@ -21554,7 +21737,7 @@
       </p:sp>
       <p:sp>
         <p:nvSpPr>
-          <p:cNvPr id="13" name="Text 9"/>
+          <p:cNvPr id="15" name="Text 11"/>
           <p:cNvSpPr/>
           <p:nvPr/>
         </p:nvSpPr>
@@ -21593,7 +21776,7 @@
       </p:sp>
       <p:sp>
         <p:nvSpPr>
-          <p:cNvPr id="14" name="Text 10"/>
+          <p:cNvPr id="16" name="Text 12"/>
           <p:cNvSpPr/>
           <p:nvPr/>
         </p:nvSpPr>
@@ -21632,7 +21815,7 @@
       </p:sp>
       <p:sp>
         <p:nvSpPr>
-          <p:cNvPr id="15" name="Text 11"/>
+          <p:cNvPr id="17" name="Text 13"/>
           <p:cNvSpPr/>
           <p:nvPr/>
         </p:nvSpPr>
@@ -21674,7 +21857,7 @@
       </p:sp>
       <p:sp>
         <p:nvSpPr>
-          <p:cNvPr id="16" name="Text 12"/>
+          <p:cNvPr id="18" name="Text 14"/>
           <p:cNvSpPr/>
           <p:nvPr/>
         </p:nvSpPr>
@@ -21713,7 +21896,7 @@
       </p:sp>
       <p:sp>
         <p:nvSpPr>
-          <p:cNvPr id="17" name="Shape 13"/>
+          <p:cNvPr id="19" name="Shape 15"/>
           <p:cNvSpPr/>
           <p:nvPr/>
         </p:nvSpPr>
@@ -21740,7 +21923,7 @@
       </p:sp>
       <p:sp>
         <p:nvSpPr>
-          <p:cNvPr id="18" name="Shape 14"/>
+          <p:cNvPr id="20" name="Shape 16"/>
           <p:cNvSpPr/>
           <p:nvPr/>
         </p:nvSpPr>
@@ -21760,7 +21943,7 @@
       </p:sp>
       <p:sp>
         <p:nvSpPr>
-          <p:cNvPr id="19" name="Text 15"/>
+          <p:cNvPr id="21" name="Text 17"/>
           <p:cNvSpPr/>
           <p:nvPr/>
         </p:nvSpPr>
@@ -21799,7 +21982,7 @@
       </p:sp>
       <p:sp>
         <p:nvSpPr>
-          <p:cNvPr id="20" name="Text 16"/>
+          <p:cNvPr id="22" name="Text 18"/>
           <p:cNvSpPr/>
           <p:nvPr/>
         </p:nvSpPr>
@@ -21838,7 +22021,7 @@
       </p:sp>
       <p:sp>
         <p:nvSpPr>
-          <p:cNvPr id="21" name="Text 17"/>
+          <p:cNvPr id="23" name="Text 19"/>
           <p:cNvSpPr/>
           <p:nvPr/>
         </p:nvSpPr>
@@ -21880,7 +22063,7 @@
       </p:sp>
       <p:sp>
         <p:nvSpPr>
-          <p:cNvPr id="22" name="Text 18"/>
+          <p:cNvPr id="24" name="Text 20"/>
           <p:cNvSpPr/>
           <p:nvPr/>
         </p:nvSpPr>
@@ -21919,7 +22102,7 @@
       </p:sp>
       <p:sp>
         <p:nvSpPr>
-          <p:cNvPr id="23" name="Shape 19"/>
+          <p:cNvPr id="25" name="Shape 21"/>
           <p:cNvSpPr/>
           <p:nvPr/>
         </p:nvSpPr>
@@ -21946,7 +22129,7 @@
       </p:sp>
       <p:sp>
         <p:nvSpPr>
-          <p:cNvPr id="24" name="Shape 20"/>
+          <p:cNvPr id="26" name="Shape 22"/>
           <p:cNvSpPr/>
           <p:nvPr/>
         </p:nvSpPr>
@@ -21966,7 +22149,7 @@
       </p:sp>
       <p:sp>
         <p:nvSpPr>
-          <p:cNvPr id="25" name="Text 21"/>
+          <p:cNvPr id="27" name="Text 23"/>
           <p:cNvSpPr/>
           <p:nvPr/>
         </p:nvSpPr>
@@ -22005,7 +22188,7 @@
       </p:sp>
       <p:sp>
         <p:nvSpPr>
-          <p:cNvPr id="26" name="Text 22"/>
+          <p:cNvPr id="28" name="Text 24"/>
           <p:cNvSpPr/>
           <p:nvPr/>
         </p:nvSpPr>
@@ -22044,7 +22227,7 @@
       </p:sp>
       <p:sp>
         <p:nvSpPr>
-          <p:cNvPr id="27" name="Text 23"/>
+          <p:cNvPr id="29" name="Text 25"/>
           <p:cNvSpPr/>
           <p:nvPr/>
         </p:nvSpPr>
@@ -22086,7 +22269,7 @@
       </p:sp>
       <p:sp>
         <p:nvSpPr>
-          <p:cNvPr id="28" name="Text 24"/>
+          <p:cNvPr id="30" name="Text 26"/>
           <p:cNvSpPr/>
           <p:nvPr/>
         </p:nvSpPr>
@@ -22125,7 +22308,7 @@
       </p:sp>
       <p:sp>
         <p:nvSpPr>
-          <p:cNvPr id="29" name="Shape 25"/>
+          <p:cNvPr id="31" name="Shape 27"/>
           <p:cNvSpPr/>
           <p:nvPr/>
         </p:nvSpPr>
@@ -22152,7 +22335,7 @@
       </p:sp>
       <p:sp>
         <p:nvSpPr>
-          <p:cNvPr id="30" name="Shape 26"/>
+          <p:cNvPr id="32" name="Shape 28"/>
           <p:cNvSpPr/>
           <p:nvPr/>
         </p:nvSpPr>
@@ -22172,7 +22355,7 @@
       </p:sp>
       <p:sp>
         <p:nvSpPr>
-          <p:cNvPr id="31" name="Text 27"/>
+          <p:cNvPr id="33" name="Text 29"/>
           <p:cNvSpPr/>
           <p:nvPr/>
         </p:nvSpPr>
@@ -22211,7 +22394,7 @@
       </p:sp>
       <p:sp>
         <p:nvSpPr>
-          <p:cNvPr id="32" name="Text 28"/>
+          <p:cNvPr id="34" name="Text 30"/>
           <p:cNvSpPr/>
           <p:nvPr/>
         </p:nvSpPr>
@@ -22250,7 +22433,7 @@
       </p:sp>
       <p:sp>
         <p:nvSpPr>
-          <p:cNvPr id="33" name="Text 29"/>
+          <p:cNvPr id="35" name="Text 31"/>
           <p:cNvSpPr/>
           <p:nvPr/>
         </p:nvSpPr>
@@ -22292,7 +22475,7 @@
       </p:sp>
       <p:sp>
         <p:nvSpPr>
-          <p:cNvPr id="34" name="Text 30"/>
+          <p:cNvPr id="36" name="Text 32"/>
           <p:cNvSpPr/>
           <p:nvPr/>
         </p:nvSpPr>
@@ -22331,7 +22514,7 @@
       </p:sp>
       <p:sp>
         <p:nvSpPr>
-          <p:cNvPr id="35" name="Shape 31"/>
+          <p:cNvPr id="37" name="Shape 33"/>
           <p:cNvSpPr/>
           <p:nvPr/>
         </p:nvSpPr>
@@ -22358,7 +22541,7 @@
       </p:sp>
       <p:sp>
         <p:nvSpPr>
-          <p:cNvPr id="36" name="Shape 32"/>
+          <p:cNvPr id="38" name="Shape 34"/>
           <p:cNvSpPr/>
           <p:nvPr/>
         </p:nvSpPr>
@@ -22378,7 +22561,7 @@
       </p:sp>
       <p:sp>
         <p:nvSpPr>
-          <p:cNvPr id="37" name="Text 33"/>
+          <p:cNvPr id="39" name="Text 35"/>
           <p:cNvSpPr/>
           <p:nvPr/>
         </p:nvSpPr>
@@ -22417,7 +22600,7 @@
       </p:sp>
       <p:sp>
         <p:nvSpPr>
-          <p:cNvPr id="38" name="Text 34"/>
+          <p:cNvPr id="40" name="Text 36"/>
           <p:cNvSpPr/>
           <p:nvPr/>
         </p:nvSpPr>
@@ -22456,7 +22639,7 @@
       </p:sp>
       <p:sp>
         <p:nvSpPr>
-          <p:cNvPr id="39" name="Text 35"/>
+          <p:cNvPr id="41" name="Text 37"/>
           <p:cNvSpPr/>
           <p:nvPr/>
         </p:nvSpPr>
@@ -22498,7 +22681,7 @@
       </p:sp>
       <p:sp>
         <p:nvSpPr>
-          <p:cNvPr id="40" name="Shape 36"/>
+          <p:cNvPr id="42" name="Shape 38"/>
           <p:cNvSpPr/>
           <p:nvPr/>
         </p:nvSpPr>
@@ -22520,7 +22703,7 @@
       </p:sp>
       <p:sp>
         <p:nvSpPr>
-          <p:cNvPr id="41" name="Text 37"/>
+          <p:cNvPr id="43" name="Text 39"/>
           <p:cNvSpPr/>
           <p:nvPr/>
         </p:nvSpPr>
@@ -22559,7 +22742,7 @@
       </p:sp>
       <p:sp>
         <p:nvSpPr>
-          <p:cNvPr id="42" name="Text 38"/>
+          <p:cNvPr id="44" name="Text 40"/>
           <p:cNvSpPr/>
           <p:nvPr/>
         </p:nvSpPr>
@@ -22701,7 +22884,7 @@
       </p:sp>
       <p:sp>
         <p:nvSpPr>
-          <p:cNvPr id="43" name="Text 39"/>
+          <p:cNvPr id="45" name="Text 41"/>
           <p:cNvSpPr/>
           <p:nvPr/>
         </p:nvSpPr>
@@ -22740,7 +22923,7 @@
       </p:sp>
       <p:sp>
         <p:nvSpPr>
-          <p:cNvPr id="44" name="Text 40"/>
+          <p:cNvPr id="46" name="Text 42"/>
           <p:cNvSpPr/>
           <p:nvPr/>
         </p:nvSpPr>
@@ -22858,7 +23041,7 @@
       </p:sp>
       <p:sp>
         <p:nvSpPr>
-          <p:cNvPr id="45" name="Shape 41"/>
+          <p:cNvPr id="47" name="Shape 43"/>
           <p:cNvSpPr/>
           <p:nvPr/>
         </p:nvSpPr>
@@ -22880,7 +23063,7 @@
       </p:sp>
       <p:sp>
         <p:nvSpPr>
-          <p:cNvPr id="46" name="Text 42"/>
+          <p:cNvPr id="48" name="Text 44"/>
           <p:cNvSpPr/>
           <p:nvPr/>
         </p:nvSpPr>
@@ -22942,7 +23125,7 @@
       </p:sp>
       <p:pic>
         <p:nvPicPr>
-          <p:cNvPr id="47" name="Image 2" descr="/home/claude/deck/img/mark.png"/>
+          <p:cNvPr id="49" name="Image 2" descr="/home/claude/deck/img/mark.png"/>
           <p:cNvPicPr>
             <a:picLocks noChangeAspect="1"/>
           </p:cNvPicPr>
@@ -22966,7 +23149,7 @@
       </p:pic>
       <p:sp>
         <p:nvSpPr>
-          <p:cNvPr id="48" name="Text 43"/>
+          <p:cNvPr id="50" name="Text 45"/>
           <p:cNvSpPr/>
           <p:nvPr/>
         </p:nvSpPr>
@@ -23005,7 +23188,7 @@
       </p:sp>
       <p:sp>
         <p:nvSpPr>
-          <p:cNvPr id="49" name="Text 44"/>
+          <p:cNvPr id="51" name="Text 46"/>
           <p:cNvSpPr/>
           <p:nvPr/>
         </p:nvSpPr>
@@ -23036,7 +23219,7 @@
                 <a:ea typeface="Manrope" pitchFamily="34" charset="-122"/>
                 <a:cs typeface="Manrope" pitchFamily="34" charset="-120"/>
               </a:rPr>
-              <a:t>For the detail, see the full procedure in the IMS.</a:t>
+              <a:t>Example content. Replace with your own.</a:t>
             </a:r>
             <a:endParaRPr lang="en-US" sz="900" dirty="0"/>
           </a:p>

--- a/public/assets/aqualogic/templates/Aqualogic_Policy_at_a_Glance_Template.pptx
+++ b/public/assets/aqualogic/templates/Aqualogic_Policy_at_a_Glance_Template.pptx
@@ -5,7 +5,7 @@
     <p:sldMasterId id="2147483648" r:id="rId1"/>
   </p:sldMasterIdLst>
   <p:notesMasterIdLst>
-    <p:notesMasterId r:id="rId18"/>
+    <p:notesMasterId r:id="rId21"/>
   </p:notesMasterIdLst>
   <p:sldIdLst>
     <p:sldId id="256" r:id="rId2"/>
@@ -24,6 +24,9 @@
     <p:sldId id="269" r:id="rId15"/>
     <p:sldId id="270" r:id="rId16"/>
     <p:sldId id="271" r:id="rId17"/>
+    <p:sldId id="272" r:id="rId18"/>
+    <p:sldId id="273" r:id="rId19"/>
+    <p:sldId id="274" r:id="rId20"/>
   </p:sldIdLst>
   <p:sldSz cx="7562850" cy="10688638"/>
   <p:notesSz cx="10688638" cy="7562850"/>
@@ -209,7 +212,7 @@
           <a:p>
             <a:fld id="{5282F153-3F37-0F45-9E97-73ACFA13230C}" type="datetimeFigureOut">
               <a:rPr lang="en-US"/>
-              <a:t>6/19/26</a:t>
+              <a:t>7/6/26</a:t>
             </a:fld>
             <a:endParaRPr lang="en-US"/>
           </a:p>
@@ -2176,6 +2179,13 @@
           </a:solidFill>
           <a:ln/>
         </p:spPr>
+        <p:txBody>
+          <a:bodyPr/>
+          <a:lstStyle/>
+          <a:p>
+            <a:endParaRPr lang="en-US"/>
+          </a:p>
+        </p:txBody>
       </p:sp>
       <p:pic>
         <p:nvPicPr>
@@ -2342,6 +2352,13 @@
           </a:solidFill>
           <a:ln/>
         </p:spPr>
+        <p:txBody>
+          <a:bodyPr/>
+          <a:lstStyle/>
+          <a:p>
+            <a:endParaRPr lang="en-US"/>
+          </a:p>
+        </p:txBody>
       </p:sp>
       <p:sp>
         <p:nvSpPr>
@@ -2362,6 +2379,13 @@
           </a:solidFill>
           <a:ln/>
         </p:spPr>
+        <p:txBody>
+          <a:bodyPr/>
+          <a:lstStyle/>
+          <a:p>
+            <a:endParaRPr lang="en-US"/>
+          </a:p>
+        </p:txBody>
       </p:sp>
       <p:pic>
         <p:nvPicPr>
@@ -2487,6 +2511,13 @@
           </a:solidFill>
           <a:ln/>
         </p:spPr>
+        <p:txBody>
+          <a:bodyPr/>
+          <a:lstStyle/>
+          <a:p>
+            <a:endParaRPr lang="en-US"/>
+          </a:p>
+        </p:txBody>
       </p:sp>
       <p:sp>
         <p:nvSpPr>
@@ -2585,6 +2616,13 @@
           </a:solidFill>
           <a:ln/>
         </p:spPr>
+        <p:txBody>
+          <a:bodyPr/>
+          <a:lstStyle/>
+          <a:p>
+            <a:endParaRPr lang="en-US"/>
+          </a:p>
+        </p:txBody>
       </p:sp>
       <p:sp>
         <p:nvSpPr>
@@ -2683,6 +2721,13 @@
           </a:solidFill>
           <a:ln/>
         </p:spPr>
+        <p:txBody>
+          <a:bodyPr/>
+          <a:lstStyle/>
+          <a:p>
+            <a:endParaRPr lang="en-US"/>
+          </a:p>
+        </p:txBody>
       </p:sp>
       <p:sp>
         <p:nvSpPr>
@@ -2781,6 +2826,13 @@
           </a:solidFill>
           <a:ln/>
         </p:spPr>
+        <p:txBody>
+          <a:bodyPr/>
+          <a:lstStyle/>
+          <a:p>
+            <a:endParaRPr lang="en-US"/>
+          </a:p>
+        </p:txBody>
       </p:sp>
       <p:sp>
         <p:nvSpPr>
@@ -2920,6 +2972,13 @@
           </a:solidFill>
           <a:ln/>
         </p:spPr>
+        <p:txBody>
+          <a:bodyPr/>
+          <a:lstStyle/>
+          <a:p>
+            <a:endParaRPr lang="en-US"/>
+          </a:p>
+        </p:txBody>
       </p:sp>
       <p:sp>
         <p:nvSpPr>
@@ -2940,6 +2999,13 @@
           </a:solidFill>
           <a:ln/>
         </p:spPr>
+        <p:txBody>
+          <a:bodyPr/>
+          <a:lstStyle/>
+          <a:p>
+            <a:endParaRPr lang="en-US"/>
+          </a:p>
+        </p:txBody>
       </p:sp>
       <p:pic>
         <p:nvPicPr>
@@ -3051,7 +3117,7 @@
         </p:nvSpPr>
         <p:spPr>
           <a:xfrm>
-            <a:off x="457200" y="6949440"/>
+            <a:off x="457200" y="6851072"/>
             <a:ext cx="6647688" cy="548640"/>
           </a:xfrm>
           <a:prstGeom prst="roundRect">
@@ -3064,6 +3130,13 @@
           </a:solidFill>
           <a:ln/>
         </p:spPr>
+        <p:txBody>
+          <a:bodyPr/>
+          <a:lstStyle/>
+          <a:p>
+            <a:endParaRPr lang="en-US"/>
+          </a:p>
+        </p:txBody>
       </p:sp>
       <p:sp>
         <p:nvSpPr>
@@ -3073,7 +3146,7 @@
         </p:nvSpPr>
         <p:spPr>
           <a:xfrm>
-            <a:off x="621792" y="7040880"/>
+            <a:off x="621792" y="6942512"/>
             <a:ext cx="365760" cy="365760"/>
           </a:xfrm>
           <a:prstGeom prst="ellipse">
@@ -3084,6 +3157,13 @@
           </a:solidFill>
           <a:ln/>
         </p:spPr>
+        <p:txBody>
+          <a:bodyPr/>
+          <a:lstStyle/>
+          <a:p>
+            <a:endParaRPr lang="en-US"/>
+          </a:p>
+        </p:txBody>
       </p:sp>
       <p:pic>
         <p:nvPicPr>
@@ -3101,7 +3181,7 @@
         </p:blipFill>
         <p:spPr>
           <a:xfrm>
-            <a:off x="713232" y="7132320"/>
+            <a:off x="713232" y="7033952"/>
             <a:ext cx="182880" cy="182880"/>
           </a:xfrm>
           <a:prstGeom prst="rect">
@@ -3117,7 +3197,7 @@
         </p:nvSpPr>
         <p:spPr>
           <a:xfrm>
-            <a:off x="1170432" y="6949440"/>
+            <a:off x="1170432" y="6851072"/>
             <a:ext cx="2743200" cy="548640"/>
           </a:xfrm>
           <a:prstGeom prst="rect">
@@ -3156,7 +3236,7 @@
         </p:nvSpPr>
         <p:spPr>
           <a:xfrm>
-            <a:off x="5733288" y="6949440"/>
+            <a:off x="5733288" y="6851072"/>
             <a:ext cx="1371600" cy="548640"/>
           </a:xfrm>
           <a:prstGeom prst="rect">
@@ -3195,7 +3275,7 @@
         </p:nvSpPr>
         <p:spPr>
           <a:xfrm>
-            <a:off x="457200" y="7607808"/>
+            <a:off x="457200" y="7411072"/>
             <a:ext cx="6647688" cy="548640"/>
           </a:xfrm>
           <a:prstGeom prst="roundRect">
@@ -3208,6 +3288,13 @@
           </a:solidFill>
           <a:ln/>
         </p:spPr>
+        <p:txBody>
+          <a:bodyPr/>
+          <a:lstStyle/>
+          <a:p>
+            <a:endParaRPr lang="en-US"/>
+          </a:p>
+        </p:txBody>
       </p:sp>
       <p:sp>
         <p:nvSpPr>
@@ -3217,7 +3304,7 @@
         </p:nvSpPr>
         <p:spPr>
           <a:xfrm>
-            <a:off x="621792" y="7699248"/>
+            <a:off x="621792" y="7502512"/>
             <a:ext cx="365760" cy="365760"/>
           </a:xfrm>
           <a:prstGeom prst="ellipse">
@@ -3228,6 +3315,13 @@
           </a:solidFill>
           <a:ln/>
         </p:spPr>
+        <p:txBody>
+          <a:bodyPr/>
+          <a:lstStyle/>
+          <a:p>
+            <a:endParaRPr lang="en-US"/>
+          </a:p>
+        </p:txBody>
       </p:sp>
       <p:pic>
         <p:nvPicPr>
@@ -3245,7 +3339,7 @@
         </p:blipFill>
         <p:spPr>
           <a:xfrm>
-            <a:off x="713232" y="7790688"/>
+            <a:off x="713232" y="7593952"/>
             <a:ext cx="182880" cy="182880"/>
           </a:xfrm>
           <a:prstGeom prst="rect">
@@ -3261,7 +3355,7 @@
         </p:nvSpPr>
         <p:spPr>
           <a:xfrm>
-            <a:off x="1170432" y="7607808"/>
+            <a:off x="1170432" y="7411072"/>
             <a:ext cx="2743200" cy="548640"/>
           </a:xfrm>
           <a:prstGeom prst="rect">
@@ -3300,7 +3394,7 @@
         </p:nvSpPr>
         <p:spPr>
           <a:xfrm>
-            <a:off x="5733288" y="7607808"/>
+            <a:off x="5733288" y="7411072"/>
             <a:ext cx="1371600" cy="548640"/>
           </a:xfrm>
           <a:prstGeom prst="rect">
@@ -3339,7 +3433,7 @@
         </p:nvSpPr>
         <p:spPr>
           <a:xfrm>
-            <a:off x="457200" y="8266176"/>
+            <a:off x="457200" y="7971072"/>
             <a:ext cx="6647688" cy="548640"/>
           </a:xfrm>
           <a:prstGeom prst="roundRect">
@@ -3352,6 +3446,13 @@
           </a:solidFill>
           <a:ln/>
         </p:spPr>
+        <p:txBody>
+          <a:bodyPr/>
+          <a:lstStyle/>
+          <a:p>
+            <a:endParaRPr lang="en-US"/>
+          </a:p>
+        </p:txBody>
       </p:sp>
       <p:sp>
         <p:nvSpPr>
@@ -3361,7 +3462,7 @@
         </p:nvSpPr>
         <p:spPr>
           <a:xfrm>
-            <a:off x="621792" y="8357616"/>
+            <a:off x="621792" y="8062512"/>
             <a:ext cx="365760" cy="365760"/>
           </a:xfrm>
           <a:prstGeom prst="ellipse">
@@ -3372,6 +3473,13 @@
           </a:solidFill>
           <a:ln/>
         </p:spPr>
+        <p:txBody>
+          <a:bodyPr/>
+          <a:lstStyle/>
+          <a:p>
+            <a:endParaRPr lang="en-US"/>
+          </a:p>
+        </p:txBody>
       </p:sp>
       <p:pic>
         <p:nvPicPr>
@@ -3389,7 +3497,7 @@
         </p:blipFill>
         <p:spPr>
           <a:xfrm>
-            <a:off x="713232" y="8449056"/>
+            <a:off x="713232" y="8153952"/>
             <a:ext cx="182880" cy="182880"/>
           </a:xfrm>
           <a:prstGeom prst="rect">
@@ -3405,7 +3513,7 @@
         </p:nvSpPr>
         <p:spPr>
           <a:xfrm>
-            <a:off x="1170432" y="8266176"/>
+            <a:off x="1170432" y="7971072"/>
             <a:ext cx="2743200" cy="548640"/>
           </a:xfrm>
           <a:prstGeom prst="rect">
@@ -3444,7 +3552,7 @@
         </p:nvSpPr>
         <p:spPr>
           <a:xfrm>
-            <a:off x="5733288" y="8266176"/>
+            <a:off x="5733288" y="7971072"/>
             <a:ext cx="1371600" cy="548640"/>
           </a:xfrm>
           <a:prstGeom prst="rect">
@@ -3483,7 +3591,7 @@
         </p:nvSpPr>
         <p:spPr>
           <a:xfrm>
-            <a:off x="457200" y="8924544"/>
+            <a:off x="457200" y="8531072"/>
             <a:ext cx="6647688" cy="548640"/>
           </a:xfrm>
           <a:prstGeom prst="roundRect">
@@ -3496,6 +3604,13 @@
           </a:solidFill>
           <a:ln/>
         </p:spPr>
+        <p:txBody>
+          <a:bodyPr/>
+          <a:lstStyle/>
+          <a:p>
+            <a:endParaRPr lang="en-US"/>
+          </a:p>
+        </p:txBody>
       </p:sp>
       <p:sp>
         <p:nvSpPr>
@@ -3505,7 +3620,7 @@
         </p:nvSpPr>
         <p:spPr>
           <a:xfrm>
-            <a:off x="621792" y="9015984"/>
+            <a:off x="621792" y="8622512"/>
             <a:ext cx="365760" cy="365760"/>
           </a:xfrm>
           <a:prstGeom prst="ellipse">
@@ -3516,6 +3631,13 @@
           </a:solidFill>
           <a:ln/>
         </p:spPr>
+        <p:txBody>
+          <a:bodyPr/>
+          <a:lstStyle/>
+          <a:p>
+            <a:endParaRPr lang="en-US"/>
+          </a:p>
+        </p:txBody>
       </p:sp>
       <p:pic>
         <p:nvPicPr>
@@ -3533,7 +3655,7 @@
         </p:blipFill>
         <p:spPr>
           <a:xfrm>
-            <a:off x="713232" y="9107424"/>
+            <a:off x="713232" y="8713952"/>
             <a:ext cx="182880" cy="182880"/>
           </a:xfrm>
           <a:prstGeom prst="rect">
@@ -3549,7 +3671,7 @@
         </p:nvSpPr>
         <p:spPr>
           <a:xfrm>
-            <a:off x="1170432" y="8924544"/>
+            <a:off x="1170432" y="8531072"/>
             <a:ext cx="2743200" cy="548640"/>
           </a:xfrm>
           <a:prstGeom prst="rect">
@@ -3588,7 +3710,7 @@
         </p:nvSpPr>
         <p:spPr>
           <a:xfrm>
-            <a:off x="5733288" y="8924544"/>
+            <a:off x="5733288" y="8531072"/>
             <a:ext cx="1371600" cy="548640"/>
           </a:xfrm>
           <a:prstGeom prst="rect">
@@ -3614,6 +3736,164 @@
                 <a:cs typeface="Manrope" pitchFamily="34" charset="-120"/>
               </a:rPr>
               <a:t>#2C7BC2</a:t>
+            </a:r>
+            <a:endParaRPr lang="en-US" sz="1100" dirty="0"/>
+          </a:p>
+        </p:txBody>
+      </p:sp>
+      <p:sp>
+        <p:nvSpPr>
+          <p:cNvPr id="54" name="Shape 37"/>
+          <p:cNvSpPr/>
+          <p:nvPr/>
+        </p:nvSpPr>
+        <p:spPr>
+          <a:xfrm>
+            <a:off x="457200" y="9091072"/>
+            <a:ext cx="6647688" cy="548640"/>
+          </a:xfrm>
+          <a:prstGeom prst="roundRect">
+            <a:avLst>
+              <a:gd name="adj" fmla="val 13333"/>
+            </a:avLst>
+          </a:prstGeom>
+          <a:solidFill>
+            <a:srgbClr val="E7F3F4"/>
+          </a:solidFill>
+          <a:ln/>
+        </p:spPr>
+        <p:txBody>
+          <a:bodyPr/>
+          <a:lstStyle/>
+          <a:p>
+            <a:endParaRPr lang="en-US"/>
+          </a:p>
+        </p:txBody>
+      </p:sp>
+      <p:sp>
+        <p:nvSpPr>
+          <p:cNvPr id="55" name="Shape 38"/>
+          <p:cNvSpPr/>
+          <p:nvPr/>
+        </p:nvSpPr>
+        <p:spPr>
+          <a:xfrm>
+            <a:off x="621792" y="9182512"/>
+            <a:ext cx="365760" cy="365760"/>
+          </a:xfrm>
+          <a:prstGeom prst="ellipse">
+            <a:avLst/>
+          </a:prstGeom>
+          <a:solidFill>
+            <a:srgbClr val="0F8B8D"/>
+          </a:solidFill>
+          <a:ln/>
+        </p:spPr>
+        <p:txBody>
+          <a:bodyPr/>
+          <a:lstStyle/>
+          <a:p>
+            <a:endParaRPr lang="en-US"/>
+          </a:p>
+        </p:txBody>
+      </p:sp>
+      <p:pic>
+        <p:nvPicPr>
+          <p:cNvPr id="56" name="Image 6" descr="preencoded.png"/>
+          <p:cNvPicPr>
+            <a:picLocks noChangeAspect="1"/>
+          </p:cNvPicPr>
+          <p:nvPr/>
+        </p:nvPicPr>
+        <p:blipFill>
+          <a:blip r:embed="rId10"/>
+          <a:stretch>
+            <a:fillRect/>
+          </a:stretch>
+        </p:blipFill>
+        <p:spPr>
+          <a:xfrm>
+            <a:off x="713232" y="9273952"/>
+            <a:ext cx="182880" cy="182880"/>
+          </a:xfrm>
+          <a:prstGeom prst="rect">
+            <a:avLst/>
+          </a:prstGeom>
+        </p:spPr>
+      </p:pic>
+      <p:sp>
+        <p:nvSpPr>
+          <p:cNvPr id="57" name="Text 39"/>
+          <p:cNvSpPr/>
+          <p:nvPr/>
+        </p:nvSpPr>
+        <p:spPr>
+          <a:xfrm>
+            <a:off x="1170432" y="9091072"/>
+            <a:ext cx="2743200" cy="548640"/>
+          </a:xfrm>
+          <a:prstGeom prst="rect">
+            <a:avLst/>
+          </a:prstGeom>
+          <a:noFill/>
+          <a:ln/>
+        </p:spPr>
+        <p:txBody>
+          <a:bodyPr wrap="square" lIns="0" tIns="0" rIns="0" bIns="0" rtlCol="0" anchor="ctr"/>
+          <a:lstStyle/>
+          <a:p>
+            <a:pPr marL="0" indent="0">
+              <a:buNone/>
+            </a:pPr>
+            <a:r>
+              <a:rPr lang="en-US" sz="1400" b="1" dirty="0">
+                <a:solidFill>
+                  <a:srgbClr val="0C2C3A"/>
+                </a:solidFill>
+                <a:latin typeface="Manrope" pitchFamily="34" charset="0"/>
+                <a:ea typeface="Manrope" pitchFamily="34" charset="-122"/>
+                <a:cs typeface="Manrope" pitchFamily="34" charset="-120"/>
+              </a:rPr>
+              <a:t>Digital Infrastructure</a:t>
+            </a:r>
+            <a:endParaRPr lang="en-US" sz="1400" dirty="0"/>
+          </a:p>
+        </p:txBody>
+      </p:sp>
+      <p:sp>
+        <p:nvSpPr>
+          <p:cNvPr id="58" name="Text 40"/>
+          <p:cNvSpPr/>
+          <p:nvPr/>
+        </p:nvSpPr>
+        <p:spPr>
+          <a:xfrm>
+            <a:off x="5733288" y="9091072"/>
+            <a:ext cx="1371600" cy="548640"/>
+          </a:xfrm>
+          <a:prstGeom prst="rect">
+            <a:avLst/>
+          </a:prstGeom>
+          <a:noFill/>
+          <a:ln/>
+        </p:spPr>
+        <p:txBody>
+          <a:bodyPr wrap="square" lIns="0" tIns="0" rIns="0" bIns="0" rtlCol="0" anchor="ctr"/>
+          <a:lstStyle/>
+          <a:p>
+            <a:pPr marL="0" indent="0" algn="r">
+              <a:buNone/>
+            </a:pPr>
+            <a:r>
+              <a:rPr lang="en-US" sz="1100" dirty="0">
+                <a:solidFill>
+                  <a:srgbClr val="6E7180"/>
+                </a:solidFill>
+                <a:latin typeface="Manrope" pitchFamily="34" charset="0"/>
+                <a:ea typeface="Manrope" pitchFamily="34" charset="-122"/>
+                <a:cs typeface="Manrope" pitchFamily="34" charset="-120"/>
+              </a:rPr>
+              <a:t>#0F8B8D</a:t>
             </a:r>
             <a:endParaRPr lang="en-US" sz="1100" dirty="0"/>
           </a:p>
@@ -3670,7 +3950,7 @@
           <p:nvPr/>
         </p:nvPicPr>
         <p:blipFill>
-          <a:blip r:embed="rId10"/>
+          <a:blip r:embed="rId11"/>
           <a:stretch>
             <a:fillRect/>
           </a:stretch>
@@ -3804,6 +4084,13 @@
           </a:solidFill>
           <a:ln/>
         </p:spPr>
+        <p:txBody>
+          <a:bodyPr/>
+          <a:lstStyle/>
+          <a:p>
+            <a:endParaRPr lang="en-US"/>
+          </a:p>
+        </p:txBody>
       </p:sp>
       <p:pic>
         <p:nvPicPr>
@@ -3972,6 +4259,13 @@
             <a:prstDash val="solid"/>
           </a:ln>
         </p:spPr>
+        <p:txBody>
+          <a:bodyPr/>
+          <a:lstStyle/>
+          <a:p>
+            <a:endParaRPr lang="en-US"/>
+          </a:p>
+        </p:txBody>
       </p:sp>
       <p:sp>
         <p:nvSpPr>
@@ -4086,6 +4380,13 @@
           </a:solidFill>
           <a:ln/>
         </p:spPr>
+        <p:txBody>
+          <a:bodyPr/>
+          <a:lstStyle/>
+          <a:p>
+            <a:endParaRPr lang="en-US"/>
+          </a:p>
+        </p:txBody>
       </p:sp>
       <p:sp>
         <p:nvSpPr>
@@ -4148,6 +4449,13 @@
           </a:solidFill>
           <a:ln/>
         </p:spPr>
+        <p:txBody>
+          <a:bodyPr/>
+          <a:lstStyle/>
+          <a:p>
+            <a:endParaRPr lang="en-US"/>
+          </a:p>
+        </p:txBody>
       </p:sp>
       <p:sp>
         <p:nvSpPr>
@@ -4168,6 +4476,13 @@
           </a:solidFill>
           <a:ln/>
         </p:spPr>
+        <p:txBody>
+          <a:bodyPr/>
+          <a:lstStyle/>
+          <a:p>
+            <a:endParaRPr lang="en-US"/>
+          </a:p>
+        </p:txBody>
       </p:sp>
       <p:sp>
         <p:nvSpPr>
@@ -4188,6 +4503,13 @@
           </a:solidFill>
           <a:ln/>
         </p:spPr>
+        <p:txBody>
+          <a:bodyPr/>
+          <a:lstStyle/>
+          <a:p>
+            <a:endParaRPr lang="en-US"/>
+          </a:p>
+        </p:txBody>
       </p:sp>
       <p:sp>
         <p:nvSpPr>
@@ -4208,6 +4530,13 @@
           </a:solidFill>
           <a:ln/>
         </p:spPr>
+        <p:txBody>
+          <a:bodyPr/>
+          <a:lstStyle/>
+          <a:p>
+            <a:endParaRPr lang="en-US"/>
+          </a:p>
+        </p:txBody>
       </p:sp>
       <p:sp>
         <p:nvSpPr>
@@ -4391,6 +4720,13 @@
             <a:prstDash val="solid"/>
           </a:ln>
         </p:spPr>
+        <p:txBody>
+          <a:bodyPr/>
+          <a:lstStyle/>
+          <a:p>
+            <a:endParaRPr lang="en-US"/>
+          </a:p>
+        </p:txBody>
       </p:sp>
       <p:sp>
         <p:nvSpPr>
@@ -4499,6 +4835,13 @@
             <a:prstDash val="solid"/>
           </a:ln>
         </p:spPr>
+        <p:txBody>
+          <a:bodyPr/>
+          <a:lstStyle/>
+          <a:p>
+            <a:endParaRPr lang="en-US"/>
+          </a:p>
+        </p:txBody>
       </p:sp>
       <p:sp>
         <p:nvSpPr>
@@ -4568,6 +4911,13 @@
             <a:prstDash val="solid"/>
           </a:ln>
         </p:spPr>
+        <p:txBody>
+          <a:bodyPr/>
+          <a:lstStyle/>
+          <a:p>
+            <a:endParaRPr lang="en-US"/>
+          </a:p>
+        </p:txBody>
       </p:sp>
       <p:sp>
         <p:nvSpPr>
@@ -4676,6 +5026,13 @@
             <a:prstDash val="solid"/>
           </a:ln>
         </p:spPr>
+        <p:txBody>
+          <a:bodyPr/>
+          <a:lstStyle/>
+          <a:p>
+            <a:endParaRPr lang="en-US"/>
+          </a:p>
+        </p:txBody>
       </p:sp>
       <p:sp>
         <p:nvSpPr>
@@ -4738,6 +5095,13 @@
           </a:solidFill>
           <a:ln/>
         </p:spPr>
+        <p:txBody>
+          <a:bodyPr/>
+          <a:lstStyle/>
+          <a:p>
+            <a:endParaRPr lang="en-US"/>
+          </a:p>
+        </p:txBody>
       </p:sp>
       <p:sp>
         <p:nvSpPr>
@@ -4758,6 +5122,13 @@
           </a:solidFill>
           <a:ln/>
         </p:spPr>
+        <p:txBody>
+          <a:bodyPr/>
+          <a:lstStyle/>
+          <a:p>
+            <a:endParaRPr lang="en-US"/>
+          </a:p>
+        </p:txBody>
       </p:sp>
       <p:sp>
         <p:nvSpPr>
@@ -4778,6 +5149,13 @@
           </a:solidFill>
           <a:ln/>
         </p:spPr>
+        <p:txBody>
+          <a:bodyPr/>
+          <a:lstStyle/>
+          <a:p>
+            <a:endParaRPr lang="en-US"/>
+          </a:p>
+        </p:txBody>
       </p:sp>
       <p:sp>
         <p:nvSpPr>
@@ -4798,6 +5176,13 @@
           </a:solidFill>
           <a:ln/>
         </p:spPr>
+        <p:txBody>
+          <a:bodyPr/>
+          <a:lstStyle/>
+          <a:p>
+            <a:endParaRPr lang="en-US"/>
+          </a:p>
+        </p:txBody>
       </p:sp>
       <p:sp>
         <p:nvSpPr>
@@ -4859,6 +5244,13 @@
           </a:solidFill>
           <a:ln/>
         </p:spPr>
+        <p:txBody>
+          <a:bodyPr/>
+          <a:lstStyle/>
+          <a:p>
+            <a:endParaRPr lang="en-US"/>
+          </a:p>
+        </p:txBody>
       </p:sp>
       <p:sp>
         <p:nvSpPr>
@@ -5056,6 +5448,13 @@
           </a:solidFill>
           <a:ln/>
         </p:spPr>
+        <p:txBody>
+          <a:bodyPr/>
+          <a:lstStyle/>
+          <a:p>
+            <a:endParaRPr lang="en-US"/>
+          </a:p>
+        </p:txBody>
       </p:sp>
       <p:pic>
         <p:nvPicPr>
@@ -5217,6 +5616,13 @@
           </a:solidFill>
           <a:ln/>
         </p:spPr>
+        <p:txBody>
+          <a:bodyPr/>
+          <a:lstStyle/>
+          <a:p>
+            <a:endParaRPr lang="en-US"/>
+          </a:p>
+        </p:txBody>
       </p:sp>
       <p:pic>
         <p:nvPicPr>
@@ -5373,6 +5779,13 @@
           </a:solidFill>
           <a:ln/>
         </p:spPr>
+        <p:txBody>
+          <a:bodyPr/>
+          <a:lstStyle/>
+          <a:p>
+            <a:endParaRPr lang="en-US"/>
+          </a:p>
+        </p:txBody>
       </p:sp>
       <p:pic>
         <p:nvPicPr>
@@ -5529,6 +5942,13 @@
           </a:solidFill>
           <a:ln/>
         </p:spPr>
+        <p:txBody>
+          <a:bodyPr/>
+          <a:lstStyle/>
+          <a:p>
+            <a:endParaRPr lang="en-US"/>
+          </a:p>
+        </p:txBody>
       </p:sp>
       <p:pic>
         <p:nvPicPr>
@@ -5685,6 +6105,13 @@
           </a:solidFill>
           <a:ln/>
         </p:spPr>
+        <p:txBody>
+          <a:bodyPr/>
+          <a:lstStyle/>
+          <a:p>
+            <a:endParaRPr lang="en-US"/>
+          </a:p>
+        </p:txBody>
       </p:sp>
       <p:pic>
         <p:nvPicPr>
@@ -5841,6 +6268,13 @@
           </a:solidFill>
           <a:ln/>
         </p:spPr>
+        <p:txBody>
+          <a:bodyPr/>
+          <a:lstStyle/>
+          <a:p>
+            <a:endParaRPr lang="en-US"/>
+          </a:p>
+        </p:txBody>
       </p:sp>
       <p:pic>
         <p:nvPicPr>
@@ -5999,6 +6433,13 @@
           </a:solidFill>
           <a:ln/>
         </p:spPr>
+        <p:txBody>
+          <a:bodyPr/>
+          <a:lstStyle/>
+          <a:p>
+            <a:endParaRPr lang="en-US"/>
+          </a:p>
+        </p:txBody>
       </p:sp>
       <p:sp>
         <p:nvSpPr>
@@ -6102,6 +6543,13 @@
           </a:solidFill>
           <a:ln/>
         </p:spPr>
+        <p:txBody>
+          <a:bodyPr/>
+          <a:lstStyle/>
+          <a:p>
+            <a:endParaRPr lang="en-US"/>
+          </a:p>
+        </p:txBody>
       </p:sp>
       <p:sp>
         <p:nvSpPr>
@@ -6338,6 +6786,13 @@
           </a:solidFill>
           <a:ln/>
         </p:spPr>
+        <p:txBody>
+          <a:bodyPr/>
+          <a:lstStyle/>
+          <a:p>
+            <a:endParaRPr lang="en-US"/>
+          </a:p>
+        </p:txBody>
       </p:sp>
       <p:pic>
         <p:nvPicPr>
@@ -6501,6 +6956,13 @@
           </a:solidFill>
           <a:ln/>
         </p:spPr>
+        <p:txBody>
+          <a:bodyPr/>
+          <a:lstStyle/>
+          <a:p>
+            <a:endParaRPr lang="en-US"/>
+          </a:p>
+        </p:txBody>
       </p:sp>
       <p:sp>
         <p:nvSpPr>
@@ -6521,6 +6983,13 @@
           </a:solidFill>
           <a:ln/>
         </p:spPr>
+        <p:txBody>
+          <a:bodyPr/>
+          <a:lstStyle/>
+          <a:p>
+            <a:endParaRPr lang="en-US"/>
+          </a:p>
+        </p:txBody>
       </p:sp>
       <p:pic>
         <p:nvPicPr>
@@ -6611,6 +7080,13 @@
             <a:prstDash val="solid"/>
           </a:ln>
         </p:spPr>
+        <p:txBody>
+          <a:bodyPr/>
+          <a:lstStyle/>
+          <a:p>
+            <a:endParaRPr lang="en-US"/>
+          </a:p>
+        </p:txBody>
       </p:sp>
       <p:sp>
         <p:nvSpPr>
@@ -6631,6 +7107,13 @@
           </a:solidFill>
           <a:ln/>
         </p:spPr>
+        <p:txBody>
+          <a:bodyPr/>
+          <a:lstStyle/>
+          <a:p>
+            <a:endParaRPr lang="en-US"/>
+          </a:p>
+        </p:txBody>
       </p:sp>
       <p:sp>
         <p:nvSpPr>
@@ -6789,6 +7272,13 @@
             <a:prstDash val="solid"/>
           </a:ln>
         </p:spPr>
+        <p:txBody>
+          <a:bodyPr/>
+          <a:lstStyle/>
+          <a:p>
+            <a:endParaRPr lang="en-US"/>
+          </a:p>
+        </p:txBody>
       </p:sp>
       <p:sp>
         <p:nvSpPr>
@@ -6809,6 +7299,13 @@
           </a:solidFill>
           <a:ln/>
         </p:spPr>
+        <p:txBody>
+          <a:bodyPr/>
+          <a:lstStyle/>
+          <a:p>
+            <a:endParaRPr lang="en-US"/>
+          </a:p>
+        </p:txBody>
       </p:sp>
       <p:sp>
         <p:nvSpPr>
@@ -6967,6 +7464,13 @@
             <a:prstDash val="solid"/>
           </a:ln>
         </p:spPr>
+        <p:txBody>
+          <a:bodyPr/>
+          <a:lstStyle/>
+          <a:p>
+            <a:endParaRPr lang="en-US"/>
+          </a:p>
+        </p:txBody>
       </p:sp>
       <p:sp>
         <p:nvSpPr>
@@ -6987,6 +7491,13 @@
           </a:solidFill>
           <a:ln/>
         </p:spPr>
+        <p:txBody>
+          <a:bodyPr/>
+          <a:lstStyle/>
+          <a:p>
+            <a:endParaRPr lang="en-US"/>
+          </a:p>
+        </p:txBody>
       </p:sp>
       <p:sp>
         <p:nvSpPr>
@@ -7145,6 +7656,13 @@
             <a:prstDash val="solid"/>
           </a:ln>
         </p:spPr>
+        <p:txBody>
+          <a:bodyPr/>
+          <a:lstStyle/>
+          <a:p>
+            <a:endParaRPr lang="en-US"/>
+          </a:p>
+        </p:txBody>
       </p:sp>
       <p:sp>
         <p:nvSpPr>
@@ -7165,6 +7683,13 @@
           </a:solidFill>
           <a:ln/>
         </p:spPr>
+        <p:txBody>
+          <a:bodyPr/>
+          <a:lstStyle/>
+          <a:p>
+            <a:endParaRPr lang="en-US"/>
+          </a:p>
+        </p:txBody>
       </p:sp>
       <p:sp>
         <p:nvSpPr>
@@ -7412,6 +7937,13 @@
           </a:solidFill>
           <a:ln/>
         </p:spPr>
+        <p:txBody>
+          <a:bodyPr/>
+          <a:lstStyle/>
+          <a:p>
+            <a:endParaRPr lang="en-US"/>
+          </a:p>
+        </p:txBody>
       </p:sp>
       <p:pic>
         <p:nvPicPr>
@@ -7580,6 +8112,13 @@
             <a:prstDash val="solid"/>
           </a:ln>
         </p:spPr>
+        <p:txBody>
+          <a:bodyPr/>
+          <a:lstStyle/>
+          <a:p>
+            <a:endParaRPr lang="en-US"/>
+          </a:p>
+        </p:txBody>
       </p:sp>
       <p:sp>
         <p:nvSpPr>
@@ -7694,6 +8233,13 @@
           </a:solidFill>
           <a:ln/>
         </p:spPr>
+        <p:txBody>
+          <a:bodyPr/>
+          <a:lstStyle/>
+          <a:p>
+            <a:endParaRPr lang="en-US"/>
+          </a:p>
+        </p:txBody>
       </p:sp>
       <p:sp>
         <p:nvSpPr>
@@ -7756,6 +8302,13 @@
           </a:solidFill>
           <a:ln/>
         </p:spPr>
+        <p:txBody>
+          <a:bodyPr/>
+          <a:lstStyle/>
+          <a:p>
+            <a:endParaRPr lang="en-US"/>
+          </a:p>
+        </p:txBody>
       </p:sp>
       <p:sp>
         <p:nvSpPr>
@@ -7776,6 +8329,13 @@
           </a:solidFill>
           <a:ln/>
         </p:spPr>
+        <p:txBody>
+          <a:bodyPr/>
+          <a:lstStyle/>
+          <a:p>
+            <a:endParaRPr lang="en-US"/>
+          </a:p>
+        </p:txBody>
       </p:sp>
       <p:sp>
         <p:nvSpPr>
@@ -7796,6 +8356,13 @@
           </a:solidFill>
           <a:ln/>
         </p:spPr>
+        <p:txBody>
+          <a:bodyPr/>
+          <a:lstStyle/>
+          <a:p>
+            <a:endParaRPr lang="en-US"/>
+          </a:p>
+        </p:txBody>
       </p:sp>
       <p:sp>
         <p:nvSpPr>
@@ -7816,6 +8383,13 @@
           </a:solidFill>
           <a:ln/>
         </p:spPr>
+        <p:txBody>
+          <a:bodyPr/>
+          <a:lstStyle/>
+          <a:p>
+            <a:endParaRPr lang="en-US"/>
+          </a:p>
+        </p:txBody>
       </p:sp>
       <p:sp>
         <p:nvSpPr>
@@ -7999,6 +8573,13 @@
             <a:prstDash val="solid"/>
           </a:ln>
         </p:spPr>
+        <p:txBody>
+          <a:bodyPr/>
+          <a:lstStyle/>
+          <a:p>
+            <a:endParaRPr lang="en-US"/>
+          </a:p>
+        </p:txBody>
       </p:sp>
       <p:sp>
         <p:nvSpPr>
@@ -8107,6 +8688,13 @@
             <a:prstDash val="solid"/>
           </a:ln>
         </p:spPr>
+        <p:txBody>
+          <a:bodyPr/>
+          <a:lstStyle/>
+          <a:p>
+            <a:endParaRPr lang="en-US"/>
+          </a:p>
+        </p:txBody>
       </p:sp>
       <p:sp>
         <p:nvSpPr>
@@ -8176,6 +8764,13 @@
             <a:prstDash val="solid"/>
           </a:ln>
         </p:spPr>
+        <p:txBody>
+          <a:bodyPr/>
+          <a:lstStyle/>
+          <a:p>
+            <a:endParaRPr lang="en-US"/>
+          </a:p>
+        </p:txBody>
       </p:sp>
       <p:sp>
         <p:nvSpPr>
@@ -8284,6 +8879,13 @@
             <a:prstDash val="solid"/>
           </a:ln>
         </p:spPr>
+        <p:txBody>
+          <a:bodyPr/>
+          <a:lstStyle/>
+          <a:p>
+            <a:endParaRPr lang="en-US"/>
+          </a:p>
+        </p:txBody>
       </p:sp>
       <p:sp>
         <p:nvSpPr>
@@ -8346,6 +8948,13 @@
           </a:solidFill>
           <a:ln/>
         </p:spPr>
+        <p:txBody>
+          <a:bodyPr/>
+          <a:lstStyle/>
+          <a:p>
+            <a:endParaRPr lang="en-US"/>
+          </a:p>
+        </p:txBody>
       </p:sp>
       <p:sp>
         <p:nvSpPr>
@@ -8366,6 +8975,13 @@
           </a:solidFill>
           <a:ln/>
         </p:spPr>
+        <p:txBody>
+          <a:bodyPr/>
+          <a:lstStyle/>
+          <a:p>
+            <a:endParaRPr lang="en-US"/>
+          </a:p>
+        </p:txBody>
       </p:sp>
       <p:sp>
         <p:nvSpPr>
@@ -8386,6 +9002,13 @@
           </a:solidFill>
           <a:ln/>
         </p:spPr>
+        <p:txBody>
+          <a:bodyPr/>
+          <a:lstStyle/>
+          <a:p>
+            <a:endParaRPr lang="en-US"/>
+          </a:p>
+        </p:txBody>
       </p:sp>
       <p:sp>
         <p:nvSpPr>
@@ -8406,6 +9029,13 @@
           </a:solidFill>
           <a:ln/>
         </p:spPr>
+        <p:txBody>
+          <a:bodyPr/>
+          <a:lstStyle/>
+          <a:p>
+            <a:endParaRPr lang="en-US"/>
+          </a:p>
+        </p:txBody>
       </p:sp>
       <p:sp>
         <p:nvSpPr>
@@ -8467,6 +9097,13 @@
           </a:solidFill>
           <a:ln/>
         </p:spPr>
+        <p:txBody>
+          <a:bodyPr/>
+          <a:lstStyle/>
+          <a:p>
+            <a:endParaRPr lang="en-US"/>
+          </a:p>
+        </p:txBody>
       </p:sp>
       <p:sp>
         <p:nvSpPr>
@@ -8664,6 +9301,13 @@
           </a:solidFill>
           <a:ln/>
         </p:spPr>
+        <p:txBody>
+          <a:bodyPr/>
+          <a:lstStyle/>
+          <a:p>
+            <a:endParaRPr lang="en-US"/>
+          </a:p>
+        </p:txBody>
       </p:sp>
       <p:pic>
         <p:nvPicPr>
@@ -8825,6 +9469,13 @@
           </a:solidFill>
           <a:ln/>
         </p:spPr>
+        <p:txBody>
+          <a:bodyPr/>
+          <a:lstStyle/>
+          <a:p>
+            <a:endParaRPr lang="en-US"/>
+          </a:p>
+        </p:txBody>
       </p:sp>
       <p:pic>
         <p:nvPicPr>
@@ -8981,6 +9632,13 @@
           </a:solidFill>
           <a:ln/>
         </p:spPr>
+        <p:txBody>
+          <a:bodyPr/>
+          <a:lstStyle/>
+          <a:p>
+            <a:endParaRPr lang="en-US"/>
+          </a:p>
+        </p:txBody>
       </p:sp>
       <p:pic>
         <p:nvPicPr>
@@ -9137,6 +9795,13 @@
           </a:solidFill>
           <a:ln/>
         </p:spPr>
+        <p:txBody>
+          <a:bodyPr/>
+          <a:lstStyle/>
+          <a:p>
+            <a:endParaRPr lang="en-US"/>
+          </a:p>
+        </p:txBody>
       </p:sp>
       <p:pic>
         <p:nvPicPr>
@@ -9293,6 +9958,13 @@
           </a:solidFill>
           <a:ln/>
         </p:spPr>
+        <p:txBody>
+          <a:bodyPr/>
+          <a:lstStyle/>
+          <a:p>
+            <a:endParaRPr lang="en-US"/>
+          </a:p>
+        </p:txBody>
       </p:sp>
       <p:pic>
         <p:nvPicPr>
@@ -9449,6 +10121,13 @@
           </a:solidFill>
           <a:ln/>
         </p:spPr>
+        <p:txBody>
+          <a:bodyPr/>
+          <a:lstStyle/>
+          <a:p>
+            <a:endParaRPr lang="en-US"/>
+          </a:p>
+        </p:txBody>
       </p:sp>
       <p:pic>
         <p:nvPicPr>
@@ -9607,6 +10286,13 @@
           </a:solidFill>
           <a:ln/>
         </p:spPr>
+        <p:txBody>
+          <a:bodyPr/>
+          <a:lstStyle/>
+          <a:p>
+            <a:endParaRPr lang="en-US"/>
+          </a:p>
+        </p:txBody>
       </p:sp>
       <p:sp>
         <p:nvSpPr>
@@ -9710,6 +10396,13 @@
           </a:solidFill>
           <a:ln/>
         </p:spPr>
+        <p:txBody>
+          <a:bodyPr/>
+          <a:lstStyle/>
+          <a:p>
+            <a:endParaRPr lang="en-US"/>
+          </a:p>
+        </p:txBody>
       </p:sp>
       <p:sp>
         <p:nvSpPr>
@@ -9946,6 +10639,13 @@
           </a:solidFill>
           <a:ln/>
         </p:spPr>
+        <p:txBody>
+          <a:bodyPr/>
+          <a:lstStyle/>
+          <a:p>
+            <a:endParaRPr lang="en-US"/>
+          </a:p>
+        </p:txBody>
       </p:sp>
       <p:pic>
         <p:nvPicPr>
@@ -10109,6 +10809,13 @@
           </a:solidFill>
           <a:ln/>
         </p:spPr>
+        <p:txBody>
+          <a:bodyPr/>
+          <a:lstStyle/>
+          <a:p>
+            <a:endParaRPr lang="en-US"/>
+          </a:p>
+        </p:txBody>
       </p:sp>
       <p:sp>
         <p:nvSpPr>
@@ -10129,6 +10836,13 @@
           </a:solidFill>
           <a:ln/>
         </p:spPr>
+        <p:txBody>
+          <a:bodyPr/>
+          <a:lstStyle/>
+          <a:p>
+            <a:endParaRPr lang="en-US"/>
+          </a:p>
+        </p:txBody>
       </p:sp>
       <p:pic>
         <p:nvPicPr>
@@ -10219,6 +10933,13 @@
             <a:prstDash val="solid"/>
           </a:ln>
         </p:spPr>
+        <p:txBody>
+          <a:bodyPr/>
+          <a:lstStyle/>
+          <a:p>
+            <a:endParaRPr lang="en-US"/>
+          </a:p>
+        </p:txBody>
       </p:sp>
       <p:sp>
         <p:nvSpPr>
@@ -10239,6 +10960,13 @@
           </a:solidFill>
           <a:ln/>
         </p:spPr>
+        <p:txBody>
+          <a:bodyPr/>
+          <a:lstStyle/>
+          <a:p>
+            <a:endParaRPr lang="en-US"/>
+          </a:p>
+        </p:txBody>
       </p:sp>
       <p:sp>
         <p:nvSpPr>
@@ -10397,6 +11125,13 @@
             <a:prstDash val="solid"/>
           </a:ln>
         </p:spPr>
+        <p:txBody>
+          <a:bodyPr/>
+          <a:lstStyle/>
+          <a:p>
+            <a:endParaRPr lang="en-US"/>
+          </a:p>
+        </p:txBody>
       </p:sp>
       <p:sp>
         <p:nvSpPr>
@@ -10417,6 +11152,13 @@
           </a:solidFill>
           <a:ln/>
         </p:spPr>
+        <p:txBody>
+          <a:bodyPr/>
+          <a:lstStyle/>
+          <a:p>
+            <a:endParaRPr lang="en-US"/>
+          </a:p>
+        </p:txBody>
       </p:sp>
       <p:sp>
         <p:nvSpPr>
@@ -10575,6 +11317,13 @@
             <a:prstDash val="solid"/>
           </a:ln>
         </p:spPr>
+        <p:txBody>
+          <a:bodyPr/>
+          <a:lstStyle/>
+          <a:p>
+            <a:endParaRPr lang="en-US"/>
+          </a:p>
+        </p:txBody>
       </p:sp>
       <p:sp>
         <p:nvSpPr>
@@ -10595,6 +11344,13 @@
           </a:solidFill>
           <a:ln/>
         </p:spPr>
+        <p:txBody>
+          <a:bodyPr/>
+          <a:lstStyle/>
+          <a:p>
+            <a:endParaRPr lang="en-US"/>
+          </a:p>
+        </p:txBody>
       </p:sp>
       <p:sp>
         <p:nvSpPr>
@@ -10753,6 +11509,13 @@
             <a:prstDash val="solid"/>
           </a:ln>
         </p:spPr>
+        <p:txBody>
+          <a:bodyPr/>
+          <a:lstStyle/>
+          <a:p>
+            <a:endParaRPr lang="en-US"/>
+          </a:p>
+        </p:txBody>
       </p:sp>
       <p:sp>
         <p:nvSpPr>
@@ -10773,6 +11536,13 @@
           </a:solidFill>
           <a:ln/>
         </p:spPr>
+        <p:txBody>
+          <a:bodyPr/>
+          <a:lstStyle/>
+          <a:p>
+            <a:endParaRPr lang="en-US"/>
+          </a:p>
+        </p:txBody>
       </p:sp>
       <p:sp>
         <p:nvSpPr>
@@ -11020,6 +11790,13 @@
           </a:solidFill>
           <a:ln/>
         </p:spPr>
+        <p:txBody>
+          <a:bodyPr/>
+          <a:lstStyle/>
+          <a:p>
+            <a:endParaRPr lang="en-US"/>
+          </a:p>
+        </p:txBody>
       </p:sp>
       <p:pic>
         <p:nvPicPr>
@@ -11188,6 +11965,13 @@
             <a:prstDash val="solid"/>
           </a:ln>
         </p:spPr>
+        <p:txBody>
+          <a:bodyPr/>
+          <a:lstStyle/>
+          <a:p>
+            <a:endParaRPr lang="en-US"/>
+          </a:p>
+        </p:txBody>
       </p:sp>
       <p:sp>
         <p:nvSpPr>
@@ -11302,6 +12086,13 @@
           </a:solidFill>
           <a:ln/>
         </p:spPr>
+        <p:txBody>
+          <a:bodyPr/>
+          <a:lstStyle/>
+          <a:p>
+            <a:endParaRPr lang="en-US"/>
+          </a:p>
+        </p:txBody>
       </p:sp>
       <p:sp>
         <p:nvSpPr>
@@ -11364,6 +12155,13 @@
           </a:solidFill>
           <a:ln/>
         </p:spPr>
+        <p:txBody>
+          <a:bodyPr/>
+          <a:lstStyle/>
+          <a:p>
+            <a:endParaRPr lang="en-US"/>
+          </a:p>
+        </p:txBody>
       </p:sp>
       <p:sp>
         <p:nvSpPr>
@@ -11384,6 +12182,13 @@
           </a:solidFill>
           <a:ln/>
         </p:spPr>
+        <p:txBody>
+          <a:bodyPr/>
+          <a:lstStyle/>
+          <a:p>
+            <a:endParaRPr lang="en-US"/>
+          </a:p>
+        </p:txBody>
       </p:sp>
       <p:sp>
         <p:nvSpPr>
@@ -11404,6 +12209,13 @@
           </a:solidFill>
           <a:ln/>
         </p:spPr>
+        <p:txBody>
+          <a:bodyPr/>
+          <a:lstStyle/>
+          <a:p>
+            <a:endParaRPr lang="en-US"/>
+          </a:p>
+        </p:txBody>
       </p:sp>
       <p:sp>
         <p:nvSpPr>
@@ -11424,6 +12236,13 @@
           </a:solidFill>
           <a:ln/>
         </p:spPr>
+        <p:txBody>
+          <a:bodyPr/>
+          <a:lstStyle/>
+          <a:p>
+            <a:endParaRPr lang="en-US"/>
+          </a:p>
+        </p:txBody>
       </p:sp>
       <p:sp>
         <p:nvSpPr>
@@ -11607,6 +12426,13 @@
             <a:prstDash val="solid"/>
           </a:ln>
         </p:spPr>
+        <p:txBody>
+          <a:bodyPr/>
+          <a:lstStyle/>
+          <a:p>
+            <a:endParaRPr lang="en-US"/>
+          </a:p>
+        </p:txBody>
       </p:sp>
       <p:sp>
         <p:nvSpPr>
@@ -11715,6 +12541,13 @@
             <a:prstDash val="solid"/>
           </a:ln>
         </p:spPr>
+        <p:txBody>
+          <a:bodyPr/>
+          <a:lstStyle/>
+          <a:p>
+            <a:endParaRPr lang="en-US"/>
+          </a:p>
+        </p:txBody>
       </p:sp>
       <p:sp>
         <p:nvSpPr>
@@ -11784,6 +12617,13 @@
             <a:prstDash val="solid"/>
           </a:ln>
         </p:spPr>
+        <p:txBody>
+          <a:bodyPr/>
+          <a:lstStyle/>
+          <a:p>
+            <a:endParaRPr lang="en-US"/>
+          </a:p>
+        </p:txBody>
       </p:sp>
       <p:sp>
         <p:nvSpPr>
@@ -11892,6 +12732,13 @@
             <a:prstDash val="solid"/>
           </a:ln>
         </p:spPr>
+        <p:txBody>
+          <a:bodyPr/>
+          <a:lstStyle/>
+          <a:p>
+            <a:endParaRPr lang="en-US"/>
+          </a:p>
+        </p:txBody>
       </p:sp>
       <p:sp>
         <p:nvSpPr>
@@ -11954,6 +12801,13 @@
           </a:solidFill>
           <a:ln/>
         </p:spPr>
+        <p:txBody>
+          <a:bodyPr/>
+          <a:lstStyle/>
+          <a:p>
+            <a:endParaRPr lang="en-US"/>
+          </a:p>
+        </p:txBody>
       </p:sp>
       <p:sp>
         <p:nvSpPr>
@@ -11974,6 +12828,13 @@
           </a:solidFill>
           <a:ln/>
         </p:spPr>
+        <p:txBody>
+          <a:bodyPr/>
+          <a:lstStyle/>
+          <a:p>
+            <a:endParaRPr lang="en-US"/>
+          </a:p>
+        </p:txBody>
       </p:sp>
       <p:sp>
         <p:nvSpPr>
@@ -11994,6 +12855,13 @@
           </a:solidFill>
           <a:ln/>
         </p:spPr>
+        <p:txBody>
+          <a:bodyPr/>
+          <a:lstStyle/>
+          <a:p>
+            <a:endParaRPr lang="en-US"/>
+          </a:p>
+        </p:txBody>
       </p:sp>
       <p:sp>
         <p:nvSpPr>
@@ -12014,6 +12882,13 @@
           </a:solidFill>
           <a:ln/>
         </p:spPr>
+        <p:txBody>
+          <a:bodyPr/>
+          <a:lstStyle/>
+          <a:p>
+            <a:endParaRPr lang="en-US"/>
+          </a:p>
+        </p:txBody>
       </p:sp>
       <p:sp>
         <p:nvSpPr>
@@ -12075,6 +12950,13 @@
           </a:solidFill>
           <a:ln/>
         </p:spPr>
+        <p:txBody>
+          <a:bodyPr/>
+          <a:lstStyle/>
+          <a:p>
+            <a:endParaRPr lang="en-US"/>
+          </a:p>
+        </p:txBody>
       </p:sp>
       <p:sp>
         <p:nvSpPr>
@@ -12128,6 +13010,3859 @@
         </p:nvPicPr>
         <p:blipFill>
           <a:blip r:embed="rId4"/>
+          <a:stretch>
+            <a:fillRect/>
+          </a:stretch>
+        </p:blipFill>
+        <p:spPr>
+          <a:xfrm>
+            <a:off x="457200" y="10268712"/>
+            <a:ext cx="201168" cy="201168"/>
+          </a:xfrm>
+          <a:prstGeom prst="rect">
+            <a:avLst/>
+          </a:prstGeom>
+        </p:spPr>
+      </p:pic>
+      <p:sp>
+        <p:nvSpPr>
+          <p:cNvPr id="38" name="Text 34"/>
+          <p:cNvSpPr/>
+          <p:nvPr/>
+        </p:nvSpPr>
+        <p:spPr>
+          <a:xfrm>
+            <a:off x="731520" y="10259568"/>
+            <a:ext cx="3108960" cy="219456"/>
+          </a:xfrm>
+          <a:prstGeom prst="rect">
+            <a:avLst/>
+          </a:prstGeom>
+          <a:noFill/>
+          <a:ln/>
+        </p:spPr>
+        <p:txBody>
+          <a:bodyPr wrap="square" lIns="0" tIns="0" rIns="0" bIns="0" rtlCol="0" anchor="ctr"/>
+          <a:lstStyle/>
+          <a:p>
+            <a:pPr marL="0" indent="0">
+              <a:buNone/>
+            </a:pPr>
+            <a:r>
+              <a:rPr lang="en-US" sz="900" dirty="0">
+                <a:solidFill>
+                  <a:srgbClr val="6E7180"/>
+                </a:solidFill>
+                <a:latin typeface="Manrope" pitchFamily="34" charset="0"/>
+                <a:ea typeface="Manrope" pitchFamily="34" charset="-122"/>
+                <a:cs typeface="Manrope" pitchFamily="34" charset="-120"/>
+              </a:rPr>
+              <a:t>Aqualogic, a Sustec company</a:t>
+            </a:r>
+            <a:endParaRPr lang="en-US" sz="900" dirty="0"/>
+          </a:p>
+        </p:txBody>
+      </p:sp>
+      <p:sp>
+        <p:nvSpPr>
+          <p:cNvPr id="39" name="Text 35"/>
+          <p:cNvSpPr/>
+          <p:nvPr/>
+        </p:nvSpPr>
+        <p:spPr>
+          <a:xfrm>
+            <a:off x="3355848" y="10259568"/>
+            <a:ext cx="3749040" cy="219456"/>
+          </a:xfrm>
+          <a:prstGeom prst="rect">
+            <a:avLst/>
+          </a:prstGeom>
+          <a:noFill/>
+          <a:ln/>
+        </p:spPr>
+        <p:txBody>
+          <a:bodyPr wrap="square" lIns="0" tIns="0" rIns="0" bIns="0" rtlCol="0" anchor="ctr"/>
+          <a:lstStyle/>
+          <a:p>
+            <a:pPr marL="0" indent="0" algn="r">
+              <a:buNone/>
+            </a:pPr>
+            <a:r>
+              <a:rPr lang="en-US" sz="900" i="1" dirty="0">
+                <a:solidFill>
+                  <a:srgbClr val="BCBFCC"/>
+                </a:solidFill>
+                <a:latin typeface="Manrope" pitchFamily="34" charset="0"/>
+                <a:ea typeface="Manrope" pitchFamily="34" charset="-122"/>
+                <a:cs typeface="Manrope" pitchFamily="34" charset="-120"/>
+              </a:rPr>
+              <a:t>For the detail, see the full procedure in the IMS.</a:t>
+            </a:r>
+            <a:endParaRPr lang="en-US" sz="900" dirty="0"/>
+          </a:p>
+        </p:txBody>
+      </p:sp>
+    </p:spTree>
+  </p:cSld>
+  <p:clrMapOvr>
+    <a:masterClrMapping/>
+  </p:clrMapOvr>
+</p:sld>
+</file>
+
+<file path=ppt/slides/slide17.xml><?xml version="1.0" encoding="utf-8"?>
+<p:sld xmlns:a="http://schemas.openxmlformats.org/drawingml/2006/main" xmlns:r="http://schemas.openxmlformats.org/officeDocument/2006/relationships" xmlns:p="http://schemas.openxmlformats.org/presentationml/2006/main">
+  <p:cSld name="Slide 14">
+    <p:bg>
+      <p:bgPr>
+        <a:solidFill>
+          <a:srgbClr val="FAFBFF"/>
+        </a:solidFill>
+        <a:effectLst/>
+      </p:bgPr>
+    </p:bg>
+    <p:spTree>
+      <p:nvGrpSpPr>
+        <p:cNvPr id="1" name=""/>
+        <p:cNvGrpSpPr/>
+        <p:nvPr/>
+      </p:nvGrpSpPr>
+      <p:grpSpPr>
+        <a:xfrm>
+          <a:off x="0" y="0"/>
+          <a:ext cx="0" cy="0"/>
+          <a:chOff x="0" y="0"/>
+          <a:chExt cx="0" cy="0"/>
+        </a:xfrm>
+      </p:grpSpPr>
+      <p:sp>
+        <p:nvSpPr>
+          <p:cNvPr id="2" name="Shape 0"/>
+          <p:cNvSpPr/>
+          <p:nvPr/>
+        </p:nvSpPr>
+        <p:spPr>
+          <a:xfrm>
+            <a:off x="0" y="0"/>
+            <a:ext cx="7562088" cy="1801368"/>
+          </a:xfrm>
+          <a:prstGeom prst="rect">
+            <a:avLst/>
+          </a:prstGeom>
+          <a:solidFill>
+            <a:srgbClr val="0F8B8D"/>
+          </a:solidFill>
+          <a:ln/>
+        </p:spPr>
+        <p:txBody>
+          <a:bodyPr/>
+          <a:lstStyle/>
+          <a:p>
+            <a:endParaRPr lang="en-US"/>
+          </a:p>
+        </p:txBody>
+      </p:sp>
+      <p:pic>
+        <p:nvPicPr>
+          <p:cNvPr id="3" name="Image 0" descr="/home/claude/deck/img/logo_rev.png"/>
+          <p:cNvPicPr>
+            <a:picLocks noChangeAspect="1"/>
+          </p:cNvPicPr>
+          <p:nvPr/>
+        </p:nvPicPr>
+        <p:blipFill>
+          <a:blip r:embed="rId2"/>
+          <a:stretch>
+            <a:fillRect/>
+          </a:stretch>
+        </p:blipFill>
+        <p:spPr>
+          <a:xfrm>
+            <a:off x="457200" y="256032"/>
+            <a:ext cx="1371600" cy="451333"/>
+          </a:xfrm>
+          <a:prstGeom prst="rect">
+            <a:avLst/>
+          </a:prstGeom>
+        </p:spPr>
+      </p:pic>
+      <p:sp>
+        <p:nvSpPr>
+          <p:cNvPr id="4" name="Text 1"/>
+          <p:cNvSpPr/>
+          <p:nvPr/>
+        </p:nvSpPr>
+        <p:spPr>
+          <a:xfrm>
+            <a:off x="4453128" y="365760"/>
+            <a:ext cx="2651760" cy="274320"/>
+          </a:xfrm>
+          <a:prstGeom prst="rect">
+            <a:avLst/>
+          </a:prstGeom>
+          <a:noFill/>
+          <a:ln/>
+        </p:spPr>
+        <p:txBody>
+          <a:bodyPr wrap="square" lIns="0" tIns="0" rIns="0" bIns="0" rtlCol="0" anchor="ctr"/>
+          <a:lstStyle/>
+          <a:p>
+            <a:pPr marL="0" indent="0" algn="r">
+              <a:buNone/>
+            </a:pPr>
+            <a:r>
+              <a:rPr lang="en-US" sz="1200" b="1" kern="0" spc="200" dirty="0">
+                <a:solidFill>
+                  <a:srgbClr val="FFFFFF"/>
+                </a:solidFill>
+                <a:latin typeface="Manrope" pitchFamily="34" charset="0"/>
+                <a:ea typeface="Manrope" pitchFamily="34" charset="-122"/>
+                <a:cs typeface="Manrope" pitchFamily="34" charset="-120"/>
+              </a:rPr>
+              <a:t>DIGITAL INFRASTRUCTURE</a:t>
+            </a:r>
+            <a:endParaRPr lang="en-US" sz="1200" dirty="0"/>
+          </a:p>
+        </p:txBody>
+      </p:sp>
+      <p:sp>
+        <p:nvSpPr>
+          <p:cNvPr id="5" name="Text 2"/>
+          <p:cNvSpPr/>
+          <p:nvPr/>
+        </p:nvSpPr>
+        <p:spPr>
+          <a:xfrm>
+            <a:off x="457200" y="841248"/>
+            <a:ext cx="5486400" cy="256032"/>
+          </a:xfrm>
+          <a:prstGeom prst="rect">
+            <a:avLst/>
+          </a:prstGeom>
+          <a:noFill/>
+          <a:ln/>
+        </p:spPr>
+        <p:txBody>
+          <a:bodyPr wrap="square" lIns="0" tIns="0" rIns="0" bIns="0" rtlCol="0" anchor="ctr"/>
+          <a:lstStyle/>
+          <a:p>
+            <a:pPr marL="0" indent="0">
+              <a:buNone/>
+            </a:pPr>
+            <a:r>
+              <a:rPr lang="en-US" sz="1100" b="1" kern="0" spc="300" dirty="0">
+                <a:solidFill>
+                  <a:srgbClr val="FFFFFF"/>
+                </a:solidFill>
+                <a:latin typeface="Manrope" pitchFamily="34" charset="0"/>
+                <a:ea typeface="Manrope" pitchFamily="34" charset="-122"/>
+                <a:cs typeface="Manrope" pitchFamily="34" charset="-120"/>
+              </a:rPr>
+              <a:t>POLICY AT A GLANCE</a:t>
+            </a:r>
+            <a:endParaRPr lang="en-US" sz="1100" dirty="0"/>
+          </a:p>
+        </p:txBody>
+      </p:sp>
+      <p:sp>
+        <p:nvSpPr>
+          <p:cNvPr id="6" name="Text 3"/>
+          <p:cNvSpPr/>
+          <p:nvPr/>
+        </p:nvSpPr>
+        <p:spPr>
+          <a:xfrm>
+            <a:off x="457200" y="1060704"/>
+            <a:ext cx="6647688" cy="457200"/>
+          </a:xfrm>
+          <a:prstGeom prst="rect">
+            <a:avLst/>
+          </a:prstGeom>
+          <a:noFill/>
+          <a:ln/>
+        </p:spPr>
+        <p:txBody>
+          <a:bodyPr wrap="square" lIns="0" tIns="0" rIns="0" bIns="0" rtlCol="0" anchor="ctr"/>
+          <a:lstStyle/>
+          <a:p>
+            <a:pPr marL="0" indent="0">
+              <a:buNone/>
+            </a:pPr>
+            <a:r>
+              <a:rPr lang="en-US" sz="2500" b="1" dirty="0">
+                <a:solidFill>
+                  <a:srgbClr val="FFFFFF"/>
+                </a:solidFill>
+                <a:latin typeface="Manrope" pitchFamily="34" charset="0"/>
+                <a:ea typeface="Manrope" pitchFamily="34" charset="-122"/>
+                <a:cs typeface="Manrope" pitchFamily="34" charset="-120"/>
+              </a:rPr>
+              <a:t>[Policy name]</a:t>
+            </a:r>
+            <a:endParaRPr lang="en-US" sz="2500" dirty="0"/>
+          </a:p>
+        </p:txBody>
+      </p:sp>
+      <p:sp>
+        <p:nvSpPr>
+          <p:cNvPr id="7" name="Shape 4"/>
+          <p:cNvSpPr/>
+          <p:nvPr/>
+        </p:nvSpPr>
+        <p:spPr>
+          <a:xfrm>
+            <a:off x="457200" y="2011680"/>
+            <a:ext cx="457200" cy="457200"/>
+          </a:xfrm>
+          <a:prstGeom prst="ellipse">
+            <a:avLst/>
+          </a:prstGeom>
+          <a:solidFill>
+            <a:srgbClr val="0F8B8D"/>
+          </a:solidFill>
+          <a:ln/>
+        </p:spPr>
+        <p:txBody>
+          <a:bodyPr/>
+          <a:lstStyle/>
+          <a:p>
+            <a:endParaRPr lang="en-US"/>
+          </a:p>
+        </p:txBody>
+      </p:sp>
+      <p:pic>
+        <p:nvPicPr>
+          <p:cNvPr id="8" name="Image 1" descr="preencoded.png"/>
+          <p:cNvPicPr>
+            <a:picLocks noChangeAspect="1"/>
+          </p:cNvPicPr>
+          <p:nvPr/>
+        </p:nvPicPr>
+        <p:blipFill>
+          <a:blip r:embed="rId3"/>
+          <a:stretch>
+            <a:fillRect/>
+          </a:stretch>
+        </p:blipFill>
+        <p:spPr>
+          <a:xfrm>
+            <a:off x="576072" y="2130552"/>
+            <a:ext cx="219456" cy="219456"/>
+          </a:xfrm>
+          <a:prstGeom prst="rect">
+            <a:avLst/>
+          </a:prstGeom>
+        </p:spPr>
+      </p:pic>
+      <p:sp>
+        <p:nvSpPr>
+          <p:cNvPr id="9" name="Text 5"/>
+          <p:cNvSpPr/>
+          <p:nvPr/>
+        </p:nvSpPr>
+        <p:spPr>
+          <a:xfrm>
+            <a:off x="1060704" y="1975104"/>
+            <a:ext cx="3191256" cy="502920"/>
+          </a:xfrm>
+          <a:prstGeom prst="rect">
+            <a:avLst/>
+          </a:prstGeom>
+          <a:noFill/>
+          <a:ln/>
+        </p:spPr>
+        <p:txBody>
+          <a:bodyPr wrap="square" lIns="0" tIns="0" rIns="0" bIns="0" rtlCol="0" anchor="ctr"/>
+          <a:lstStyle/>
+          <a:p>
+            <a:pPr marL="0" indent="0">
+              <a:lnSpc>
+                <a:spcPct val="95000"/>
+              </a:lnSpc>
+              <a:buNone/>
+            </a:pPr>
+            <a:r>
+              <a:rPr lang="en-US" sz="1400" b="1" dirty="0">
+                <a:solidFill>
+                  <a:srgbClr val="0C2C3A"/>
+                </a:solidFill>
+                <a:latin typeface="Manrope" pitchFamily="34" charset="0"/>
+                <a:ea typeface="Manrope" pitchFamily="34" charset="-122"/>
+                <a:cs typeface="Manrope" pitchFamily="34" charset="-120"/>
+              </a:rPr>
+              <a:t>[Section heading]</a:t>
+            </a:r>
+            <a:endParaRPr lang="en-US" sz="1400" dirty="0"/>
+          </a:p>
+        </p:txBody>
+      </p:sp>
+      <p:sp>
+        <p:nvSpPr>
+          <p:cNvPr id="10" name="Text 6"/>
+          <p:cNvSpPr/>
+          <p:nvPr/>
+        </p:nvSpPr>
+        <p:spPr>
+          <a:xfrm>
+            <a:off x="1060704" y="2487168"/>
+            <a:ext cx="3191256" cy="1280160"/>
+          </a:xfrm>
+          <a:prstGeom prst="rect">
+            <a:avLst/>
+          </a:prstGeom>
+          <a:noFill/>
+          <a:ln/>
+        </p:spPr>
+        <p:txBody>
+          <a:bodyPr wrap="square" lIns="0" tIns="0" rIns="0" bIns="0" rtlCol="0" anchor="t"/>
+          <a:lstStyle/>
+          <a:p>
+            <a:pPr marL="165100" indent="-165100">
+              <a:lnSpc>
+                <a:spcPct val="106000"/>
+              </a:lnSpc>
+              <a:spcAft>
+                <a:spcPts val="300"/>
+              </a:spcAft>
+              <a:buSzPct val="100000"/>
+              <a:buChar char="›"/>
+            </a:pPr>
+            <a:r>
+              <a:rPr lang="en-US" sz="1050" dirty="0">
+                <a:solidFill>
+                  <a:srgbClr val="BCBFCC"/>
+                </a:solidFill>
+                <a:latin typeface="Manrope" pitchFamily="34" charset="0"/>
+                <a:ea typeface="Manrope" pitchFamily="34" charset="-122"/>
+                <a:cs typeface="Manrope" pitchFamily="34" charset="-120"/>
+              </a:rPr>
+              <a:t>[Key point employees need to know]</a:t>
+            </a:r>
+            <a:endParaRPr lang="en-US" sz="1050" dirty="0"/>
+          </a:p>
+          <a:p>
+            <a:pPr marL="165100" indent="-165100">
+              <a:lnSpc>
+                <a:spcPct val="106000"/>
+              </a:lnSpc>
+              <a:spcAft>
+                <a:spcPts val="300"/>
+              </a:spcAft>
+              <a:buSzPct val="100000"/>
+              <a:buChar char="›"/>
+            </a:pPr>
+            <a:r>
+              <a:rPr lang="en-US" sz="1050" dirty="0">
+                <a:solidFill>
+                  <a:srgbClr val="BCBFCC"/>
+                </a:solidFill>
+                <a:latin typeface="Manrope" pitchFamily="34" charset="0"/>
+                <a:ea typeface="Manrope" pitchFamily="34" charset="-122"/>
+                <a:cs typeface="Manrope" pitchFamily="34" charset="-120"/>
+              </a:rPr>
+              <a:t>[Key point or action]</a:t>
+            </a:r>
+            <a:endParaRPr lang="en-US" sz="1050" dirty="0"/>
+          </a:p>
+        </p:txBody>
+      </p:sp>
+      <p:sp>
+        <p:nvSpPr>
+          <p:cNvPr id="11" name="Shape 7"/>
+          <p:cNvSpPr/>
+          <p:nvPr/>
+        </p:nvSpPr>
+        <p:spPr>
+          <a:xfrm>
+            <a:off x="457200" y="3383280"/>
+            <a:ext cx="457200" cy="457200"/>
+          </a:xfrm>
+          <a:prstGeom prst="ellipse">
+            <a:avLst/>
+          </a:prstGeom>
+          <a:solidFill>
+            <a:srgbClr val="0F8B8D"/>
+          </a:solidFill>
+          <a:ln/>
+        </p:spPr>
+        <p:txBody>
+          <a:bodyPr/>
+          <a:lstStyle/>
+          <a:p>
+            <a:endParaRPr lang="en-US"/>
+          </a:p>
+        </p:txBody>
+      </p:sp>
+      <p:pic>
+        <p:nvPicPr>
+          <p:cNvPr id="12" name="Image 2" descr="preencoded.png"/>
+          <p:cNvPicPr>
+            <a:picLocks noChangeAspect="1"/>
+          </p:cNvPicPr>
+          <p:nvPr/>
+        </p:nvPicPr>
+        <p:blipFill>
+          <a:blip r:embed="rId3"/>
+          <a:stretch>
+            <a:fillRect/>
+          </a:stretch>
+        </p:blipFill>
+        <p:spPr>
+          <a:xfrm>
+            <a:off x="576072" y="3502152"/>
+            <a:ext cx="219456" cy="219456"/>
+          </a:xfrm>
+          <a:prstGeom prst="rect">
+            <a:avLst/>
+          </a:prstGeom>
+        </p:spPr>
+      </p:pic>
+      <p:sp>
+        <p:nvSpPr>
+          <p:cNvPr id="13" name="Text 8"/>
+          <p:cNvSpPr/>
+          <p:nvPr/>
+        </p:nvSpPr>
+        <p:spPr>
+          <a:xfrm>
+            <a:off x="1060704" y="3346704"/>
+            <a:ext cx="3191256" cy="502920"/>
+          </a:xfrm>
+          <a:prstGeom prst="rect">
+            <a:avLst/>
+          </a:prstGeom>
+          <a:noFill/>
+          <a:ln/>
+        </p:spPr>
+        <p:txBody>
+          <a:bodyPr wrap="square" lIns="0" tIns="0" rIns="0" bIns="0" rtlCol="0" anchor="ctr"/>
+          <a:lstStyle/>
+          <a:p>
+            <a:pPr marL="0" indent="0">
+              <a:lnSpc>
+                <a:spcPct val="95000"/>
+              </a:lnSpc>
+              <a:buNone/>
+            </a:pPr>
+            <a:r>
+              <a:rPr lang="en-US" sz="1400" b="1" dirty="0">
+                <a:solidFill>
+                  <a:srgbClr val="0C2C3A"/>
+                </a:solidFill>
+                <a:latin typeface="Manrope" pitchFamily="34" charset="0"/>
+                <a:ea typeface="Manrope" pitchFamily="34" charset="-122"/>
+                <a:cs typeface="Manrope" pitchFamily="34" charset="-120"/>
+              </a:rPr>
+              <a:t>[Section heading]</a:t>
+            </a:r>
+            <a:endParaRPr lang="en-US" sz="1400" dirty="0"/>
+          </a:p>
+        </p:txBody>
+      </p:sp>
+      <p:sp>
+        <p:nvSpPr>
+          <p:cNvPr id="14" name="Text 9"/>
+          <p:cNvSpPr/>
+          <p:nvPr/>
+        </p:nvSpPr>
+        <p:spPr>
+          <a:xfrm>
+            <a:off x="1060704" y="3858768"/>
+            <a:ext cx="3191256" cy="1280160"/>
+          </a:xfrm>
+          <a:prstGeom prst="rect">
+            <a:avLst/>
+          </a:prstGeom>
+          <a:noFill/>
+          <a:ln/>
+        </p:spPr>
+        <p:txBody>
+          <a:bodyPr wrap="square" lIns="0" tIns="0" rIns="0" bIns="0" rtlCol="0" anchor="t"/>
+          <a:lstStyle/>
+          <a:p>
+            <a:pPr marL="165100" indent="-165100">
+              <a:lnSpc>
+                <a:spcPct val="106000"/>
+              </a:lnSpc>
+              <a:spcAft>
+                <a:spcPts val="300"/>
+              </a:spcAft>
+              <a:buSzPct val="100000"/>
+              <a:buChar char="›"/>
+            </a:pPr>
+            <a:r>
+              <a:rPr lang="en-US" sz="1050" dirty="0">
+                <a:solidFill>
+                  <a:srgbClr val="BCBFCC"/>
+                </a:solidFill>
+                <a:latin typeface="Manrope" pitchFamily="34" charset="0"/>
+                <a:ea typeface="Manrope" pitchFamily="34" charset="-122"/>
+                <a:cs typeface="Manrope" pitchFamily="34" charset="-120"/>
+              </a:rPr>
+              <a:t>[Key point employees need to know]</a:t>
+            </a:r>
+            <a:endParaRPr lang="en-US" sz="1050" dirty="0"/>
+          </a:p>
+          <a:p>
+            <a:pPr marL="165100" indent="-165100">
+              <a:lnSpc>
+                <a:spcPct val="106000"/>
+              </a:lnSpc>
+              <a:spcAft>
+                <a:spcPts val="300"/>
+              </a:spcAft>
+              <a:buSzPct val="100000"/>
+              <a:buChar char="›"/>
+            </a:pPr>
+            <a:r>
+              <a:rPr lang="en-US" sz="1050" dirty="0">
+                <a:solidFill>
+                  <a:srgbClr val="BCBFCC"/>
+                </a:solidFill>
+                <a:latin typeface="Manrope" pitchFamily="34" charset="0"/>
+                <a:ea typeface="Manrope" pitchFamily="34" charset="-122"/>
+                <a:cs typeface="Manrope" pitchFamily="34" charset="-120"/>
+              </a:rPr>
+              <a:t>[Key point or action]</a:t>
+            </a:r>
+            <a:endParaRPr lang="en-US" sz="1050" dirty="0"/>
+          </a:p>
+        </p:txBody>
+      </p:sp>
+      <p:sp>
+        <p:nvSpPr>
+          <p:cNvPr id="15" name="Shape 10"/>
+          <p:cNvSpPr/>
+          <p:nvPr/>
+        </p:nvSpPr>
+        <p:spPr>
+          <a:xfrm>
+            <a:off x="457200" y="4754880"/>
+            <a:ext cx="457200" cy="457200"/>
+          </a:xfrm>
+          <a:prstGeom prst="ellipse">
+            <a:avLst/>
+          </a:prstGeom>
+          <a:solidFill>
+            <a:srgbClr val="0F8B8D"/>
+          </a:solidFill>
+          <a:ln/>
+        </p:spPr>
+        <p:txBody>
+          <a:bodyPr/>
+          <a:lstStyle/>
+          <a:p>
+            <a:endParaRPr lang="en-US"/>
+          </a:p>
+        </p:txBody>
+      </p:sp>
+      <p:pic>
+        <p:nvPicPr>
+          <p:cNvPr id="16" name="Image 3" descr="preencoded.png"/>
+          <p:cNvPicPr>
+            <a:picLocks noChangeAspect="1"/>
+          </p:cNvPicPr>
+          <p:nvPr/>
+        </p:nvPicPr>
+        <p:blipFill>
+          <a:blip r:embed="rId3"/>
+          <a:stretch>
+            <a:fillRect/>
+          </a:stretch>
+        </p:blipFill>
+        <p:spPr>
+          <a:xfrm>
+            <a:off x="576072" y="4873752"/>
+            <a:ext cx="219456" cy="219456"/>
+          </a:xfrm>
+          <a:prstGeom prst="rect">
+            <a:avLst/>
+          </a:prstGeom>
+        </p:spPr>
+      </p:pic>
+      <p:sp>
+        <p:nvSpPr>
+          <p:cNvPr id="17" name="Text 11"/>
+          <p:cNvSpPr/>
+          <p:nvPr/>
+        </p:nvSpPr>
+        <p:spPr>
+          <a:xfrm>
+            <a:off x="1060704" y="4718304"/>
+            <a:ext cx="3191256" cy="502920"/>
+          </a:xfrm>
+          <a:prstGeom prst="rect">
+            <a:avLst/>
+          </a:prstGeom>
+          <a:noFill/>
+          <a:ln/>
+        </p:spPr>
+        <p:txBody>
+          <a:bodyPr wrap="square" lIns="0" tIns="0" rIns="0" bIns="0" rtlCol="0" anchor="ctr"/>
+          <a:lstStyle/>
+          <a:p>
+            <a:pPr marL="0" indent="0">
+              <a:lnSpc>
+                <a:spcPct val="95000"/>
+              </a:lnSpc>
+              <a:buNone/>
+            </a:pPr>
+            <a:r>
+              <a:rPr lang="en-US" sz="1400" b="1" dirty="0">
+                <a:solidFill>
+                  <a:srgbClr val="0C2C3A"/>
+                </a:solidFill>
+                <a:latin typeface="Manrope" pitchFamily="34" charset="0"/>
+                <a:ea typeface="Manrope" pitchFamily="34" charset="-122"/>
+                <a:cs typeface="Manrope" pitchFamily="34" charset="-120"/>
+              </a:rPr>
+              <a:t>[Section heading]</a:t>
+            </a:r>
+            <a:endParaRPr lang="en-US" sz="1400" dirty="0"/>
+          </a:p>
+        </p:txBody>
+      </p:sp>
+      <p:sp>
+        <p:nvSpPr>
+          <p:cNvPr id="18" name="Text 12"/>
+          <p:cNvSpPr/>
+          <p:nvPr/>
+        </p:nvSpPr>
+        <p:spPr>
+          <a:xfrm>
+            <a:off x="1060704" y="5230368"/>
+            <a:ext cx="3191256" cy="1280160"/>
+          </a:xfrm>
+          <a:prstGeom prst="rect">
+            <a:avLst/>
+          </a:prstGeom>
+          <a:noFill/>
+          <a:ln/>
+        </p:spPr>
+        <p:txBody>
+          <a:bodyPr wrap="square" lIns="0" tIns="0" rIns="0" bIns="0" rtlCol="0" anchor="t"/>
+          <a:lstStyle/>
+          <a:p>
+            <a:pPr marL="165100" indent="-165100">
+              <a:lnSpc>
+                <a:spcPct val="106000"/>
+              </a:lnSpc>
+              <a:spcAft>
+                <a:spcPts val="300"/>
+              </a:spcAft>
+              <a:buSzPct val="100000"/>
+              <a:buChar char="›"/>
+            </a:pPr>
+            <a:r>
+              <a:rPr lang="en-US" sz="1050" dirty="0">
+                <a:solidFill>
+                  <a:srgbClr val="BCBFCC"/>
+                </a:solidFill>
+                <a:latin typeface="Manrope" pitchFamily="34" charset="0"/>
+                <a:ea typeface="Manrope" pitchFamily="34" charset="-122"/>
+                <a:cs typeface="Manrope" pitchFamily="34" charset="-120"/>
+              </a:rPr>
+              <a:t>[Key point employees need to know]</a:t>
+            </a:r>
+            <a:endParaRPr lang="en-US" sz="1050" dirty="0"/>
+          </a:p>
+          <a:p>
+            <a:pPr marL="165100" indent="-165100">
+              <a:lnSpc>
+                <a:spcPct val="106000"/>
+              </a:lnSpc>
+              <a:spcAft>
+                <a:spcPts val="300"/>
+              </a:spcAft>
+              <a:buSzPct val="100000"/>
+              <a:buChar char="›"/>
+            </a:pPr>
+            <a:r>
+              <a:rPr lang="en-US" sz="1050" dirty="0">
+                <a:solidFill>
+                  <a:srgbClr val="BCBFCC"/>
+                </a:solidFill>
+                <a:latin typeface="Manrope" pitchFamily="34" charset="0"/>
+                <a:ea typeface="Manrope" pitchFamily="34" charset="-122"/>
+                <a:cs typeface="Manrope" pitchFamily="34" charset="-120"/>
+              </a:rPr>
+              <a:t>[Key point or action]</a:t>
+            </a:r>
+            <a:endParaRPr lang="en-US" sz="1050" dirty="0"/>
+          </a:p>
+        </p:txBody>
+      </p:sp>
+      <p:sp>
+        <p:nvSpPr>
+          <p:cNvPr id="19" name="Shape 13"/>
+          <p:cNvSpPr/>
+          <p:nvPr/>
+        </p:nvSpPr>
+        <p:spPr>
+          <a:xfrm>
+            <a:off x="457200" y="6126480"/>
+            <a:ext cx="457200" cy="457200"/>
+          </a:xfrm>
+          <a:prstGeom prst="ellipse">
+            <a:avLst/>
+          </a:prstGeom>
+          <a:solidFill>
+            <a:srgbClr val="0F8B8D"/>
+          </a:solidFill>
+          <a:ln/>
+        </p:spPr>
+        <p:txBody>
+          <a:bodyPr/>
+          <a:lstStyle/>
+          <a:p>
+            <a:endParaRPr lang="en-US"/>
+          </a:p>
+        </p:txBody>
+      </p:sp>
+      <p:pic>
+        <p:nvPicPr>
+          <p:cNvPr id="20" name="Image 4" descr="preencoded.png"/>
+          <p:cNvPicPr>
+            <a:picLocks noChangeAspect="1"/>
+          </p:cNvPicPr>
+          <p:nvPr/>
+        </p:nvPicPr>
+        <p:blipFill>
+          <a:blip r:embed="rId3"/>
+          <a:stretch>
+            <a:fillRect/>
+          </a:stretch>
+        </p:blipFill>
+        <p:spPr>
+          <a:xfrm>
+            <a:off x="576072" y="6245352"/>
+            <a:ext cx="219456" cy="219456"/>
+          </a:xfrm>
+          <a:prstGeom prst="rect">
+            <a:avLst/>
+          </a:prstGeom>
+        </p:spPr>
+      </p:pic>
+      <p:sp>
+        <p:nvSpPr>
+          <p:cNvPr id="21" name="Text 14"/>
+          <p:cNvSpPr/>
+          <p:nvPr/>
+        </p:nvSpPr>
+        <p:spPr>
+          <a:xfrm>
+            <a:off x="1060704" y="6089904"/>
+            <a:ext cx="3191256" cy="502920"/>
+          </a:xfrm>
+          <a:prstGeom prst="rect">
+            <a:avLst/>
+          </a:prstGeom>
+          <a:noFill/>
+          <a:ln/>
+        </p:spPr>
+        <p:txBody>
+          <a:bodyPr wrap="square" lIns="0" tIns="0" rIns="0" bIns="0" rtlCol="0" anchor="ctr"/>
+          <a:lstStyle/>
+          <a:p>
+            <a:pPr marL="0" indent="0">
+              <a:lnSpc>
+                <a:spcPct val="95000"/>
+              </a:lnSpc>
+              <a:buNone/>
+            </a:pPr>
+            <a:r>
+              <a:rPr lang="en-US" sz="1400" b="1" dirty="0">
+                <a:solidFill>
+                  <a:srgbClr val="0C2C3A"/>
+                </a:solidFill>
+                <a:latin typeface="Manrope" pitchFamily="34" charset="0"/>
+                <a:ea typeface="Manrope" pitchFamily="34" charset="-122"/>
+                <a:cs typeface="Manrope" pitchFamily="34" charset="-120"/>
+              </a:rPr>
+              <a:t>[Section heading]</a:t>
+            </a:r>
+            <a:endParaRPr lang="en-US" sz="1400" dirty="0"/>
+          </a:p>
+        </p:txBody>
+      </p:sp>
+      <p:sp>
+        <p:nvSpPr>
+          <p:cNvPr id="22" name="Text 15"/>
+          <p:cNvSpPr/>
+          <p:nvPr/>
+        </p:nvSpPr>
+        <p:spPr>
+          <a:xfrm>
+            <a:off x="1060704" y="6601968"/>
+            <a:ext cx="3191256" cy="1280160"/>
+          </a:xfrm>
+          <a:prstGeom prst="rect">
+            <a:avLst/>
+          </a:prstGeom>
+          <a:noFill/>
+          <a:ln/>
+        </p:spPr>
+        <p:txBody>
+          <a:bodyPr wrap="square" lIns="0" tIns="0" rIns="0" bIns="0" rtlCol="0" anchor="t"/>
+          <a:lstStyle/>
+          <a:p>
+            <a:pPr marL="165100" indent="-165100">
+              <a:lnSpc>
+                <a:spcPct val="106000"/>
+              </a:lnSpc>
+              <a:spcAft>
+                <a:spcPts val="300"/>
+              </a:spcAft>
+              <a:buSzPct val="100000"/>
+              <a:buChar char="›"/>
+            </a:pPr>
+            <a:r>
+              <a:rPr lang="en-US" sz="1050" dirty="0">
+                <a:solidFill>
+                  <a:srgbClr val="BCBFCC"/>
+                </a:solidFill>
+                <a:latin typeface="Manrope" pitchFamily="34" charset="0"/>
+                <a:ea typeface="Manrope" pitchFamily="34" charset="-122"/>
+                <a:cs typeface="Manrope" pitchFamily="34" charset="-120"/>
+              </a:rPr>
+              <a:t>[Key point employees need to know]</a:t>
+            </a:r>
+            <a:endParaRPr lang="en-US" sz="1050" dirty="0"/>
+          </a:p>
+          <a:p>
+            <a:pPr marL="165100" indent="-165100">
+              <a:lnSpc>
+                <a:spcPct val="106000"/>
+              </a:lnSpc>
+              <a:spcAft>
+                <a:spcPts val="300"/>
+              </a:spcAft>
+              <a:buSzPct val="100000"/>
+              <a:buChar char="›"/>
+            </a:pPr>
+            <a:r>
+              <a:rPr lang="en-US" sz="1050" dirty="0">
+                <a:solidFill>
+                  <a:srgbClr val="BCBFCC"/>
+                </a:solidFill>
+                <a:latin typeface="Manrope" pitchFamily="34" charset="0"/>
+                <a:ea typeface="Manrope" pitchFamily="34" charset="-122"/>
+                <a:cs typeface="Manrope" pitchFamily="34" charset="-120"/>
+              </a:rPr>
+              <a:t>[Key point or action]</a:t>
+            </a:r>
+            <a:endParaRPr lang="en-US" sz="1050" dirty="0"/>
+          </a:p>
+        </p:txBody>
+      </p:sp>
+      <p:sp>
+        <p:nvSpPr>
+          <p:cNvPr id="23" name="Shape 16"/>
+          <p:cNvSpPr/>
+          <p:nvPr/>
+        </p:nvSpPr>
+        <p:spPr>
+          <a:xfrm>
+            <a:off x="457200" y="7498080"/>
+            <a:ext cx="457200" cy="457200"/>
+          </a:xfrm>
+          <a:prstGeom prst="ellipse">
+            <a:avLst/>
+          </a:prstGeom>
+          <a:solidFill>
+            <a:srgbClr val="0F8B8D"/>
+          </a:solidFill>
+          <a:ln/>
+        </p:spPr>
+        <p:txBody>
+          <a:bodyPr/>
+          <a:lstStyle/>
+          <a:p>
+            <a:endParaRPr lang="en-US"/>
+          </a:p>
+        </p:txBody>
+      </p:sp>
+      <p:pic>
+        <p:nvPicPr>
+          <p:cNvPr id="24" name="Image 5" descr="preencoded.png"/>
+          <p:cNvPicPr>
+            <a:picLocks noChangeAspect="1"/>
+          </p:cNvPicPr>
+          <p:nvPr/>
+        </p:nvPicPr>
+        <p:blipFill>
+          <a:blip r:embed="rId3"/>
+          <a:stretch>
+            <a:fillRect/>
+          </a:stretch>
+        </p:blipFill>
+        <p:spPr>
+          <a:xfrm>
+            <a:off x="576072" y="7616952"/>
+            <a:ext cx="219456" cy="219456"/>
+          </a:xfrm>
+          <a:prstGeom prst="rect">
+            <a:avLst/>
+          </a:prstGeom>
+        </p:spPr>
+      </p:pic>
+      <p:sp>
+        <p:nvSpPr>
+          <p:cNvPr id="25" name="Text 17"/>
+          <p:cNvSpPr/>
+          <p:nvPr/>
+        </p:nvSpPr>
+        <p:spPr>
+          <a:xfrm>
+            <a:off x="1060704" y="7461504"/>
+            <a:ext cx="3191256" cy="502920"/>
+          </a:xfrm>
+          <a:prstGeom prst="rect">
+            <a:avLst/>
+          </a:prstGeom>
+          <a:noFill/>
+          <a:ln/>
+        </p:spPr>
+        <p:txBody>
+          <a:bodyPr wrap="square" lIns="0" tIns="0" rIns="0" bIns="0" rtlCol="0" anchor="ctr"/>
+          <a:lstStyle/>
+          <a:p>
+            <a:pPr marL="0" indent="0">
+              <a:lnSpc>
+                <a:spcPct val="95000"/>
+              </a:lnSpc>
+              <a:buNone/>
+            </a:pPr>
+            <a:r>
+              <a:rPr lang="en-US" sz="1400" b="1" dirty="0">
+                <a:solidFill>
+                  <a:srgbClr val="0C2C3A"/>
+                </a:solidFill>
+                <a:latin typeface="Manrope" pitchFamily="34" charset="0"/>
+                <a:ea typeface="Manrope" pitchFamily="34" charset="-122"/>
+                <a:cs typeface="Manrope" pitchFamily="34" charset="-120"/>
+              </a:rPr>
+              <a:t>[Section heading]</a:t>
+            </a:r>
+            <a:endParaRPr lang="en-US" sz="1400" dirty="0"/>
+          </a:p>
+        </p:txBody>
+      </p:sp>
+      <p:sp>
+        <p:nvSpPr>
+          <p:cNvPr id="26" name="Text 18"/>
+          <p:cNvSpPr/>
+          <p:nvPr/>
+        </p:nvSpPr>
+        <p:spPr>
+          <a:xfrm>
+            <a:off x="1060704" y="7973568"/>
+            <a:ext cx="3191256" cy="1280160"/>
+          </a:xfrm>
+          <a:prstGeom prst="rect">
+            <a:avLst/>
+          </a:prstGeom>
+          <a:noFill/>
+          <a:ln/>
+        </p:spPr>
+        <p:txBody>
+          <a:bodyPr wrap="square" lIns="0" tIns="0" rIns="0" bIns="0" rtlCol="0" anchor="t"/>
+          <a:lstStyle/>
+          <a:p>
+            <a:pPr marL="165100" indent="-165100">
+              <a:lnSpc>
+                <a:spcPct val="106000"/>
+              </a:lnSpc>
+              <a:spcAft>
+                <a:spcPts val="300"/>
+              </a:spcAft>
+              <a:buSzPct val="100000"/>
+              <a:buChar char="›"/>
+            </a:pPr>
+            <a:r>
+              <a:rPr lang="en-US" sz="1050" dirty="0">
+                <a:solidFill>
+                  <a:srgbClr val="BCBFCC"/>
+                </a:solidFill>
+                <a:latin typeface="Manrope" pitchFamily="34" charset="0"/>
+                <a:ea typeface="Manrope" pitchFamily="34" charset="-122"/>
+                <a:cs typeface="Manrope" pitchFamily="34" charset="-120"/>
+              </a:rPr>
+              <a:t>[Key point employees need to know]</a:t>
+            </a:r>
+            <a:endParaRPr lang="en-US" sz="1050" dirty="0"/>
+          </a:p>
+          <a:p>
+            <a:pPr marL="165100" indent="-165100">
+              <a:lnSpc>
+                <a:spcPct val="106000"/>
+              </a:lnSpc>
+              <a:spcAft>
+                <a:spcPts val="300"/>
+              </a:spcAft>
+              <a:buSzPct val="100000"/>
+              <a:buChar char="›"/>
+            </a:pPr>
+            <a:r>
+              <a:rPr lang="en-US" sz="1050" dirty="0">
+                <a:solidFill>
+                  <a:srgbClr val="BCBFCC"/>
+                </a:solidFill>
+                <a:latin typeface="Manrope" pitchFamily="34" charset="0"/>
+                <a:ea typeface="Manrope" pitchFamily="34" charset="-122"/>
+                <a:cs typeface="Manrope" pitchFamily="34" charset="-120"/>
+              </a:rPr>
+              <a:t>[Key point or action]</a:t>
+            </a:r>
+            <a:endParaRPr lang="en-US" sz="1050" dirty="0"/>
+          </a:p>
+        </p:txBody>
+      </p:sp>
+      <p:sp>
+        <p:nvSpPr>
+          <p:cNvPr id="27" name="Shape 19"/>
+          <p:cNvSpPr/>
+          <p:nvPr/>
+        </p:nvSpPr>
+        <p:spPr>
+          <a:xfrm>
+            <a:off x="4526280" y="2011680"/>
+            <a:ext cx="2578608" cy="4160520"/>
+          </a:xfrm>
+          <a:prstGeom prst="roundRect">
+            <a:avLst>
+              <a:gd name="adj" fmla="val 2837"/>
+            </a:avLst>
+          </a:prstGeom>
+          <a:solidFill>
+            <a:srgbClr val="EDEFF7"/>
+          </a:solidFill>
+          <a:ln/>
+        </p:spPr>
+        <p:txBody>
+          <a:bodyPr/>
+          <a:lstStyle/>
+          <a:p>
+            <a:endParaRPr lang="en-US"/>
+          </a:p>
+        </p:txBody>
+      </p:sp>
+      <p:sp>
+        <p:nvSpPr>
+          <p:cNvPr id="28" name="Text 20"/>
+          <p:cNvSpPr/>
+          <p:nvPr/>
+        </p:nvSpPr>
+        <p:spPr>
+          <a:xfrm>
+            <a:off x="4754880" y="2194560"/>
+            <a:ext cx="2167128" cy="365760"/>
+          </a:xfrm>
+          <a:prstGeom prst="rect">
+            <a:avLst/>
+          </a:prstGeom>
+          <a:noFill/>
+          <a:ln/>
+        </p:spPr>
+        <p:txBody>
+          <a:bodyPr wrap="square" lIns="0" tIns="0" rIns="0" bIns="0" rtlCol="0" anchor="ctr"/>
+          <a:lstStyle/>
+          <a:p>
+            <a:pPr marL="0" indent="0">
+              <a:buNone/>
+            </a:pPr>
+            <a:r>
+              <a:rPr lang="en-US" sz="1400" b="1" dirty="0">
+                <a:solidFill>
+                  <a:srgbClr val="0F8B8D"/>
+                </a:solidFill>
+                <a:latin typeface="Manrope" pitchFamily="34" charset="0"/>
+                <a:ea typeface="Manrope" pitchFamily="34" charset="-122"/>
+                <a:cs typeface="Manrope" pitchFamily="34" charset="-120"/>
+              </a:rPr>
+              <a:t>[Stages, process or key facts]</a:t>
+            </a:r>
+            <a:endParaRPr lang="en-US" sz="1400" dirty="0"/>
+          </a:p>
+        </p:txBody>
+      </p:sp>
+      <p:sp>
+        <p:nvSpPr>
+          <p:cNvPr id="29" name="Text 21"/>
+          <p:cNvSpPr/>
+          <p:nvPr/>
+        </p:nvSpPr>
+        <p:spPr>
+          <a:xfrm>
+            <a:off x="4754880" y="2606040"/>
+            <a:ext cx="2167128" cy="3291840"/>
+          </a:xfrm>
+          <a:prstGeom prst="rect">
+            <a:avLst/>
+          </a:prstGeom>
+          <a:noFill/>
+          <a:ln/>
+        </p:spPr>
+        <p:txBody>
+          <a:bodyPr wrap="square" lIns="0" tIns="0" rIns="0" bIns="0" rtlCol="0" anchor="ctr"/>
+          <a:lstStyle/>
+          <a:p>
+            <a:pPr marL="0" indent="0">
+              <a:lnSpc>
+                <a:spcPct val="120000"/>
+              </a:lnSpc>
+              <a:buNone/>
+            </a:pPr>
+            <a:r>
+              <a:rPr lang="en-US" sz="1100" dirty="0">
+                <a:solidFill>
+                  <a:srgbClr val="BCBFCC"/>
+                </a:solidFill>
+                <a:latin typeface="Manrope" pitchFamily="34" charset="0"/>
+                <a:ea typeface="Manrope" pitchFamily="34" charset="-122"/>
+                <a:cs typeface="Manrope" pitchFamily="34" charset="-120"/>
+              </a:rPr>
+              <a:t>[Add the steps, stages or key facts here. Keep it short: this is the summary, not the full policy.]</a:t>
+            </a:r>
+            <a:endParaRPr lang="en-US" sz="1100" dirty="0"/>
+          </a:p>
+        </p:txBody>
+      </p:sp>
+      <p:sp>
+        <p:nvSpPr>
+          <p:cNvPr id="30" name="Shape 22"/>
+          <p:cNvSpPr/>
+          <p:nvPr/>
+        </p:nvSpPr>
+        <p:spPr>
+          <a:xfrm>
+            <a:off x="4526280" y="6355080"/>
+            <a:ext cx="2578608" cy="2240280"/>
+          </a:xfrm>
+          <a:prstGeom prst="roundRect">
+            <a:avLst>
+              <a:gd name="adj" fmla="val 3265"/>
+            </a:avLst>
+          </a:prstGeom>
+          <a:solidFill>
+            <a:srgbClr val="E7F3F4"/>
+          </a:solidFill>
+          <a:ln/>
+        </p:spPr>
+        <p:txBody>
+          <a:bodyPr/>
+          <a:lstStyle/>
+          <a:p>
+            <a:endParaRPr lang="en-US"/>
+          </a:p>
+        </p:txBody>
+      </p:sp>
+      <p:sp>
+        <p:nvSpPr>
+          <p:cNvPr id="31" name="Text 23"/>
+          <p:cNvSpPr/>
+          <p:nvPr/>
+        </p:nvSpPr>
+        <p:spPr>
+          <a:xfrm>
+            <a:off x="4754880" y="6510528"/>
+            <a:ext cx="2167128" cy="320040"/>
+          </a:xfrm>
+          <a:prstGeom prst="rect">
+            <a:avLst/>
+          </a:prstGeom>
+          <a:noFill/>
+          <a:ln/>
+        </p:spPr>
+        <p:txBody>
+          <a:bodyPr wrap="square" lIns="0" tIns="0" rIns="0" bIns="0" rtlCol="0" anchor="ctr"/>
+          <a:lstStyle/>
+          <a:p>
+            <a:pPr marL="0" indent="0">
+              <a:buNone/>
+            </a:pPr>
+            <a:r>
+              <a:rPr lang="en-US" sz="1300" b="1" dirty="0">
+                <a:solidFill>
+                  <a:srgbClr val="0F8B8D"/>
+                </a:solidFill>
+                <a:latin typeface="Manrope" pitchFamily="34" charset="0"/>
+                <a:ea typeface="Manrope" pitchFamily="34" charset="-122"/>
+                <a:cs typeface="Manrope" pitchFamily="34" charset="-120"/>
+              </a:rPr>
+              <a:t>[Support and contacts]</a:t>
+            </a:r>
+            <a:endParaRPr lang="en-US" sz="1300" dirty="0"/>
+          </a:p>
+        </p:txBody>
+      </p:sp>
+      <p:sp>
+        <p:nvSpPr>
+          <p:cNvPr id="32" name="Text 24"/>
+          <p:cNvSpPr/>
+          <p:nvPr/>
+        </p:nvSpPr>
+        <p:spPr>
+          <a:xfrm>
+            <a:off x="4754880" y="6858000"/>
+            <a:ext cx="2167128" cy="1463040"/>
+          </a:xfrm>
+          <a:prstGeom prst="rect">
+            <a:avLst/>
+          </a:prstGeom>
+          <a:noFill/>
+          <a:ln/>
+        </p:spPr>
+        <p:txBody>
+          <a:bodyPr wrap="square" lIns="0" tIns="0" rIns="0" bIns="0" rtlCol="0" anchor="ctr"/>
+          <a:lstStyle/>
+          <a:p>
+            <a:pPr marL="0" indent="0">
+              <a:lnSpc>
+                <a:spcPct val="120000"/>
+              </a:lnSpc>
+              <a:buNone/>
+            </a:pPr>
+            <a:r>
+              <a:rPr lang="en-US" sz="1050" dirty="0">
+                <a:solidFill>
+                  <a:srgbClr val="BCBFCC"/>
+                </a:solidFill>
+                <a:latin typeface="Manrope" pitchFamily="34" charset="0"/>
+                <a:ea typeface="Manrope" pitchFamily="34" charset="-122"/>
+                <a:cs typeface="Manrope" pitchFamily="34" charset="-120"/>
+              </a:rPr>
+              <a:t>[Links, contacts or where to go for help.]</a:t>
+            </a:r>
+            <a:endParaRPr lang="en-US" sz="1050" dirty="0"/>
+          </a:p>
+        </p:txBody>
+      </p:sp>
+      <p:pic>
+        <p:nvPicPr>
+          <p:cNvPr id="33" name="Image 6" descr="/home/claude/deck/img/mark.png"/>
+          <p:cNvPicPr>
+            <a:picLocks noChangeAspect="1"/>
+          </p:cNvPicPr>
+          <p:nvPr/>
+        </p:nvPicPr>
+        <p:blipFill>
+          <a:blip r:embed="rId4"/>
+          <a:stretch>
+            <a:fillRect/>
+          </a:stretch>
+        </p:blipFill>
+        <p:spPr>
+          <a:xfrm>
+            <a:off x="457200" y="10268712"/>
+            <a:ext cx="201168" cy="201168"/>
+          </a:xfrm>
+          <a:prstGeom prst="rect">
+            <a:avLst/>
+          </a:prstGeom>
+        </p:spPr>
+      </p:pic>
+      <p:sp>
+        <p:nvSpPr>
+          <p:cNvPr id="34" name="Text 25"/>
+          <p:cNvSpPr/>
+          <p:nvPr/>
+        </p:nvSpPr>
+        <p:spPr>
+          <a:xfrm>
+            <a:off x="731520" y="10259568"/>
+            <a:ext cx="3108960" cy="219456"/>
+          </a:xfrm>
+          <a:prstGeom prst="rect">
+            <a:avLst/>
+          </a:prstGeom>
+          <a:noFill/>
+          <a:ln/>
+        </p:spPr>
+        <p:txBody>
+          <a:bodyPr wrap="square" lIns="0" tIns="0" rIns="0" bIns="0" rtlCol="0" anchor="ctr"/>
+          <a:lstStyle/>
+          <a:p>
+            <a:pPr marL="0" indent="0">
+              <a:buNone/>
+            </a:pPr>
+            <a:r>
+              <a:rPr lang="en-US" sz="900" dirty="0">
+                <a:solidFill>
+                  <a:srgbClr val="6E7180"/>
+                </a:solidFill>
+                <a:latin typeface="Manrope" pitchFamily="34" charset="0"/>
+                <a:ea typeface="Manrope" pitchFamily="34" charset="-122"/>
+                <a:cs typeface="Manrope" pitchFamily="34" charset="-120"/>
+              </a:rPr>
+              <a:t>Aqualogic, a Sustec company</a:t>
+            </a:r>
+            <a:endParaRPr lang="en-US" sz="900" dirty="0"/>
+          </a:p>
+        </p:txBody>
+      </p:sp>
+      <p:sp>
+        <p:nvSpPr>
+          <p:cNvPr id="35" name="Text 26"/>
+          <p:cNvSpPr/>
+          <p:nvPr/>
+        </p:nvSpPr>
+        <p:spPr>
+          <a:xfrm>
+            <a:off x="3355848" y="10259568"/>
+            <a:ext cx="3749040" cy="219456"/>
+          </a:xfrm>
+          <a:prstGeom prst="rect">
+            <a:avLst/>
+          </a:prstGeom>
+          <a:noFill/>
+          <a:ln/>
+        </p:spPr>
+        <p:txBody>
+          <a:bodyPr wrap="square" lIns="0" tIns="0" rIns="0" bIns="0" rtlCol="0" anchor="ctr"/>
+          <a:lstStyle/>
+          <a:p>
+            <a:pPr marL="0" indent="0" algn="r">
+              <a:buNone/>
+            </a:pPr>
+            <a:r>
+              <a:rPr lang="en-US" sz="900" i="1" dirty="0">
+                <a:solidFill>
+                  <a:srgbClr val="BCBFCC"/>
+                </a:solidFill>
+                <a:latin typeface="Manrope" pitchFamily="34" charset="0"/>
+                <a:ea typeface="Manrope" pitchFamily="34" charset="-122"/>
+                <a:cs typeface="Manrope" pitchFamily="34" charset="-120"/>
+              </a:rPr>
+              <a:t>For the detail, see the full policy in the employee handbook.</a:t>
+            </a:r>
+            <a:endParaRPr lang="en-US" sz="900" dirty="0"/>
+          </a:p>
+        </p:txBody>
+      </p:sp>
+    </p:spTree>
+  </p:cSld>
+  <p:clrMapOvr>
+    <a:masterClrMapping/>
+  </p:clrMapOvr>
+</p:sld>
+</file>
+
+<file path=ppt/slides/slide18.xml><?xml version="1.0" encoding="utf-8"?>
+<p:sld xmlns:a="http://schemas.openxmlformats.org/drawingml/2006/main" xmlns:r="http://schemas.openxmlformats.org/officeDocument/2006/relationships" xmlns:p="http://schemas.openxmlformats.org/presentationml/2006/main">
+  <p:cSld name="Slide 15">
+    <p:bg>
+      <p:bgPr>
+        <a:solidFill>
+          <a:srgbClr val="FAFBFF"/>
+        </a:solidFill>
+        <a:effectLst/>
+      </p:bgPr>
+    </p:bg>
+    <p:spTree>
+      <p:nvGrpSpPr>
+        <p:cNvPr id="1" name=""/>
+        <p:cNvGrpSpPr/>
+        <p:nvPr/>
+      </p:nvGrpSpPr>
+      <p:grpSpPr>
+        <a:xfrm>
+          <a:off x="0" y="0"/>
+          <a:ext cx="0" cy="0"/>
+          <a:chOff x="0" y="0"/>
+          <a:chExt cx="0" cy="0"/>
+        </a:xfrm>
+      </p:grpSpPr>
+      <p:sp>
+        <p:nvSpPr>
+          <p:cNvPr id="2" name="Shape 0"/>
+          <p:cNvSpPr/>
+          <p:nvPr/>
+        </p:nvSpPr>
+        <p:spPr>
+          <a:xfrm>
+            <a:off x="0" y="0"/>
+            <a:ext cx="7562088" cy="1801368"/>
+          </a:xfrm>
+          <a:prstGeom prst="rect">
+            <a:avLst/>
+          </a:prstGeom>
+          <a:solidFill>
+            <a:srgbClr val="0F8B8D"/>
+          </a:solidFill>
+          <a:ln/>
+        </p:spPr>
+        <p:txBody>
+          <a:bodyPr/>
+          <a:lstStyle/>
+          <a:p>
+            <a:endParaRPr lang="en-US"/>
+          </a:p>
+        </p:txBody>
+      </p:sp>
+      <p:pic>
+        <p:nvPicPr>
+          <p:cNvPr id="3" name="Image 0" descr="/home/claude/deck/img/logo_rev.png"/>
+          <p:cNvPicPr>
+            <a:picLocks noChangeAspect="1"/>
+          </p:cNvPicPr>
+          <p:nvPr/>
+        </p:nvPicPr>
+        <p:blipFill>
+          <a:blip r:embed="rId2"/>
+          <a:stretch>
+            <a:fillRect/>
+          </a:stretch>
+        </p:blipFill>
+        <p:spPr>
+          <a:xfrm>
+            <a:off x="457200" y="256032"/>
+            <a:ext cx="1371600" cy="451333"/>
+          </a:xfrm>
+          <a:prstGeom prst="rect">
+            <a:avLst/>
+          </a:prstGeom>
+        </p:spPr>
+      </p:pic>
+      <p:sp>
+        <p:nvSpPr>
+          <p:cNvPr id="4" name="Text 1"/>
+          <p:cNvSpPr/>
+          <p:nvPr/>
+        </p:nvSpPr>
+        <p:spPr>
+          <a:xfrm>
+            <a:off x="4453128" y="365760"/>
+            <a:ext cx="2651760" cy="274320"/>
+          </a:xfrm>
+          <a:prstGeom prst="rect">
+            <a:avLst/>
+          </a:prstGeom>
+          <a:noFill/>
+          <a:ln/>
+        </p:spPr>
+        <p:txBody>
+          <a:bodyPr wrap="square" lIns="0" tIns="0" rIns="0" bIns="0" rtlCol="0" anchor="ctr"/>
+          <a:lstStyle/>
+          <a:p>
+            <a:pPr marL="0" indent="0" algn="r">
+              <a:buNone/>
+            </a:pPr>
+            <a:r>
+              <a:rPr lang="en-US" sz="1200" b="1" kern="0" spc="200" dirty="0">
+                <a:solidFill>
+                  <a:srgbClr val="FFFFFF"/>
+                </a:solidFill>
+                <a:latin typeface="Manrope" pitchFamily="34" charset="0"/>
+                <a:ea typeface="Manrope" pitchFamily="34" charset="-122"/>
+                <a:cs typeface="Manrope" pitchFamily="34" charset="-120"/>
+              </a:rPr>
+              <a:t>DIGITAL INFRASTRUCTURE</a:t>
+            </a:r>
+            <a:endParaRPr lang="en-US" sz="1200" dirty="0"/>
+          </a:p>
+        </p:txBody>
+      </p:sp>
+      <p:sp>
+        <p:nvSpPr>
+          <p:cNvPr id="5" name="Text 2"/>
+          <p:cNvSpPr/>
+          <p:nvPr/>
+        </p:nvSpPr>
+        <p:spPr>
+          <a:xfrm>
+            <a:off x="457200" y="841248"/>
+            <a:ext cx="5486400" cy="256032"/>
+          </a:xfrm>
+          <a:prstGeom prst="rect">
+            <a:avLst/>
+          </a:prstGeom>
+          <a:noFill/>
+          <a:ln/>
+        </p:spPr>
+        <p:txBody>
+          <a:bodyPr wrap="square" lIns="0" tIns="0" rIns="0" bIns="0" rtlCol="0" anchor="ctr"/>
+          <a:lstStyle/>
+          <a:p>
+            <a:pPr marL="0" indent="0">
+              <a:buNone/>
+            </a:pPr>
+            <a:r>
+              <a:rPr lang="en-US" sz="1100" b="1" kern="0" spc="300" dirty="0">
+                <a:solidFill>
+                  <a:srgbClr val="FFFFFF"/>
+                </a:solidFill>
+                <a:latin typeface="Manrope" pitchFamily="34" charset="0"/>
+                <a:ea typeface="Manrope" pitchFamily="34" charset="-122"/>
+                <a:cs typeface="Manrope" pitchFamily="34" charset="-120"/>
+              </a:rPr>
+              <a:t>FLOWCHART</a:t>
+            </a:r>
+            <a:endParaRPr lang="en-US" sz="1100" dirty="0"/>
+          </a:p>
+        </p:txBody>
+      </p:sp>
+      <p:sp>
+        <p:nvSpPr>
+          <p:cNvPr id="6" name="Text 3"/>
+          <p:cNvSpPr/>
+          <p:nvPr/>
+        </p:nvSpPr>
+        <p:spPr>
+          <a:xfrm>
+            <a:off x="457200" y="1060704"/>
+            <a:ext cx="6647688" cy="457200"/>
+          </a:xfrm>
+          <a:prstGeom prst="rect">
+            <a:avLst/>
+          </a:prstGeom>
+          <a:noFill/>
+          <a:ln/>
+        </p:spPr>
+        <p:txBody>
+          <a:bodyPr wrap="square" lIns="0" tIns="0" rIns="0" bIns="0" rtlCol="0" anchor="ctr"/>
+          <a:lstStyle/>
+          <a:p>
+            <a:pPr marL="0" indent="0">
+              <a:buNone/>
+            </a:pPr>
+            <a:r>
+              <a:rPr lang="en-US" sz="2500" b="1" dirty="0">
+                <a:solidFill>
+                  <a:srgbClr val="FFFFFF"/>
+                </a:solidFill>
+                <a:latin typeface="Manrope" pitchFamily="34" charset="0"/>
+                <a:ea typeface="Manrope" pitchFamily="34" charset="-122"/>
+                <a:cs typeface="Manrope" pitchFamily="34" charset="-120"/>
+              </a:rPr>
+              <a:t>[Procedure name]</a:t>
+            </a:r>
+            <a:endParaRPr lang="en-US" sz="2500" dirty="0"/>
+          </a:p>
+        </p:txBody>
+      </p:sp>
+      <p:sp>
+        <p:nvSpPr>
+          <p:cNvPr id="7" name="Shape 4"/>
+          <p:cNvSpPr/>
+          <p:nvPr/>
+        </p:nvSpPr>
+        <p:spPr>
+          <a:xfrm>
+            <a:off x="457200" y="1920240"/>
+            <a:ext cx="6647688" cy="658368"/>
+          </a:xfrm>
+          <a:prstGeom prst="roundRect">
+            <a:avLst>
+              <a:gd name="adj" fmla="val 11111"/>
+            </a:avLst>
+          </a:prstGeom>
+          <a:solidFill>
+            <a:srgbClr val="E2F1F1"/>
+          </a:solidFill>
+          <a:ln/>
+        </p:spPr>
+        <p:txBody>
+          <a:bodyPr/>
+          <a:lstStyle/>
+          <a:p>
+            <a:endParaRPr lang="en-US"/>
+          </a:p>
+        </p:txBody>
+      </p:sp>
+      <p:sp>
+        <p:nvSpPr>
+          <p:cNvPr id="8" name="Shape 5"/>
+          <p:cNvSpPr/>
+          <p:nvPr/>
+        </p:nvSpPr>
+        <p:spPr>
+          <a:xfrm>
+            <a:off x="621792" y="2075688"/>
+            <a:ext cx="347472" cy="347472"/>
+          </a:xfrm>
+          <a:prstGeom prst="ellipse">
+            <a:avLst/>
+          </a:prstGeom>
+          <a:solidFill>
+            <a:srgbClr val="0F8B8D"/>
+          </a:solidFill>
+          <a:ln/>
+        </p:spPr>
+        <p:txBody>
+          <a:bodyPr/>
+          <a:lstStyle/>
+          <a:p>
+            <a:endParaRPr lang="en-US"/>
+          </a:p>
+        </p:txBody>
+      </p:sp>
+      <p:pic>
+        <p:nvPicPr>
+          <p:cNvPr id="9" name="Image 1" descr="preencoded.png"/>
+          <p:cNvPicPr>
+            <a:picLocks noChangeAspect="1"/>
+          </p:cNvPicPr>
+          <p:nvPr/>
+        </p:nvPicPr>
+        <p:blipFill>
+          <a:blip r:embed="rId3"/>
+          <a:stretch>
+            <a:fillRect/>
+          </a:stretch>
+        </p:blipFill>
+        <p:spPr>
+          <a:xfrm>
+            <a:off x="704088" y="2157984"/>
+            <a:ext cx="182880" cy="182880"/>
+          </a:xfrm>
+          <a:prstGeom prst="rect">
+            <a:avLst/>
+          </a:prstGeom>
+        </p:spPr>
+      </p:pic>
+      <p:sp>
+        <p:nvSpPr>
+          <p:cNvPr id="10" name="Text 6"/>
+          <p:cNvSpPr/>
+          <p:nvPr/>
+        </p:nvSpPr>
+        <p:spPr>
+          <a:xfrm>
+            <a:off x="1115568" y="1920240"/>
+            <a:ext cx="5824728" cy="658368"/>
+          </a:xfrm>
+          <a:prstGeom prst="rect">
+            <a:avLst/>
+          </a:prstGeom>
+          <a:noFill/>
+          <a:ln/>
+        </p:spPr>
+        <p:txBody>
+          <a:bodyPr wrap="square" lIns="0" tIns="0" rIns="0" bIns="0" rtlCol="0" anchor="ctr"/>
+          <a:lstStyle/>
+          <a:p>
+            <a:pPr marL="0" indent="0">
+              <a:buNone/>
+            </a:pPr>
+            <a:r>
+              <a:rPr lang="en-US" sz="1150" dirty="0">
+                <a:solidFill>
+                  <a:srgbClr val="BCBFCC"/>
+                </a:solidFill>
+                <a:latin typeface="Manrope" pitchFamily="34" charset="0"/>
+                <a:ea typeface="Manrope" pitchFamily="34" charset="-122"/>
+                <a:cs typeface="Manrope" pitchFamily="34" charset="-120"/>
+              </a:rPr>
+              <a:t>[Critical safety or compliance note, if any.]</a:t>
+            </a:r>
+            <a:endParaRPr lang="en-US" sz="1150" dirty="0"/>
+          </a:p>
+        </p:txBody>
+      </p:sp>
+      <p:sp>
+        <p:nvSpPr>
+          <p:cNvPr id="11" name="Shape 7"/>
+          <p:cNvSpPr/>
+          <p:nvPr/>
+        </p:nvSpPr>
+        <p:spPr>
+          <a:xfrm>
+            <a:off x="457200" y="2880360"/>
+            <a:ext cx="6647688" cy="1078992"/>
+          </a:xfrm>
+          <a:prstGeom prst="roundRect">
+            <a:avLst>
+              <a:gd name="adj" fmla="val 5085"/>
+            </a:avLst>
+          </a:prstGeom>
+          <a:solidFill>
+            <a:srgbClr val="FFFFFF"/>
+          </a:solidFill>
+          <a:ln w="12700">
+            <a:solidFill>
+              <a:srgbClr val="93CBCC"/>
+            </a:solidFill>
+            <a:prstDash val="solid"/>
+          </a:ln>
+        </p:spPr>
+        <p:txBody>
+          <a:bodyPr/>
+          <a:lstStyle/>
+          <a:p>
+            <a:endParaRPr lang="en-US"/>
+          </a:p>
+        </p:txBody>
+      </p:sp>
+      <p:sp>
+        <p:nvSpPr>
+          <p:cNvPr id="12" name="Shape 8"/>
+          <p:cNvSpPr/>
+          <p:nvPr/>
+        </p:nvSpPr>
+        <p:spPr>
+          <a:xfrm>
+            <a:off x="685800" y="3200400"/>
+            <a:ext cx="457200" cy="457200"/>
+          </a:xfrm>
+          <a:prstGeom prst="ellipse">
+            <a:avLst/>
+          </a:prstGeom>
+          <a:solidFill>
+            <a:srgbClr val="0F8B8D"/>
+          </a:solidFill>
+          <a:ln/>
+        </p:spPr>
+        <p:txBody>
+          <a:bodyPr/>
+          <a:lstStyle/>
+          <a:p>
+            <a:endParaRPr lang="en-US"/>
+          </a:p>
+        </p:txBody>
+      </p:sp>
+      <p:sp>
+        <p:nvSpPr>
+          <p:cNvPr id="13" name="Text 9"/>
+          <p:cNvSpPr/>
+          <p:nvPr/>
+        </p:nvSpPr>
+        <p:spPr>
+          <a:xfrm>
+            <a:off x="685800" y="3200400"/>
+            <a:ext cx="457200" cy="457200"/>
+          </a:xfrm>
+          <a:prstGeom prst="rect">
+            <a:avLst/>
+          </a:prstGeom>
+          <a:noFill/>
+          <a:ln/>
+        </p:spPr>
+        <p:txBody>
+          <a:bodyPr wrap="square" lIns="0" tIns="0" rIns="0" bIns="0" rtlCol="0" anchor="ctr"/>
+          <a:lstStyle/>
+          <a:p>
+            <a:pPr marL="0" indent="0" algn="ctr">
+              <a:buNone/>
+            </a:pPr>
+            <a:r>
+              <a:rPr lang="en-US" sz="1600" b="1" dirty="0">
+                <a:solidFill>
+                  <a:srgbClr val="FFFFFF"/>
+                </a:solidFill>
+                <a:latin typeface="Manrope" pitchFamily="34" charset="0"/>
+                <a:ea typeface="Manrope" pitchFamily="34" charset="-122"/>
+                <a:cs typeface="Manrope" pitchFamily="34" charset="-120"/>
+              </a:rPr>
+              <a:t>1</a:t>
+            </a:r>
+            <a:endParaRPr lang="en-US" sz="1600" dirty="0"/>
+          </a:p>
+        </p:txBody>
+      </p:sp>
+      <p:sp>
+        <p:nvSpPr>
+          <p:cNvPr id="14" name="Text 10"/>
+          <p:cNvSpPr/>
+          <p:nvPr/>
+        </p:nvSpPr>
+        <p:spPr>
+          <a:xfrm>
+            <a:off x="1325880" y="3063240"/>
+            <a:ext cx="5550408" cy="731520"/>
+          </a:xfrm>
+          <a:prstGeom prst="rect">
+            <a:avLst/>
+          </a:prstGeom>
+          <a:noFill/>
+          <a:ln/>
+        </p:spPr>
+        <p:txBody>
+          <a:bodyPr wrap="square" lIns="0" tIns="0" rIns="0" bIns="0" rtlCol="0" anchor="ctr"/>
+          <a:lstStyle/>
+          <a:p>
+            <a:pPr marL="0" indent="0">
+              <a:lnSpc>
+                <a:spcPct val="110000"/>
+              </a:lnSpc>
+              <a:buNone/>
+            </a:pPr>
+            <a:r>
+              <a:rPr lang="en-US" sz="1300" b="1" dirty="0">
+                <a:solidFill>
+                  <a:srgbClr val="0C2C3A"/>
+                </a:solidFill>
+                <a:latin typeface="Manrope" pitchFamily="34" charset="0"/>
+                <a:ea typeface="Manrope" pitchFamily="34" charset="-122"/>
+                <a:cs typeface="Manrope" pitchFamily="34" charset="-120"/>
+              </a:rPr>
+              <a:t>[Step 1]  </a:t>
+            </a:r>
+            <a:r>
+              <a:rPr lang="en-US" sz="1100" dirty="0">
+                <a:solidFill>
+                  <a:srgbClr val="BCBFCC"/>
+                </a:solidFill>
+                <a:latin typeface="Manrope" pitchFamily="34" charset="0"/>
+                <a:ea typeface="Manrope" pitchFamily="34" charset="-122"/>
+                <a:cs typeface="Manrope" pitchFamily="34" charset="-120"/>
+              </a:rPr>
+              <a:t>[What to do, and any key detail.]</a:t>
+            </a:r>
+            <a:endParaRPr lang="en-US" sz="1300" dirty="0"/>
+          </a:p>
+        </p:txBody>
+      </p:sp>
+      <p:sp>
+        <p:nvSpPr>
+          <p:cNvPr id="15" name="Text 11"/>
+          <p:cNvSpPr/>
+          <p:nvPr/>
+        </p:nvSpPr>
+        <p:spPr>
+          <a:xfrm>
+            <a:off x="731520" y="3931920"/>
+            <a:ext cx="365760" cy="256032"/>
+          </a:xfrm>
+          <a:prstGeom prst="rect">
+            <a:avLst/>
+          </a:prstGeom>
+          <a:noFill/>
+          <a:ln/>
+        </p:spPr>
+        <p:txBody>
+          <a:bodyPr wrap="square" lIns="0" tIns="0" rIns="0" bIns="0" rtlCol="0" anchor="ctr"/>
+          <a:lstStyle/>
+          <a:p>
+            <a:pPr marL="0" indent="0" algn="ctr">
+              <a:buNone/>
+            </a:pPr>
+            <a:r>
+              <a:rPr lang="en-US" sz="1300" dirty="0">
+                <a:solidFill>
+                  <a:srgbClr val="0F8B8D"/>
+                </a:solidFill>
+                <a:latin typeface="Manrope" pitchFamily="34" charset="0"/>
+                <a:ea typeface="Manrope" pitchFamily="34" charset="-122"/>
+                <a:cs typeface="Manrope" pitchFamily="34" charset="-120"/>
+              </a:rPr>
+              <a:t>▼</a:t>
+            </a:r>
+            <a:endParaRPr lang="en-US" sz="1300" dirty="0"/>
+          </a:p>
+        </p:txBody>
+      </p:sp>
+      <p:sp>
+        <p:nvSpPr>
+          <p:cNvPr id="16" name="Shape 12"/>
+          <p:cNvSpPr/>
+          <p:nvPr/>
+        </p:nvSpPr>
+        <p:spPr>
+          <a:xfrm>
+            <a:off x="457200" y="4297680"/>
+            <a:ext cx="6647688" cy="1078992"/>
+          </a:xfrm>
+          <a:prstGeom prst="roundRect">
+            <a:avLst>
+              <a:gd name="adj" fmla="val 5085"/>
+            </a:avLst>
+          </a:prstGeom>
+          <a:solidFill>
+            <a:srgbClr val="FFFFFF"/>
+          </a:solidFill>
+          <a:ln w="12700">
+            <a:solidFill>
+              <a:srgbClr val="93CBCC"/>
+            </a:solidFill>
+            <a:prstDash val="solid"/>
+          </a:ln>
+        </p:spPr>
+        <p:txBody>
+          <a:bodyPr/>
+          <a:lstStyle/>
+          <a:p>
+            <a:endParaRPr lang="en-US"/>
+          </a:p>
+        </p:txBody>
+      </p:sp>
+      <p:sp>
+        <p:nvSpPr>
+          <p:cNvPr id="17" name="Shape 13"/>
+          <p:cNvSpPr/>
+          <p:nvPr/>
+        </p:nvSpPr>
+        <p:spPr>
+          <a:xfrm>
+            <a:off x="685800" y="4617720"/>
+            <a:ext cx="457200" cy="457200"/>
+          </a:xfrm>
+          <a:prstGeom prst="ellipse">
+            <a:avLst/>
+          </a:prstGeom>
+          <a:solidFill>
+            <a:srgbClr val="0F8B8D"/>
+          </a:solidFill>
+          <a:ln/>
+        </p:spPr>
+        <p:txBody>
+          <a:bodyPr/>
+          <a:lstStyle/>
+          <a:p>
+            <a:endParaRPr lang="en-US"/>
+          </a:p>
+        </p:txBody>
+      </p:sp>
+      <p:sp>
+        <p:nvSpPr>
+          <p:cNvPr id="18" name="Text 14"/>
+          <p:cNvSpPr/>
+          <p:nvPr/>
+        </p:nvSpPr>
+        <p:spPr>
+          <a:xfrm>
+            <a:off x="685800" y="4617720"/>
+            <a:ext cx="457200" cy="457200"/>
+          </a:xfrm>
+          <a:prstGeom prst="rect">
+            <a:avLst/>
+          </a:prstGeom>
+          <a:noFill/>
+          <a:ln/>
+        </p:spPr>
+        <p:txBody>
+          <a:bodyPr wrap="square" lIns="0" tIns="0" rIns="0" bIns="0" rtlCol="0" anchor="ctr"/>
+          <a:lstStyle/>
+          <a:p>
+            <a:pPr marL="0" indent="0" algn="ctr">
+              <a:buNone/>
+            </a:pPr>
+            <a:r>
+              <a:rPr lang="en-US" sz="1600" b="1" dirty="0">
+                <a:solidFill>
+                  <a:srgbClr val="FFFFFF"/>
+                </a:solidFill>
+                <a:latin typeface="Manrope" pitchFamily="34" charset="0"/>
+                <a:ea typeface="Manrope" pitchFamily="34" charset="-122"/>
+                <a:cs typeface="Manrope" pitchFamily="34" charset="-120"/>
+              </a:rPr>
+              <a:t>2</a:t>
+            </a:r>
+            <a:endParaRPr lang="en-US" sz="1600" dirty="0"/>
+          </a:p>
+        </p:txBody>
+      </p:sp>
+      <p:sp>
+        <p:nvSpPr>
+          <p:cNvPr id="19" name="Text 15"/>
+          <p:cNvSpPr/>
+          <p:nvPr/>
+        </p:nvSpPr>
+        <p:spPr>
+          <a:xfrm>
+            <a:off x="1325880" y="4480560"/>
+            <a:ext cx="5550408" cy="731520"/>
+          </a:xfrm>
+          <a:prstGeom prst="rect">
+            <a:avLst/>
+          </a:prstGeom>
+          <a:noFill/>
+          <a:ln/>
+        </p:spPr>
+        <p:txBody>
+          <a:bodyPr wrap="square" lIns="0" tIns="0" rIns="0" bIns="0" rtlCol="0" anchor="ctr"/>
+          <a:lstStyle/>
+          <a:p>
+            <a:pPr marL="0" indent="0">
+              <a:lnSpc>
+                <a:spcPct val="110000"/>
+              </a:lnSpc>
+              <a:buNone/>
+            </a:pPr>
+            <a:r>
+              <a:rPr lang="en-US" sz="1300" b="1" dirty="0">
+                <a:solidFill>
+                  <a:srgbClr val="0C2C3A"/>
+                </a:solidFill>
+                <a:latin typeface="Manrope" pitchFamily="34" charset="0"/>
+                <a:ea typeface="Manrope" pitchFamily="34" charset="-122"/>
+                <a:cs typeface="Manrope" pitchFamily="34" charset="-120"/>
+              </a:rPr>
+              <a:t>[Step 2]  </a:t>
+            </a:r>
+            <a:r>
+              <a:rPr lang="en-US" sz="1100" dirty="0">
+                <a:solidFill>
+                  <a:srgbClr val="BCBFCC"/>
+                </a:solidFill>
+                <a:latin typeface="Manrope" pitchFamily="34" charset="0"/>
+                <a:ea typeface="Manrope" pitchFamily="34" charset="-122"/>
+                <a:cs typeface="Manrope" pitchFamily="34" charset="-120"/>
+              </a:rPr>
+              <a:t>[What to do, and any key detail.]</a:t>
+            </a:r>
+            <a:endParaRPr lang="en-US" sz="1300" dirty="0"/>
+          </a:p>
+        </p:txBody>
+      </p:sp>
+      <p:sp>
+        <p:nvSpPr>
+          <p:cNvPr id="20" name="Text 16"/>
+          <p:cNvSpPr/>
+          <p:nvPr/>
+        </p:nvSpPr>
+        <p:spPr>
+          <a:xfrm>
+            <a:off x="731520" y="5349240"/>
+            <a:ext cx="365760" cy="256032"/>
+          </a:xfrm>
+          <a:prstGeom prst="rect">
+            <a:avLst/>
+          </a:prstGeom>
+          <a:noFill/>
+          <a:ln/>
+        </p:spPr>
+        <p:txBody>
+          <a:bodyPr wrap="square" lIns="0" tIns="0" rIns="0" bIns="0" rtlCol="0" anchor="ctr"/>
+          <a:lstStyle/>
+          <a:p>
+            <a:pPr marL="0" indent="0" algn="ctr">
+              <a:buNone/>
+            </a:pPr>
+            <a:r>
+              <a:rPr lang="en-US" sz="1300" dirty="0">
+                <a:solidFill>
+                  <a:srgbClr val="0F8B8D"/>
+                </a:solidFill>
+                <a:latin typeface="Manrope" pitchFamily="34" charset="0"/>
+                <a:ea typeface="Manrope" pitchFamily="34" charset="-122"/>
+                <a:cs typeface="Manrope" pitchFamily="34" charset="-120"/>
+              </a:rPr>
+              <a:t>▼</a:t>
+            </a:r>
+            <a:endParaRPr lang="en-US" sz="1300" dirty="0"/>
+          </a:p>
+        </p:txBody>
+      </p:sp>
+      <p:sp>
+        <p:nvSpPr>
+          <p:cNvPr id="21" name="Shape 17"/>
+          <p:cNvSpPr/>
+          <p:nvPr/>
+        </p:nvSpPr>
+        <p:spPr>
+          <a:xfrm>
+            <a:off x="457200" y="5715000"/>
+            <a:ext cx="6647688" cy="1078992"/>
+          </a:xfrm>
+          <a:prstGeom prst="roundRect">
+            <a:avLst>
+              <a:gd name="adj" fmla="val 5085"/>
+            </a:avLst>
+          </a:prstGeom>
+          <a:solidFill>
+            <a:srgbClr val="FFFFFF"/>
+          </a:solidFill>
+          <a:ln w="12700">
+            <a:solidFill>
+              <a:srgbClr val="93CBCC"/>
+            </a:solidFill>
+            <a:prstDash val="solid"/>
+          </a:ln>
+        </p:spPr>
+        <p:txBody>
+          <a:bodyPr/>
+          <a:lstStyle/>
+          <a:p>
+            <a:endParaRPr lang="en-US"/>
+          </a:p>
+        </p:txBody>
+      </p:sp>
+      <p:sp>
+        <p:nvSpPr>
+          <p:cNvPr id="22" name="Shape 18"/>
+          <p:cNvSpPr/>
+          <p:nvPr/>
+        </p:nvSpPr>
+        <p:spPr>
+          <a:xfrm>
+            <a:off x="685800" y="6035040"/>
+            <a:ext cx="457200" cy="457200"/>
+          </a:xfrm>
+          <a:prstGeom prst="ellipse">
+            <a:avLst/>
+          </a:prstGeom>
+          <a:solidFill>
+            <a:srgbClr val="0F8B8D"/>
+          </a:solidFill>
+          <a:ln/>
+        </p:spPr>
+        <p:txBody>
+          <a:bodyPr/>
+          <a:lstStyle/>
+          <a:p>
+            <a:endParaRPr lang="en-US"/>
+          </a:p>
+        </p:txBody>
+      </p:sp>
+      <p:sp>
+        <p:nvSpPr>
+          <p:cNvPr id="23" name="Text 19"/>
+          <p:cNvSpPr/>
+          <p:nvPr/>
+        </p:nvSpPr>
+        <p:spPr>
+          <a:xfrm>
+            <a:off x="685800" y="6035040"/>
+            <a:ext cx="457200" cy="457200"/>
+          </a:xfrm>
+          <a:prstGeom prst="rect">
+            <a:avLst/>
+          </a:prstGeom>
+          <a:noFill/>
+          <a:ln/>
+        </p:spPr>
+        <p:txBody>
+          <a:bodyPr wrap="square" lIns="0" tIns="0" rIns="0" bIns="0" rtlCol="0" anchor="ctr"/>
+          <a:lstStyle/>
+          <a:p>
+            <a:pPr marL="0" indent="0" algn="ctr">
+              <a:buNone/>
+            </a:pPr>
+            <a:r>
+              <a:rPr lang="en-US" sz="1600" b="1" dirty="0">
+                <a:solidFill>
+                  <a:srgbClr val="FFFFFF"/>
+                </a:solidFill>
+                <a:latin typeface="Manrope" pitchFamily="34" charset="0"/>
+                <a:ea typeface="Manrope" pitchFamily="34" charset="-122"/>
+                <a:cs typeface="Manrope" pitchFamily="34" charset="-120"/>
+              </a:rPr>
+              <a:t>3</a:t>
+            </a:r>
+            <a:endParaRPr lang="en-US" sz="1600" dirty="0"/>
+          </a:p>
+        </p:txBody>
+      </p:sp>
+      <p:sp>
+        <p:nvSpPr>
+          <p:cNvPr id="24" name="Text 20"/>
+          <p:cNvSpPr/>
+          <p:nvPr/>
+        </p:nvSpPr>
+        <p:spPr>
+          <a:xfrm>
+            <a:off x="1325880" y="5897880"/>
+            <a:ext cx="5550408" cy="731520"/>
+          </a:xfrm>
+          <a:prstGeom prst="rect">
+            <a:avLst/>
+          </a:prstGeom>
+          <a:noFill/>
+          <a:ln/>
+        </p:spPr>
+        <p:txBody>
+          <a:bodyPr wrap="square" lIns="0" tIns="0" rIns="0" bIns="0" rtlCol="0" anchor="ctr"/>
+          <a:lstStyle/>
+          <a:p>
+            <a:pPr marL="0" indent="0">
+              <a:lnSpc>
+                <a:spcPct val="110000"/>
+              </a:lnSpc>
+              <a:buNone/>
+            </a:pPr>
+            <a:r>
+              <a:rPr lang="en-US" sz="1300" b="1" dirty="0">
+                <a:solidFill>
+                  <a:srgbClr val="0C2C3A"/>
+                </a:solidFill>
+                <a:latin typeface="Manrope" pitchFamily="34" charset="0"/>
+                <a:ea typeface="Manrope" pitchFamily="34" charset="-122"/>
+                <a:cs typeface="Manrope" pitchFamily="34" charset="-120"/>
+              </a:rPr>
+              <a:t>[Step 3]  </a:t>
+            </a:r>
+            <a:r>
+              <a:rPr lang="en-US" sz="1100" dirty="0">
+                <a:solidFill>
+                  <a:srgbClr val="BCBFCC"/>
+                </a:solidFill>
+                <a:latin typeface="Manrope" pitchFamily="34" charset="0"/>
+                <a:ea typeface="Manrope" pitchFamily="34" charset="-122"/>
+                <a:cs typeface="Manrope" pitchFamily="34" charset="-120"/>
+              </a:rPr>
+              <a:t>[What to do, and any key detail.]</a:t>
+            </a:r>
+            <a:endParaRPr lang="en-US" sz="1300" dirty="0"/>
+          </a:p>
+        </p:txBody>
+      </p:sp>
+      <p:sp>
+        <p:nvSpPr>
+          <p:cNvPr id="25" name="Text 21"/>
+          <p:cNvSpPr/>
+          <p:nvPr/>
+        </p:nvSpPr>
+        <p:spPr>
+          <a:xfrm>
+            <a:off x="731520" y="6766560"/>
+            <a:ext cx="365760" cy="256032"/>
+          </a:xfrm>
+          <a:prstGeom prst="rect">
+            <a:avLst/>
+          </a:prstGeom>
+          <a:noFill/>
+          <a:ln/>
+        </p:spPr>
+        <p:txBody>
+          <a:bodyPr wrap="square" lIns="0" tIns="0" rIns="0" bIns="0" rtlCol="0" anchor="ctr"/>
+          <a:lstStyle/>
+          <a:p>
+            <a:pPr marL="0" indent="0" algn="ctr">
+              <a:buNone/>
+            </a:pPr>
+            <a:r>
+              <a:rPr lang="en-US" sz="1300" dirty="0">
+                <a:solidFill>
+                  <a:srgbClr val="0F8B8D"/>
+                </a:solidFill>
+                <a:latin typeface="Manrope" pitchFamily="34" charset="0"/>
+                <a:ea typeface="Manrope" pitchFamily="34" charset="-122"/>
+                <a:cs typeface="Manrope" pitchFamily="34" charset="-120"/>
+              </a:rPr>
+              <a:t>▼</a:t>
+            </a:r>
+            <a:endParaRPr lang="en-US" sz="1300" dirty="0"/>
+          </a:p>
+        </p:txBody>
+      </p:sp>
+      <p:sp>
+        <p:nvSpPr>
+          <p:cNvPr id="26" name="Shape 22"/>
+          <p:cNvSpPr/>
+          <p:nvPr/>
+        </p:nvSpPr>
+        <p:spPr>
+          <a:xfrm>
+            <a:off x="457200" y="7132320"/>
+            <a:ext cx="6647688" cy="1078992"/>
+          </a:xfrm>
+          <a:prstGeom prst="roundRect">
+            <a:avLst>
+              <a:gd name="adj" fmla="val 5085"/>
+            </a:avLst>
+          </a:prstGeom>
+          <a:solidFill>
+            <a:srgbClr val="FFFFFF"/>
+          </a:solidFill>
+          <a:ln w="12700">
+            <a:solidFill>
+              <a:srgbClr val="93CBCC"/>
+            </a:solidFill>
+            <a:prstDash val="solid"/>
+          </a:ln>
+        </p:spPr>
+        <p:txBody>
+          <a:bodyPr/>
+          <a:lstStyle/>
+          <a:p>
+            <a:endParaRPr lang="en-US"/>
+          </a:p>
+        </p:txBody>
+      </p:sp>
+      <p:sp>
+        <p:nvSpPr>
+          <p:cNvPr id="27" name="Shape 23"/>
+          <p:cNvSpPr/>
+          <p:nvPr/>
+        </p:nvSpPr>
+        <p:spPr>
+          <a:xfrm>
+            <a:off x="685800" y="7452360"/>
+            <a:ext cx="457200" cy="457200"/>
+          </a:xfrm>
+          <a:prstGeom prst="ellipse">
+            <a:avLst/>
+          </a:prstGeom>
+          <a:solidFill>
+            <a:srgbClr val="0F8B8D"/>
+          </a:solidFill>
+          <a:ln/>
+        </p:spPr>
+        <p:txBody>
+          <a:bodyPr/>
+          <a:lstStyle/>
+          <a:p>
+            <a:endParaRPr lang="en-US"/>
+          </a:p>
+        </p:txBody>
+      </p:sp>
+      <p:sp>
+        <p:nvSpPr>
+          <p:cNvPr id="28" name="Text 24"/>
+          <p:cNvSpPr/>
+          <p:nvPr/>
+        </p:nvSpPr>
+        <p:spPr>
+          <a:xfrm>
+            <a:off x="685800" y="7452360"/>
+            <a:ext cx="457200" cy="457200"/>
+          </a:xfrm>
+          <a:prstGeom prst="rect">
+            <a:avLst/>
+          </a:prstGeom>
+          <a:noFill/>
+          <a:ln/>
+        </p:spPr>
+        <p:txBody>
+          <a:bodyPr wrap="square" lIns="0" tIns="0" rIns="0" bIns="0" rtlCol="0" anchor="ctr"/>
+          <a:lstStyle/>
+          <a:p>
+            <a:pPr marL="0" indent="0" algn="ctr">
+              <a:buNone/>
+            </a:pPr>
+            <a:r>
+              <a:rPr lang="en-US" sz="1600" b="1" dirty="0">
+                <a:solidFill>
+                  <a:srgbClr val="FFFFFF"/>
+                </a:solidFill>
+                <a:latin typeface="Manrope" pitchFamily="34" charset="0"/>
+                <a:ea typeface="Manrope" pitchFamily="34" charset="-122"/>
+                <a:cs typeface="Manrope" pitchFamily="34" charset="-120"/>
+              </a:rPr>
+              <a:t>4</a:t>
+            </a:r>
+            <a:endParaRPr lang="en-US" sz="1600" dirty="0"/>
+          </a:p>
+        </p:txBody>
+      </p:sp>
+      <p:sp>
+        <p:nvSpPr>
+          <p:cNvPr id="29" name="Text 25"/>
+          <p:cNvSpPr/>
+          <p:nvPr/>
+        </p:nvSpPr>
+        <p:spPr>
+          <a:xfrm>
+            <a:off x="1325880" y="7315200"/>
+            <a:ext cx="5550408" cy="731520"/>
+          </a:xfrm>
+          <a:prstGeom prst="rect">
+            <a:avLst/>
+          </a:prstGeom>
+          <a:noFill/>
+          <a:ln/>
+        </p:spPr>
+        <p:txBody>
+          <a:bodyPr wrap="square" lIns="0" tIns="0" rIns="0" bIns="0" rtlCol="0" anchor="ctr"/>
+          <a:lstStyle/>
+          <a:p>
+            <a:pPr marL="0" indent="0">
+              <a:lnSpc>
+                <a:spcPct val="110000"/>
+              </a:lnSpc>
+              <a:buNone/>
+            </a:pPr>
+            <a:r>
+              <a:rPr lang="en-US" sz="1300" b="1" dirty="0">
+                <a:solidFill>
+                  <a:srgbClr val="0C2C3A"/>
+                </a:solidFill>
+                <a:latin typeface="Manrope" pitchFamily="34" charset="0"/>
+                <a:ea typeface="Manrope" pitchFamily="34" charset="-122"/>
+                <a:cs typeface="Manrope" pitchFamily="34" charset="-120"/>
+              </a:rPr>
+              <a:t>[Step 4]  </a:t>
+            </a:r>
+            <a:r>
+              <a:rPr lang="en-US" sz="1100" dirty="0">
+                <a:solidFill>
+                  <a:srgbClr val="BCBFCC"/>
+                </a:solidFill>
+                <a:latin typeface="Manrope" pitchFamily="34" charset="0"/>
+                <a:ea typeface="Manrope" pitchFamily="34" charset="-122"/>
+                <a:cs typeface="Manrope" pitchFamily="34" charset="-120"/>
+              </a:rPr>
+              <a:t>[What to do, and any key detail.]</a:t>
+            </a:r>
+            <a:endParaRPr lang="en-US" sz="1300" dirty="0"/>
+          </a:p>
+        </p:txBody>
+      </p:sp>
+      <p:pic>
+        <p:nvPicPr>
+          <p:cNvPr id="30" name="Image 2" descr="/home/claude/deck/img/mark.png"/>
+          <p:cNvPicPr>
+            <a:picLocks noChangeAspect="1"/>
+          </p:cNvPicPr>
+          <p:nvPr/>
+        </p:nvPicPr>
+        <p:blipFill>
+          <a:blip r:embed="rId4"/>
+          <a:stretch>
+            <a:fillRect/>
+          </a:stretch>
+        </p:blipFill>
+        <p:spPr>
+          <a:xfrm>
+            <a:off x="457200" y="10268712"/>
+            <a:ext cx="201168" cy="201168"/>
+          </a:xfrm>
+          <a:prstGeom prst="rect">
+            <a:avLst/>
+          </a:prstGeom>
+        </p:spPr>
+      </p:pic>
+      <p:sp>
+        <p:nvSpPr>
+          <p:cNvPr id="31" name="Text 26"/>
+          <p:cNvSpPr/>
+          <p:nvPr/>
+        </p:nvSpPr>
+        <p:spPr>
+          <a:xfrm>
+            <a:off x="731520" y="10259568"/>
+            <a:ext cx="3108960" cy="219456"/>
+          </a:xfrm>
+          <a:prstGeom prst="rect">
+            <a:avLst/>
+          </a:prstGeom>
+          <a:noFill/>
+          <a:ln/>
+        </p:spPr>
+        <p:txBody>
+          <a:bodyPr wrap="square" lIns="0" tIns="0" rIns="0" bIns="0" rtlCol="0" anchor="ctr"/>
+          <a:lstStyle/>
+          <a:p>
+            <a:pPr marL="0" indent="0">
+              <a:buNone/>
+            </a:pPr>
+            <a:r>
+              <a:rPr lang="en-US" sz="900" dirty="0">
+                <a:solidFill>
+                  <a:srgbClr val="6E7180"/>
+                </a:solidFill>
+                <a:latin typeface="Manrope" pitchFamily="34" charset="0"/>
+                <a:ea typeface="Manrope" pitchFamily="34" charset="-122"/>
+                <a:cs typeface="Manrope" pitchFamily="34" charset="-120"/>
+              </a:rPr>
+              <a:t>Aqualogic, a Sustec company</a:t>
+            </a:r>
+            <a:endParaRPr lang="en-US" sz="900" dirty="0"/>
+          </a:p>
+        </p:txBody>
+      </p:sp>
+      <p:sp>
+        <p:nvSpPr>
+          <p:cNvPr id="32" name="Text 27"/>
+          <p:cNvSpPr/>
+          <p:nvPr/>
+        </p:nvSpPr>
+        <p:spPr>
+          <a:xfrm>
+            <a:off x="3355848" y="10259568"/>
+            <a:ext cx="3749040" cy="219456"/>
+          </a:xfrm>
+          <a:prstGeom prst="rect">
+            <a:avLst/>
+          </a:prstGeom>
+          <a:noFill/>
+          <a:ln/>
+        </p:spPr>
+        <p:txBody>
+          <a:bodyPr wrap="square" lIns="0" tIns="0" rIns="0" bIns="0" rtlCol="0" anchor="ctr"/>
+          <a:lstStyle/>
+          <a:p>
+            <a:pPr marL="0" indent="0" algn="r">
+              <a:buNone/>
+            </a:pPr>
+            <a:r>
+              <a:rPr lang="en-US" sz="900" i="1" dirty="0">
+                <a:solidFill>
+                  <a:srgbClr val="BCBFCC"/>
+                </a:solidFill>
+                <a:latin typeface="Manrope" pitchFamily="34" charset="0"/>
+                <a:ea typeface="Manrope" pitchFamily="34" charset="-122"/>
+                <a:cs typeface="Manrope" pitchFamily="34" charset="-120"/>
+              </a:rPr>
+              <a:t>For the detail, see the full procedure in the IMS.</a:t>
+            </a:r>
+            <a:endParaRPr lang="en-US" sz="900" dirty="0"/>
+          </a:p>
+        </p:txBody>
+      </p:sp>
+    </p:spTree>
+  </p:cSld>
+  <p:clrMapOvr>
+    <a:masterClrMapping/>
+  </p:clrMapOvr>
+</p:sld>
+</file>
+
+<file path=ppt/slides/slide19.xml><?xml version="1.0" encoding="utf-8"?>
+<p:sld xmlns:a="http://schemas.openxmlformats.org/drawingml/2006/main" xmlns:r="http://schemas.openxmlformats.org/officeDocument/2006/relationships" xmlns:p="http://schemas.openxmlformats.org/presentationml/2006/main">
+  <p:cSld name="Slide 16">
+    <p:bg>
+      <p:bgPr>
+        <a:solidFill>
+          <a:srgbClr val="FAFBFF"/>
+        </a:solidFill>
+        <a:effectLst/>
+      </p:bgPr>
+    </p:bg>
+    <p:spTree>
+      <p:nvGrpSpPr>
+        <p:cNvPr id="1" name=""/>
+        <p:cNvGrpSpPr/>
+        <p:nvPr/>
+      </p:nvGrpSpPr>
+      <p:grpSpPr>
+        <a:xfrm>
+          <a:off x="0" y="0"/>
+          <a:ext cx="0" cy="0"/>
+          <a:chOff x="0" y="0"/>
+          <a:chExt cx="0" cy="0"/>
+        </a:xfrm>
+      </p:grpSpPr>
+      <p:sp>
+        <p:nvSpPr>
+          <p:cNvPr id="2" name="Shape 0"/>
+          <p:cNvSpPr/>
+          <p:nvPr/>
+        </p:nvSpPr>
+        <p:spPr>
+          <a:xfrm>
+            <a:off x="0" y="0"/>
+            <a:ext cx="7562088" cy="1801368"/>
+          </a:xfrm>
+          <a:prstGeom prst="rect">
+            <a:avLst/>
+          </a:prstGeom>
+          <a:solidFill>
+            <a:srgbClr val="0F8B8D"/>
+          </a:solidFill>
+          <a:ln/>
+        </p:spPr>
+        <p:txBody>
+          <a:bodyPr/>
+          <a:lstStyle/>
+          <a:p>
+            <a:endParaRPr lang="en-US"/>
+          </a:p>
+        </p:txBody>
+      </p:sp>
+      <p:pic>
+        <p:nvPicPr>
+          <p:cNvPr id="3" name="Image 0" descr="/home/claude/deck/img/logo_rev.png"/>
+          <p:cNvPicPr>
+            <a:picLocks noChangeAspect="1"/>
+          </p:cNvPicPr>
+          <p:nvPr/>
+        </p:nvPicPr>
+        <p:blipFill>
+          <a:blip r:embed="rId2"/>
+          <a:stretch>
+            <a:fillRect/>
+          </a:stretch>
+        </p:blipFill>
+        <p:spPr>
+          <a:xfrm>
+            <a:off x="457200" y="256032"/>
+            <a:ext cx="1371600" cy="451333"/>
+          </a:xfrm>
+          <a:prstGeom prst="rect">
+            <a:avLst/>
+          </a:prstGeom>
+        </p:spPr>
+      </p:pic>
+      <p:sp>
+        <p:nvSpPr>
+          <p:cNvPr id="4" name="Text 1"/>
+          <p:cNvSpPr/>
+          <p:nvPr/>
+        </p:nvSpPr>
+        <p:spPr>
+          <a:xfrm>
+            <a:off x="4453128" y="365760"/>
+            <a:ext cx="2651760" cy="274320"/>
+          </a:xfrm>
+          <a:prstGeom prst="rect">
+            <a:avLst/>
+          </a:prstGeom>
+          <a:noFill/>
+          <a:ln/>
+        </p:spPr>
+        <p:txBody>
+          <a:bodyPr wrap="square" lIns="0" tIns="0" rIns="0" bIns="0" rtlCol="0" anchor="ctr"/>
+          <a:lstStyle/>
+          <a:p>
+            <a:pPr marL="0" indent="0" algn="r">
+              <a:buNone/>
+            </a:pPr>
+            <a:r>
+              <a:rPr lang="en-US" sz="1200" b="1" kern="0" spc="200" dirty="0">
+                <a:solidFill>
+                  <a:srgbClr val="FFFFFF"/>
+                </a:solidFill>
+                <a:latin typeface="Manrope" pitchFamily="34" charset="0"/>
+                <a:ea typeface="Manrope" pitchFamily="34" charset="-122"/>
+                <a:cs typeface="Manrope" pitchFamily="34" charset="-120"/>
+              </a:rPr>
+              <a:t>DIGITAL INFRASTRUCTURE</a:t>
+            </a:r>
+            <a:endParaRPr lang="en-US" sz="1200" dirty="0"/>
+          </a:p>
+        </p:txBody>
+      </p:sp>
+      <p:sp>
+        <p:nvSpPr>
+          <p:cNvPr id="5" name="Text 2"/>
+          <p:cNvSpPr/>
+          <p:nvPr/>
+        </p:nvSpPr>
+        <p:spPr>
+          <a:xfrm>
+            <a:off x="457200" y="841248"/>
+            <a:ext cx="5486400" cy="256032"/>
+          </a:xfrm>
+          <a:prstGeom prst="rect">
+            <a:avLst/>
+          </a:prstGeom>
+          <a:noFill/>
+          <a:ln/>
+        </p:spPr>
+        <p:txBody>
+          <a:bodyPr wrap="square" lIns="0" tIns="0" rIns="0" bIns="0" rtlCol="0" anchor="ctr"/>
+          <a:lstStyle/>
+          <a:p>
+            <a:pPr marL="0" indent="0">
+              <a:buNone/>
+            </a:pPr>
+            <a:r>
+              <a:rPr lang="en-US" sz="1100" b="1" kern="0" spc="300" dirty="0">
+                <a:solidFill>
+                  <a:srgbClr val="FFFFFF"/>
+                </a:solidFill>
+                <a:latin typeface="Manrope" pitchFamily="34" charset="0"/>
+                <a:ea typeface="Manrope" pitchFamily="34" charset="-122"/>
+                <a:cs typeface="Manrope" pitchFamily="34" charset="-120"/>
+              </a:rPr>
+              <a:t>WORKFLOW</a:t>
+            </a:r>
+            <a:endParaRPr lang="en-US" sz="1100" dirty="0"/>
+          </a:p>
+        </p:txBody>
+      </p:sp>
+      <p:sp>
+        <p:nvSpPr>
+          <p:cNvPr id="6" name="Text 3"/>
+          <p:cNvSpPr/>
+          <p:nvPr/>
+        </p:nvSpPr>
+        <p:spPr>
+          <a:xfrm>
+            <a:off x="457200" y="1060704"/>
+            <a:ext cx="6647688" cy="457200"/>
+          </a:xfrm>
+          <a:prstGeom prst="rect">
+            <a:avLst/>
+          </a:prstGeom>
+          <a:noFill/>
+          <a:ln/>
+        </p:spPr>
+        <p:txBody>
+          <a:bodyPr wrap="square" lIns="0" tIns="0" rIns="0" bIns="0" rtlCol="0" anchor="ctr"/>
+          <a:lstStyle/>
+          <a:p>
+            <a:pPr marL="0" indent="0">
+              <a:buNone/>
+            </a:pPr>
+            <a:r>
+              <a:rPr lang="en-US" sz="2500" b="1" dirty="0">
+                <a:solidFill>
+                  <a:srgbClr val="FFFFFF"/>
+                </a:solidFill>
+                <a:latin typeface="Manrope" pitchFamily="34" charset="0"/>
+                <a:ea typeface="Manrope" pitchFamily="34" charset="-122"/>
+                <a:cs typeface="Manrope" pitchFamily="34" charset="-120"/>
+              </a:rPr>
+              <a:t>[Procedure name]</a:t>
+            </a:r>
+            <a:endParaRPr lang="en-US" sz="2500" dirty="0"/>
+          </a:p>
+        </p:txBody>
+      </p:sp>
+      <p:sp>
+        <p:nvSpPr>
+          <p:cNvPr id="7" name="Shape 4"/>
+          <p:cNvSpPr/>
+          <p:nvPr/>
+        </p:nvSpPr>
+        <p:spPr>
+          <a:xfrm>
+            <a:off x="1723644" y="2148840"/>
+            <a:ext cx="4114800" cy="713232"/>
+          </a:xfrm>
+          <a:prstGeom prst="roundRect">
+            <a:avLst>
+              <a:gd name="adj" fmla="val 8974"/>
+            </a:avLst>
+          </a:prstGeom>
+          <a:solidFill>
+            <a:srgbClr val="E7F3F4"/>
+          </a:solidFill>
+          <a:ln w="15875">
+            <a:solidFill>
+              <a:srgbClr val="0F8B8D"/>
+            </a:solidFill>
+            <a:prstDash val="solid"/>
+          </a:ln>
+        </p:spPr>
+        <p:txBody>
+          <a:bodyPr/>
+          <a:lstStyle/>
+          <a:p>
+            <a:endParaRPr lang="en-US"/>
+          </a:p>
+        </p:txBody>
+      </p:sp>
+      <p:sp>
+        <p:nvSpPr>
+          <p:cNvPr id="8" name="Text 5"/>
+          <p:cNvSpPr/>
+          <p:nvPr/>
+        </p:nvSpPr>
+        <p:spPr>
+          <a:xfrm>
+            <a:off x="1906524" y="2148840"/>
+            <a:ext cx="3749040" cy="713232"/>
+          </a:xfrm>
+          <a:prstGeom prst="rect">
+            <a:avLst/>
+          </a:prstGeom>
+          <a:noFill/>
+          <a:ln/>
+        </p:spPr>
+        <p:txBody>
+          <a:bodyPr wrap="square" lIns="0" tIns="0" rIns="0" bIns="0" rtlCol="0" anchor="ctr"/>
+          <a:lstStyle/>
+          <a:p>
+            <a:pPr marL="0" indent="0" algn="ctr">
+              <a:lnSpc>
+                <a:spcPct val="104000"/>
+              </a:lnSpc>
+              <a:buNone/>
+            </a:pPr>
+            <a:r>
+              <a:rPr lang="en-US" sz="1000" b="1" kern="0" spc="100" dirty="0">
+                <a:solidFill>
+                  <a:srgbClr val="0F8B8D"/>
+                </a:solidFill>
+                <a:latin typeface="Manrope" pitchFamily="34" charset="0"/>
+                <a:ea typeface="Manrope" pitchFamily="34" charset="-122"/>
+                <a:cs typeface="Manrope" pitchFamily="34" charset="-120"/>
+              </a:rPr>
+              <a:t>START   </a:t>
+            </a:r>
+            <a:r>
+              <a:rPr lang="en-US" sz="1200" b="1" dirty="0">
+                <a:solidFill>
+                  <a:srgbClr val="BCBFCC"/>
+                </a:solidFill>
+                <a:latin typeface="Manrope" pitchFamily="34" charset="0"/>
+                <a:ea typeface="Manrope" pitchFamily="34" charset="-122"/>
+                <a:cs typeface="Manrope" pitchFamily="34" charset="-120"/>
+              </a:rPr>
+              <a:t>[Starting point]</a:t>
+            </a:r>
+            <a:endParaRPr lang="en-US" sz="1000" dirty="0"/>
+          </a:p>
+        </p:txBody>
+      </p:sp>
+      <p:sp>
+        <p:nvSpPr>
+          <p:cNvPr id="9" name="Text 6"/>
+          <p:cNvSpPr/>
+          <p:nvPr/>
+        </p:nvSpPr>
+        <p:spPr>
+          <a:xfrm>
+            <a:off x="3598164" y="2843784"/>
+            <a:ext cx="365760" cy="256032"/>
+          </a:xfrm>
+          <a:prstGeom prst="rect">
+            <a:avLst/>
+          </a:prstGeom>
+          <a:noFill/>
+          <a:ln/>
+        </p:spPr>
+        <p:txBody>
+          <a:bodyPr wrap="square" lIns="0" tIns="0" rIns="0" bIns="0" rtlCol="0" anchor="ctr"/>
+          <a:lstStyle/>
+          <a:p>
+            <a:pPr marL="0" indent="0" algn="ctr">
+              <a:buNone/>
+            </a:pPr>
+            <a:r>
+              <a:rPr lang="en-US" sz="1300" dirty="0">
+                <a:solidFill>
+                  <a:srgbClr val="0F8B8D"/>
+                </a:solidFill>
+                <a:latin typeface="Manrope" pitchFamily="34" charset="0"/>
+                <a:ea typeface="Manrope" pitchFamily="34" charset="-122"/>
+                <a:cs typeface="Manrope" pitchFamily="34" charset="-120"/>
+              </a:rPr>
+              <a:t>▼</a:t>
+            </a:r>
+            <a:endParaRPr lang="en-US" sz="1300" dirty="0"/>
+          </a:p>
+        </p:txBody>
+      </p:sp>
+      <p:sp>
+        <p:nvSpPr>
+          <p:cNvPr id="10" name="Shape 7"/>
+          <p:cNvSpPr/>
+          <p:nvPr/>
+        </p:nvSpPr>
+        <p:spPr>
+          <a:xfrm>
+            <a:off x="1540764" y="3136392"/>
+            <a:ext cx="4480560" cy="749808"/>
+          </a:xfrm>
+          <a:prstGeom prst="roundRect">
+            <a:avLst>
+              <a:gd name="adj" fmla="val 8537"/>
+            </a:avLst>
+          </a:prstGeom>
+          <a:solidFill>
+            <a:srgbClr val="0F8B8D"/>
+          </a:solidFill>
+          <a:ln/>
+        </p:spPr>
+        <p:txBody>
+          <a:bodyPr/>
+          <a:lstStyle/>
+          <a:p>
+            <a:endParaRPr lang="en-US"/>
+          </a:p>
+        </p:txBody>
+      </p:sp>
+      <p:sp>
+        <p:nvSpPr>
+          <p:cNvPr id="11" name="Text 8"/>
+          <p:cNvSpPr/>
+          <p:nvPr/>
+        </p:nvSpPr>
+        <p:spPr>
+          <a:xfrm>
+            <a:off x="1723644" y="3136392"/>
+            <a:ext cx="4114800" cy="749808"/>
+          </a:xfrm>
+          <a:prstGeom prst="rect">
+            <a:avLst/>
+          </a:prstGeom>
+          <a:noFill/>
+          <a:ln/>
+        </p:spPr>
+        <p:txBody>
+          <a:bodyPr wrap="square" lIns="0" tIns="0" rIns="0" bIns="0" rtlCol="0" anchor="ctr"/>
+          <a:lstStyle/>
+          <a:p>
+            <a:pPr marL="0" indent="0" algn="ctr">
+              <a:lnSpc>
+                <a:spcPct val="100000"/>
+              </a:lnSpc>
+              <a:buNone/>
+            </a:pPr>
+            <a:r>
+              <a:rPr lang="en-US" sz="1350" b="1" dirty="0">
+                <a:solidFill>
+                  <a:srgbClr val="FFFFFF"/>
+                </a:solidFill>
+                <a:latin typeface="Manrope" pitchFamily="34" charset="0"/>
+                <a:ea typeface="Manrope" pitchFamily="34" charset="-122"/>
+                <a:cs typeface="Manrope" pitchFamily="34" charset="-120"/>
+              </a:rPr>
+              <a:t>[Decision or question?]</a:t>
+            </a:r>
+            <a:endParaRPr lang="en-US" sz="1350" dirty="0"/>
+          </a:p>
+        </p:txBody>
+      </p:sp>
+      <p:sp>
+        <p:nvSpPr>
+          <p:cNvPr id="12" name="Shape 9"/>
+          <p:cNvSpPr/>
+          <p:nvPr/>
+        </p:nvSpPr>
+        <p:spPr>
+          <a:xfrm>
+            <a:off x="3770071" y="3886200"/>
+            <a:ext cx="21946" cy="201168"/>
+          </a:xfrm>
+          <a:prstGeom prst="rect">
+            <a:avLst/>
+          </a:prstGeom>
+          <a:solidFill>
+            <a:srgbClr val="0F8B8D"/>
+          </a:solidFill>
+          <a:ln/>
+        </p:spPr>
+        <p:txBody>
+          <a:bodyPr/>
+          <a:lstStyle/>
+          <a:p>
+            <a:endParaRPr lang="en-US"/>
+          </a:p>
+        </p:txBody>
+      </p:sp>
+      <p:sp>
+        <p:nvSpPr>
+          <p:cNvPr id="13" name="Shape 10"/>
+          <p:cNvSpPr/>
+          <p:nvPr/>
+        </p:nvSpPr>
+        <p:spPr>
+          <a:xfrm>
+            <a:off x="2057400" y="4078224"/>
+            <a:ext cx="3447288" cy="21946"/>
+          </a:xfrm>
+          <a:prstGeom prst="rect">
+            <a:avLst/>
+          </a:prstGeom>
+          <a:solidFill>
+            <a:srgbClr val="0F8B8D"/>
+          </a:solidFill>
+          <a:ln/>
+        </p:spPr>
+        <p:txBody>
+          <a:bodyPr/>
+          <a:lstStyle/>
+          <a:p>
+            <a:endParaRPr lang="en-US"/>
+          </a:p>
+        </p:txBody>
+      </p:sp>
+      <p:sp>
+        <p:nvSpPr>
+          <p:cNvPr id="14" name="Shape 11"/>
+          <p:cNvSpPr/>
+          <p:nvPr/>
+        </p:nvSpPr>
+        <p:spPr>
+          <a:xfrm>
+            <a:off x="2046427" y="4078224"/>
+            <a:ext cx="21946" cy="201168"/>
+          </a:xfrm>
+          <a:prstGeom prst="rect">
+            <a:avLst/>
+          </a:prstGeom>
+          <a:solidFill>
+            <a:srgbClr val="0F8B8D"/>
+          </a:solidFill>
+          <a:ln/>
+        </p:spPr>
+        <p:txBody>
+          <a:bodyPr/>
+          <a:lstStyle/>
+          <a:p>
+            <a:endParaRPr lang="en-US"/>
+          </a:p>
+        </p:txBody>
+      </p:sp>
+      <p:sp>
+        <p:nvSpPr>
+          <p:cNvPr id="15" name="Shape 12"/>
+          <p:cNvSpPr/>
+          <p:nvPr/>
+        </p:nvSpPr>
+        <p:spPr>
+          <a:xfrm>
+            <a:off x="5493715" y="4078224"/>
+            <a:ext cx="21946" cy="201168"/>
+          </a:xfrm>
+          <a:prstGeom prst="rect">
+            <a:avLst/>
+          </a:prstGeom>
+          <a:solidFill>
+            <a:srgbClr val="0F8B8D"/>
+          </a:solidFill>
+          <a:ln/>
+        </p:spPr>
+        <p:txBody>
+          <a:bodyPr/>
+          <a:lstStyle/>
+          <a:p>
+            <a:endParaRPr lang="en-US"/>
+          </a:p>
+        </p:txBody>
+      </p:sp>
+      <p:sp>
+        <p:nvSpPr>
+          <p:cNvPr id="16" name="Text 13"/>
+          <p:cNvSpPr/>
+          <p:nvPr/>
+        </p:nvSpPr>
+        <p:spPr>
+          <a:xfrm>
+            <a:off x="1874520" y="4251960"/>
+            <a:ext cx="365760" cy="256032"/>
+          </a:xfrm>
+          <a:prstGeom prst="rect">
+            <a:avLst/>
+          </a:prstGeom>
+          <a:noFill/>
+          <a:ln/>
+        </p:spPr>
+        <p:txBody>
+          <a:bodyPr wrap="square" lIns="0" tIns="0" rIns="0" bIns="0" rtlCol="0" anchor="ctr"/>
+          <a:lstStyle/>
+          <a:p>
+            <a:pPr marL="0" indent="0" algn="ctr">
+              <a:buNone/>
+            </a:pPr>
+            <a:r>
+              <a:rPr lang="en-US" sz="1300" dirty="0">
+                <a:solidFill>
+                  <a:srgbClr val="0F8B8D"/>
+                </a:solidFill>
+                <a:latin typeface="Manrope" pitchFamily="34" charset="0"/>
+                <a:ea typeface="Manrope" pitchFamily="34" charset="-122"/>
+                <a:cs typeface="Manrope" pitchFamily="34" charset="-120"/>
+              </a:rPr>
+              <a:t>▼</a:t>
+            </a:r>
+            <a:endParaRPr lang="en-US" sz="1300" dirty="0"/>
+          </a:p>
+        </p:txBody>
+      </p:sp>
+      <p:sp>
+        <p:nvSpPr>
+          <p:cNvPr id="17" name="Text 14"/>
+          <p:cNvSpPr/>
+          <p:nvPr/>
+        </p:nvSpPr>
+        <p:spPr>
+          <a:xfrm>
+            <a:off x="5321808" y="4251960"/>
+            <a:ext cx="365760" cy="256032"/>
+          </a:xfrm>
+          <a:prstGeom prst="rect">
+            <a:avLst/>
+          </a:prstGeom>
+          <a:noFill/>
+          <a:ln/>
+        </p:spPr>
+        <p:txBody>
+          <a:bodyPr wrap="square" lIns="0" tIns="0" rIns="0" bIns="0" rtlCol="0" anchor="ctr"/>
+          <a:lstStyle/>
+          <a:p>
+            <a:pPr marL="0" indent="0" algn="ctr">
+              <a:buNone/>
+            </a:pPr>
+            <a:r>
+              <a:rPr lang="en-US" sz="1300" dirty="0">
+                <a:solidFill>
+                  <a:srgbClr val="0F8B8D"/>
+                </a:solidFill>
+                <a:latin typeface="Manrope" pitchFamily="34" charset="0"/>
+                <a:ea typeface="Manrope" pitchFamily="34" charset="-122"/>
+                <a:cs typeface="Manrope" pitchFamily="34" charset="-120"/>
+              </a:rPr>
+              <a:t>▼</a:t>
+            </a:r>
+            <a:endParaRPr lang="en-US" sz="1300" dirty="0"/>
+          </a:p>
+        </p:txBody>
+      </p:sp>
+      <p:sp>
+        <p:nvSpPr>
+          <p:cNvPr id="18" name="Text 15"/>
+          <p:cNvSpPr/>
+          <p:nvPr/>
+        </p:nvSpPr>
+        <p:spPr>
+          <a:xfrm>
+            <a:off x="457200" y="4489704"/>
+            <a:ext cx="3200400" cy="274320"/>
+          </a:xfrm>
+          <a:prstGeom prst="rect">
+            <a:avLst/>
+          </a:prstGeom>
+          <a:noFill/>
+          <a:ln/>
+        </p:spPr>
+        <p:txBody>
+          <a:bodyPr wrap="square" lIns="0" tIns="0" rIns="0" bIns="0" rtlCol="0" anchor="ctr"/>
+          <a:lstStyle/>
+          <a:p>
+            <a:pPr marL="0" indent="0" algn="ctr">
+              <a:buNone/>
+            </a:pPr>
+            <a:r>
+              <a:rPr lang="en-US" sz="1150" b="1" dirty="0">
+                <a:solidFill>
+                  <a:srgbClr val="BCBFCC"/>
+                </a:solidFill>
+                <a:latin typeface="Manrope" pitchFamily="34" charset="0"/>
+                <a:ea typeface="Manrope" pitchFamily="34" charset="-122"/>
+                <a:cs typeface="Manrope" pitchFamily="34" charset="-120"/>
+              </a:rPr>
+              <a:t>[If yes]</a:t>
+            </a:r>
+            <a:endParaRPr lang="en-US" sz="1150" dirty="0"/>
+          </a:p>
+        </p:txBody>
+      </p:sp>
+      <p:sp>
+        <p:nvSpPr>
+          <p:cNvPr id="19" name="Text 16"/>
+          <p:cNvSpPr/>
+          <p:nvPr/>
+        </p:nvSpPr>
+        <p:spPr>
+          <a:xfrm>
+            <a:off x="3904488" y="4489704"/>
+            <a:ext cx="3200400" cy="274320"/>
+          </a:xfrm>
+          <a:prstGeom prst="rect">
+            <a:avLst/>
+          </a:prstGeom>
+          <a:noFill/>
+          <a:ln/>
+        </p:spPr>
+        <p:txBody>
+          <a:bodyPr wrap="square" lIns="0" tIns="0" rIns="0" bIns="0" rtlCol="0" anchor="ctr"/>
+          <a:lstStyle/>
+          <a:p>
+            <a:pPr marL="0" indent="0" algn="ctr">
+              <a:buNone/>
+            </a:pPr>
+            <a:r>
+              <a:rPr lang="en-US" sz="1150" b="1" dirty="0">
+                <a:solidFill>
+                  <a:srgbClr val="BCBFCC"/>
+                </a:solidFill>
+                <a:latin typeface="Manrope" pitchFamily="34" charset="0"/>
+                <a:ea typeface="Manrope" pitchFamily="34" charset="-122"/>
+                <a:cs typeface="Manrope" pitchFamily="34" charset="-120"/>
+              </a:rPr>
+              <a:t>[If no]</a:t>
+            </a:r>
+            <a:endParaRPr lang="en-US" sz="1150" dirty="0"/>
+          </a:p>
+        </p:txBody>
+      </p:sp>
+      <p:sp>
+        <p:nvSpPr>
+          <p:cNvPr id="20" name="Shape 17"/>
+          <p:cNvSpPr/>
+          <p:nvPr/>
+        </p:nvSpPr>
+        <p:spPr>
+          <a:xfrm>
+            <a:off x="457200" y="4818888"/>
+            <a:ext cx="3200400" cy="969264"/>
+          </a:xfrm>
+          <a:prstGeom prst="roundRect">
+            <a:avLst>
+              <a:gd name="adj" fmla="val 5660"/>
+            </a:avLst>
+          </a:prstGeom>
+          <a:solidFill>
+            <a:srgbClr val="FFFFFF"/>
+          </a:solidFill>
+          <a:ln w="13970">
+            <a:solidFill>
+              <a:srgbClr val="87C5C6"/>
+            </a:solidFill>
+            <a:prstDash val="solid"/>
+          </a:ln>
+        </p:spPr>
+        <p:txBody>
+          <a:bodyPr/>
+          <a:lstStyle/>
+          <a:p>
+            <a:endParaRPr lang="en-US"/>
+          </a:p>
+        </p:txBody>
+      </p:sp>
+      <p:sp>
+        <p:nvSpPr>
+          <p:cNvPr id="21" name="Text 18"/>
+          <p:cNvSpPr/>
+          <p:nvPr/>
+        </p:nvSpPr>
+        <p:spPr>
+          <a:xfrm>
+            <a:off x="640080" y="4818888"/>
+            <a:ext cx="2834640" cy="969264"/>
+          </a:xfrm>
+          <a:prstGeom prst="rect">
+            <a:avLst/>
+          </a:prstGeom>
+          <a:noFill/>
+          <a:ln/>
+        </p:spPr>
+        <p:txBody>
+          <a:bodyPr wrap="square" lIns="0" tIns="0" rIns="0" bIns="0" rtlCol="0" anchor="ctr"/>
+          <a:lstStyle/>
+          <a:p>
+            <a:pPr marL="0" indent="0" algn="ctr">
+              <a:lnSpc>
+                <a:spcPct val="106000"/>
+              </a:lnSpc>
+              <a:buNone/>
+            </a:pPr>
+            <a:r>
+              <a:rPr lang="en-US" sz="1100" dirty="0">
+                <a:solidFill>
+                  <a:srgbClr val="BCBFCC"/>
+                </a:solidFill>
+                <a:latin typeface="Manrope" pitchFamily="34" charset="0"/>
+                <a:ea typeface="Manrope" pitchFamily="34" charset="-122"/>
+                <a:cs typeface="Manrope" pitchFamily="34" charset="-120"/>
+              </a:rPr>
+              <a:t>[Step]</a:t>
+            </a:r>
+            <a:endParaRPr lang="en-US" sz="1100" dirty="0"/>
+          </a:p>
+        </p:txBody>
+      </p:sp>
+      <p:sp>
+        <p:nvSpPr>
+          <p:cNvPr id="22" name="Text 19"/>
+          <p:cNvSpPr/>
+          <p:nvPr/>
+        </p:nvSpPr>
+        <p:spPr>
+          <a:xfrm>
+            <a:off x="1874520" y="5769864"/>
+            <a:ext cx="365760" cy="256032"/>
+          </a:xfrm>
+          <a:prstGeom prst="rect">
+            <a:avLst/>
+          </a:prstGeom>
+          <a:noFill/>
+          <a:ln/>
+        </p:spPr>
+        <p:txBody>
+          <a:bodyPr wrap="square" lIns="0" tIns="0" rIns="0" bIns="0" rtlCol="0" anchor="ctr"/>
+          <a:lstStyle/>
+          <a:p>
+            <a:pPr marL="0" indent="0" algn="ctr">
+              <a:buNone/>
+            </a:pPr>
+            <a:r>
+              <a:rPr lang="en-US" sz="1300" dirty="0">
+                <a:solidFill>
+                  <a:srgbClr val="0F8B8D"/>
+                </a:solidFill>
+                <a:latin typeface="Manrope" pitchFamily="34" charset="0"/>
+                <a:ea typeface="Manrope" pitchFamily="34" charset="-122"/>
+                <a:cs typeface="Manrope" pitchFamily="34" charset="-120"/>
+              </a:rPr>
+              <a:t>▼</a:t>
+            </a:r>
+            <a:endParaRPr lang="en-US" sz="1300" dirty="0"/>
+          </a:p>
+        </p:txBody>
+      </p:sp>
+      <p:sp>
+        <p:nvSpPr>
+          <p:cNvPr id="23" name="Shape 20"/>
+          <p:cNvSpPr/>
+          <p:nvPr/>
+        </p:nvSpPr>
+        <p:spPr>
+          <a:xfrm>
+            <a:off x="457200" y="6080760"/>
+            <a:ext cx="3200400" cy="969264"/>
+          </a:xfrm>
+          <a:prstGeom prst="roundRect">
+            <a:avLst>
+              <a:gd name="adj" fmla="val 5660"/>
+            </a:avLst>
+          </a:prstGeom>
+          <a:solidFill>
+            <a:srgbClr val="FFFFFF"/>
+          </a:solidFill>
+          <a:ln w="13970">
+            <a:solidFill>
+              <a:srgbClr val="87C5C6"/>
+            </a:solidFill>
+            <a:prstDash val="solid"/>
+          </a:ln>
+        </p:spPr>
+        <p:txBody>
+          <a:bodyPr/>
+          <a:lstStyle/>
+          <a:p>
+            <a:endParaRPr lang="en-US"/>
+          </a:p>
+        </p:txBody>
+      </p:sp>
+      <p:sp>
+        <p:nvSpPr>
+          <p:cNvPr id="24" name="Text 21"/>
+          <p:cNvSpPr/>
+          <p:nvPr/>
+        </p:nvSpPr>
+        <p:spPr>
+          <a:xfrm>
+            <a:off x="640080" y="6080760"/>
+            <a:ext cx="2834640" cy="969264"/>
+          </a:xfrm>
+          <a:prstGeom prst="rect">
+            <a:avLst/>
+          </a:prstGeom>
+          <a:noFill/>
+          <a:ln/>
+        </p:spPr>
+        <p:txBody>
+          <a:bodyPr wrap="square" lIns="0" tIns="0" rIns="0" bIns="0" rtlCol="0" anchor="ctr"/>
+          <a:lstStyle/>
+          <a:p>
+            <a:pPr marL="0" indent="0" algn="ctr">
+              <a:lnSpc>
+                <a:spcPct val="106000"/>
+              </a:lnSpc>
+              <a:buNone/>
+            </a:pPr>
+            <a:r>
+              <a:rPr lang="en-US" sz="1100" dirty="0">
+                <a:solidFill>
+                  <a:srgbClr val="BCBFCC"/>
+                </a:solidFill>
+                <a:latin typeface="Manrope" pitchFamily="34" charset="0"/>
+                <a:ea typeface="Manrope" pitchFamily="34" charset="-122"/>
+                <a:cs typeface="Manrope" pitchFamily="34" charset="-120"/>
+              </a:rPr>
+              <a:t>[Step]</a:t>
+            </a:r>
+            <a:endParaRPr lang="en-US" sz="1100" dirty="0"/>
+          </a:p>
+        </p:txBody>
+      </p:sp>
+      <p:sp>
+        <p:nvSpPr>
+          <p:cNvPr id="25" name="Shape 22"/>
+          <p:cNvSpPr/>
+          <p:nvPr/>
+        </p:nvSpPr>
+        <p:spPr>
+          <a:xfrm>
+            <a:off x="3904488" y="4818888"/>
+            <a:ext cx="3200400" cy="969264"/>
+          </a:xfrm>
+          <a:prstGeom prst="roundRect">
+            <a:avLst>
+              <a:gd name="adj" fmla="val 5660"/>
+            </a:avLst>
+          </a:prstGeom>
+          <a:solidFill>
+            <a:srgbClr val="FFFFFF"/>
+          </a:solidFill>
+          <a:ln w="13970">
+            <a:solidFill>
+              <a:srgbClr val="87C5C6"/>
+            </a:solidFill>
+            <a:prstDash val="solid"/>
+          </a:ln>
+        </p:spPr>
+        <p:txBody>
+          <a:bodyPr/>
+          <a:lstStyle/>
+          <a:p>
+            <a:endParaRPr lang="en-US"/>
+          </a:p>
+        </p:txBody>
+      </p:sp>
+      <p:sp>
+        <p:nvSpPr>
+          <p:cNvPr id="26" name="Text 23"/>
+          <p:cNvSpPr/>
+          <p:nvPr/>
+        </p:nvSpPr>
+        <p:spPr>
+          <a:xfrm>
+            <a:off x="4087368" y="4818888"/>
+            <a:ext cx="2834640" cy="969264"/>
+          </a:xfrm>
+          <a:prstGeom prst="rect">
+            <a:avLst/>
+          </a:prstGeom>
+          <a:noFill/>
+          <a:ln/>
+        </p:spPr>
+        <p:txBody>
+          <a:bodyPr wrap="square" lIns="0" tIns="0" rIns="0" bIns="0" rtlCol="0" anchor="ctr"/>
+          <a:lstStyle/>
+          <a:p>
+            <a:pPr marL="0" indent="0" algn="ctr">
+              <a:lnSpc>
+                <a:spcPct val="106000"/>
+              </a:lnSpc>
+              <a:buNone/>
+            </a:pPr>
+            <a:r>
+              <a:rPr lang="en-US" sz="1100" dirty="0">
+                <a:solidFill>
+                  <a:srgbClr val="BCBFCC"/>
+                </a:solidFill>
+                <a:latin typeface="Manrope" pitchFamily="34" charset="0"/>
+                <a:ea typeface="Manrope" pitchFamily="34" charset="-122"/>
+                <a:cs typeface="Manrope" pitchFamily="34" charset="-120"/>
+              </a:rPr>
+              <a:t>[Step]</a:t>
+            </a:r>
+            <a:endParaRPr lang="en-US" sz="1100" dirty="0"/>
+          </a:p>
+        </p:txBody>
+      </p:sp>
+      <p:sp>
+        <p:nvSpPr>
+          <p:cNvPr id="27" name="Text 24"/>
+          <p:cNvSpPr/>
+          <p:nvPr/>
+        </p:nvSpPr>
+        <p:spPr>
+          <a:xfrm>
+            <a:off x="5321808" y="5769864"/>
+            <a:ext cx="365760" cy="256032"/>
+          </a:xfrm>
+          <a:prstGeom prst="rect">
+            <a:avLst/>
+          </a:prstGeom>
+          <a:noFill/>
+          <a:ln/>
+        </p:spPr>
+        <p:txBody>
+          <a:bodyPr wrap="square" lIns="0" tIns="0" rIns="0" bIns="0" rtlCol="0" anchor="ctr"/>
+          <a:lstStyle/>
+          <a:p>
+            <a:pPr marL="0" indent="0" algn="ctr">
+              <a:buNone/>
+            </a:pPr>
+            <a:r>
+              <a:rPr lang="en-US" sz="1300" dirty="0">
+                <a:solidFill>
+                  <a:srgbClr val="0F8B8D"/>
+                </a:solidFill>
+                <a:latin typeface="Manrope" pitchFamily="34" charset="0"/>
+                <a:ea typeface="Manrope" pitchFamily="34" charset="-122"/>
+                <a:cs typeface="Manrope" pitchFamily="34" charset="-120"/>
+              </a:rPr>
+              <a:t>▼</a:t>
+            </a:r>
+            <a:endParaRPr lang="en-US" sz="1300" dirty="0"/>
+          </a:p>
+        </p:txBody>
+      </p:sp>
+      <p:sp>
+        <p:nvSpPr>
+          <p:cNvPr id="28" name="Shape 25"/>
+          <p:cNvSpPr/>
+          <p:nvPr/>
+        </p:nvSpPr>
+        <p:spPr>
+          <a:xfrm>
+            <a:off x="3904488" y="6080760"/>
+            <a:ext cx="3200400" cy="969264"/>
+          </a:xfrm>
+          <a:prstGeom prst="roundRect">
+            <a:avLst>
+              <a:gd name="adj" fmla="val 5660"/>
+            </a:avLst>
+          </a:prstGeom>
+          <a:solidFill>
+            <a:srgbClr val="FFFFFF"/>
+          </a:solidFill>
+          <a:ln w="13970">
+            <a:solidFill>
+              <a:srgbClr val="87C5C6"/>
+            </a:solidFill>
+            <a:prstDash val="solid"/>
+          </a:ln>
+        </p:spPr>
+        <p:txBody>
+          <a:bodyPr/>
+          <a:lstStyle/>
+          <a:p>
+            <a:endParaRPr lang="en-US"/>
+          </a:p>
+        </p:txBody>
+      </p:sp>
+      <p:sp>
+        <p:nvSpPr>
+          <p:cNvPr id="29" name="Text 26"/>
+          <p:cNvSpPr/>
+          <p:nvPr/>
+        </p:nvSpPr>
+        <p:spPr>
+          <a:xfrm>
+            <a:off x="4087368" y="6080760"/>
+            <a:ext cx="2834640" cy="969264"/>
+          </a:xfrm>
+          <a:prstGeom prst="rect">
+            <a:avLst/>
+          </a:prstGeom>
+          <a:noFill/>
+          <a:ln/>
+        </p:spPr>
+        <p:txBody>
+          <a:bodyPr wrap="square" lIns="0" tIns="0" rIns="0" bIns="0" rtlCol="0" anchor="ctr"/>
+          <a:lstStyle/>
+          <a:p>
+            <a:pPr marL="0" indent="0" algn="ctr">
+              <a:lnSpc>
+                <a:spcPct val="106000"/>
+              </a:lnSpc>
+              <a:buNone/>
+            </a:pPr>
+            <a:r>
+              <a:rPr lang="en-US" sz="1100" dirty="0">
+                <a:solidFill>
+                  <a:srgbClr val="BCBFCC"/>
+                </a:solidFill>
+                <a:latin typeface="Manrope" pitchFamily="34" charset="0"/>
+                <a:ea typeface="Manrope" pitchFamily="34" charset="-122"/>
+                <a:cs typeface="Manrope" pitchFamily="34" charset="-120"/>
+              </a:rPr>
+              <a:t>[Step]</a:t>
+            </a:r>
+            <a:endParaRPr lang="en-US" sz="1100" dirty="0"/>
+          </a:p>
+        </p:txBody>
+      </p:sp>
+      <p:sp>
+        <p:nvSpPr>
+          <p:cNvPr id="30" name="Shape 27"/>
+          <p:cNvSpPr/>
+          <p:nvPr/>
+        </p:nvSpPr>
+        <p:spPr>
+          <a:xfrm>
+            <a:off x="2046427" y="7050024"/>
+            <a:ext cx="21946" cy="201168"/>
+          </a:xfrm>
+          <a:prstGeom prst="rect">
+            <a:avLst/>
+          </a:prstGeom>
+          <a:solidFill>
+            <a:srgbClr val="0F8B8D"/>
+          </a:solidFill>
+          <a:ln/>
+        </p:spPr>
+        <p:txBody>
+          <a:bodyPr/>
+          <a:lstStyle/>
+          <a:p>
+            <a:endParaRPr lang="en-US"/>
+          </a:p>
+        </p:txBody>
+      </p:sp>
+      <p:sp>
+        <p:nvSpPr>
+          <p:cNvPr id="31" name="Shape 28"/>
+          <p:cNvSpPr/>
+          <p:nvPr/>
+        </p:nvSpPr>
+        <p:spPr>
+          <a:xfrm>
+            <a:off x="5493715" y="7050024"/>
+            <a:ext cx="21946" cy="201168"/>
+          </a:xfrm>
+          <a:prstGeom prst="rect">
+            <a:avLst/>
+          </a:prstGeom>
+          <a:solidFill>
+            <a:srgbClr val="0F8B8D"/>
+          </a:solidFill>
+          <a:ln/>
+        </p:spPr>
+        <p:txBody>
+          <a:bodyPr/>
+          <a:lstStyle/>
+          <a:p>
+            <a:endParaRPr lang="en-US"/>
+          </a:p>
+        </p:txBody>
+      </p:sp>
+      <p:sp>
+        <p:nvSpPr>
+          <p:cNvPr id="32" name="Shape 29"/>
+          <p:cNvSpPr/>
+          <p:nvPr/>
+        </p:nvSpPr>
+        <p:spPr>
+          <a:xfrm>
+            <a:off x="2057400" y="7242048"/>
+            <a:ext cx="3447288" cy="21946"/>
+          </a:xfrm>
+          <a:prstGeom prst="rect">
+            <a:avLst/>
+          </a:prstGeom>
+          <a:solidFill>
+            <a:srgbClr val="0F8B8D"/>
+          </a:solidFill>
+          <a:ln/>
+        </p:spPr>
+        <p:txBody>
+          <a:bodyPr/>
+          <a:lstStyle/>
+          <a:p>
+            <a:endParaRPr lang="en-US"/>
+          </a:p>
+        </p:txBody>
+      </p:sp>
+      <p:sp>
+        <p:nvSpPr>
+          <p:cNvPr id="33" name="Shape 30"/>
+          <p:cNvSpPr/>
+          <p:nvPr/>
+        </p:nvSpPr>
+        <p:spPr>
+          <a:xfrm>
+            <a:off x="3770071" y="7242048"/>
+            <a:ext cx="21946" cy="201168"/>
+          </a:xfrm>
+          <a:prstGeom prst="rect">
+            <a:avLst/>
+          </a:prstGeom>
+          <a:solidFill>
+            <a:srgbClr val="0F8B8D"/>
+          </a:solidFill>
+          <a:ln/>
+        </p:spPr>
+        <p:txBody>
+          <a:bodyPr/>
+          <a:lstStyle/>
+          <a:p>
+            <a:endParaRPr lang="en-US"/>
+          </a:p>
+        </p:txBody>
+      </p:sp>
+      <p:sp>
+        <p:nvSpPr>
+          <p:cNvPr id="34" name="Text 31"/>
+          <p:cNvSpPr/>
+          <p:nvPr/>
+        </p:nvSpPr>
+        <p:spPr>
+          <a:xfrm>
+            <a:off x="3598164" y="7415784"/>
+            <a:ext cx="365760" cy="256032"/>
+          </a:xfrm>
+          <a:prstGeom prst="rect">
+            <a:avLst/>
+          </a:prstGeom>
+          <a:noFill/>
+          <a:ln/>
+        </p:spPr>
+        <p:txBody>
+          <a:bodyPr wrap="square" lIns="0" tIns="0" rIns="0" bIns="0" rtlCol="0" anchor="ctr"/>
+          <a:lstStyle/>
+          <a:p>
+            <a:pPr marL="0" indent="0" algn="ctr">
+              <a:buNone/>
+            </a:pPr>
+            <a:r>
+              <a:rPr lang="en-US" sz="1300" dirty="0">
+                <a:solidFill>
+                  <a:srgbClr val="0F8B8D"/>
+                </a:solidFill>
+                <a:latin typeface="Manrope" pitchFamily="34" charset="0"/>
+                <a:ea typeface="Manrope" pitchFamily="34" charset="-122"/>
+                <a:cs typeface="Manrope" pitchFamily="34" charset="-120"/>
+              </a:rPr>
+              <a:t>▼</a:t>
+            </a:r>
+            <a:endParaRPr lang="en-US" sz="1300" dirty="0"/>
+          </a:p>
+        </p:txBody>
+      </p:sp>
+      <p:sp>
+        <p:nvSpPr>
+          <p:cNvPr id="35" name="Shape 32"/>
+          <p:cNvSpPr/>
+          <p:nvPr/>
+        </p:nvSpPr>
+        <p:spPr>
+          <a:xfrm>
+            <a:off x="1540764" y="7653528"/>
+            <a:ext cx="4480560" cy="768096"/>
+          </a:xfrm>
+          <a:prstGeom prst="roundRect">
+            <a:avLst>
+              <a:gd name="adj" fmla="val 8333"/>
+            </a:avLst>
+          </a:prstGeom>
+          <a:solidFill>
+            <a:srgbClr val="0F8B8D"/>
+          </a:solidFill>
+          <a:ln/>
+        </p:spPr>
+        <p:txBody>
+          <a:bodyPr/>
+          <a:lstStyle/>
+          <a:p>
+            <a:endParaRPr lang="en-US"/>
+          </a:p>
+        </p:txBody>
+      </p:sp>
+      <p:sp>
+        <p:nvSpPr>
+          <p:cNvPr id="36" name="Text 33"/>
+          <p:cNvSpPr/>
+          <p:nvPr/>
+        </p:nvSpPr>
+        <p:spPr>
+          <a:xfrm>
+            <a:off x="1769364" y="7653528"/>
+            <a:ext cx="4023360" cy="768096"/>
+          </a:xfrm>
+          <a:prstGeom prst="rect">
+            <a:avLst/>
+          </a:prstGeom>
+          <a:noFill/>
+          <a:ln/>
+        </p:spPr>
+        <p:txBody>
+          <a:bodyPr wrap="square" lIns="0" tIns="0" rIns="0" bIns="0" rtlCol="0" anchor="ctr"/>
+          <a:lstStyle/>
+          <a:p>
+            <a:pPr marL="0" indent="0" algn="ctr">
+              <a:lnSpc>
+                <a:spcPct val="104000"/>
+              </a:lnSpc>
+              <a:buNone/>
+            </a:pPr>
+            <a:r>
+              <a:rPr lang="en-US" sz="1250" b="1" dirty="0">
+                <a:solidFill>
+                  <a:srgbClr val="FFFFFF"/>
+                </a:solidFill>
+                <a:latin typeface="Manrope" pitchFamily="34" charset="0"/>
+                <a:ea typeface="Manrope" pitchFamily="34" charset="-122"/>
+                <a:cs typeface="Manrope" pitchFamily="34" charset="-120"/>
+              </a:rPr>
+              <a:t>[Outcome or next step]</a:t>
+            </a:r>
+            <a:endParaRPr lang="en-US" sz="1250" dirty="0"/>
+          </a:p>
+        </p:txBody>
+      </p:sp>
+      <p:pic>
+        <p:nvPicPr>
+          <p:cNvPr id="37" name="Image 1" descr="/home/claude/deck/img/mark.png"/>
+          <p:cNvPicPr>
+            <a:picLocks noChangeAspect="1"/>
+          </p:cNvPicPr>
+          <p:nvPr/>
+        </p:nvPicPr>
+        <p:blipFill>
+          <a:blip r:embed="rId3"/>
           <a:stretch>
             <a:fillRect/>
           </a:stretch>
@@ -12272,6 +17007,13 @@
           </a:solidFill>
           <a:ln/>
         </p:spPr>
+        <p:txBody>
+          <a:bodyPr/>
+          <a:lstStyle/>
+          <a:p>
+            <a:endParaRPr lang="en-US"/>
+          </a:p>
+        </p:txBody>
       </p:sp>
       <p:pic>
         <p:nvPicPr>
@@ -12433,6 +17175,13 @@
           </a:solidFill>
           <a:ln/>
         </p:spPr>
+        <p:txBody>
+          <a:bodyPr/>
+          <a:lstStyle/>
+          <a:p>
+            <a:endParaRPr lang="en-US"/>
+          </a:p>
+        </p:txBody>
       </p:sp>
       <p:pic>
         <p:nvPicPr>
@@ -12589,6 +17338,13 @@
           </a:solidFill>
           <a:ln/>
         </p:spPr>
+        <p:txBody>
+          <a:bodyPr/>
+          <a:lstStyle/>
+          <a:p>
+            <a:endParaRPr lang="en-US"/>
+          </a:p>
+        </p:txBody>
       </p:sp>
       <p:pic>
         <p:nvPicPr>
@@ -12745,6 +17501,13 @@
           </a:solidFill>
           <a:ln/>
         </p:spPr>
+        <p:txBody>
+          <a:bodyPr/>
+          <a:lstStyle/>
+          <a:p>
+            <a:endParaRPr lang="en-US"/>
+          </a:p>
+        </p:txBody>
       </p:sp>
       <p:pic>
         <p:nvPicPr>
@@ -12901,6 +17664,13 @@
           </a:solidFill>
           <a:ln/>
         </p:spPr>
+        <p:txBody>
+          <a:bodyPr/>
+          <a:lstStyle/>
+          <a:p>
+            <a:endParaRPr lang="en-US"/>
+          </a:p>
+        </p:txBody>
       </p:sp>
       <p:pic>
         <p:nvPicPr>
@@ -13057,6 +17827,13 @@
           </a:solidFill>
           <a:ln/>
         </p:spPr>
+        <p:txBody>
+          <a:bodyPr/>
+          <a:lstStyle/>
+          <a:p>
+            <a:endParaRPr lang="en-US"/>
+          </a:p>
+        </p:txBody>
       </p:sp>
       <p:pic>
         <p:nvPicPr>
@@ -13215,6 +17992,13 @@
           </a:solidFill>
           <a:ln/>
         </p:spPr>
+        <p:txBody>
+          <a:bodyPr/>
+          <a:lstStyle/>
+          <a:p>
+            <a:endParaRPr lang="en-US"/>
+          </a:p>
+        </p:txBody>
       </p:sp>
       <p:sp>
         <p:nvSpPr>
@@ -13318,6 +18102,13 @@
           </a:solidFill>
           <a:ln/>
         </p:spPr>
+        <p:txBody>
+          <a:bodyPr/>
+          <a:lstStyle/>
+          <a:p>
+            <a:endParaRPr lang="en-US"/>
+          </a:p>
+        </p:txBody>
       </p:sp>
       <p:sp>
         <p:nvSpPr>
@@ -13554,6 +18345,13 @@
           </a:solidFill>
           <a:ln/>
         </p:spPr>
+        <p:txBody>
+          <a:bodyPr/>
+          <a:lstStyle/>
+          <a:p>
+            <a:endParaRPr lang="en-US"/>
+          </a:p>
+        </p:txBody>
       </p:sp>
       <p:pic>
         <p:nvPicPr>
@@ -13717,6 +18515,13 @@
           </a:solidFill>
           <a:ln/>
         </p:spPr>
+        <p:txBody>
+          <a:bodyPr/>
+          <a:lstStyle/>
+          <a:p>
+            <a:endParaRPr lang="en-US"/>
+          </a:p>
+        </p:txBody>
       </p:sp>
       <p:sp>
         <p:nvSpPr>
@@ -13737,6 +18542,13 @@
           </a:solidFill>
           <a:ln/>
         </p:spPr>
+        <p:txBody>
+          <a:bodyPr/>
+          <a:lstStyle/>
+          <a:p>
+            <a:endParaRPr lang="en-US"/>
+          </a:p>
+        </p:txBody>
       </p:sp>
       <p:pic>
         <p:nvPicPr>
@@ -13827,6 +18639,13 @@
             <a:prstDash val="solid"/>
           </a:ln>
         </p:spPr>
+        <p:txBody>
+          <a:bodyPr/>
+          <a:lstStyle/>
+          <a:p>
+            <a:endParaRPr lang="en-US"/>
+          </a:p>
+        </p:txBody>
       </p:sp>
       <p:sp>
         <p:nvSpPr>
@@ -13847,6 +18666,13 @@
           </a:solidFill>
           <a:ln/>
         </p:spPr>
+        <p:txBody>
+          <a:bodyPr/>
+          <a:lstStyle/>
+          <a:p>
+            <a:endParaRPr lang="en-US"/>
+          </a:p>
+        </p:txBody>
       </p:sp>
       <p:sp>
         <p:nvSpPr>
@@ -14005,6 +18831,13 @@
             <a:prstDash val="solid"/>
           </a:ln>
         </p:spPr>
+        <p:txBody>
+          <a:bodyPr/>
+          <a:lstStyle/>
+          <a:p>
+            <a:endParaRPr lang="en-US"/>
+          </a:p>
+        </p:txBody>
       </p:sp>
       <p:sp>
         <p:nvSpPr>
@@ -14025,6 +18858,13 @@
           </a:solidFill>
           <a:ln/>
         </p:spPr>
+        <p:txBody>
+          <a:bodyPr/>
+          <a:lstStyle/>
+          <a:p>
+            <a:endParaRPr lang="en-US"/>
+          </a:p>
+        </p:txBody>
       </p:sp>
       <p:sp>
         <p:nvSpPr>
@@ -14183,6 +19023,13 @@
             <a:prstDash val="solid"/>
           </a:ln>
         </p:spPr>
+        <p:txBody>
+          <a:bodyPr/>
+          <a:lstStyle/>
+          <a:p>
+            <a:endParaRPr lang="en-US"/>
+          </a:p>
+        </p:txBody>
       </p:sp>
       <p:sp>
         <p:nvSpPr>
@@ -14203,6 +19050,13 @@
           </a:solidFill>
           <a:ln/>
         </p:spPr>
+        <p:txBody>
+          <a:bodyPr/>
+          <a:lstStyle/>
+          <a:p>
+            <a:endParaRPr lang="en-US"/>
+          </a:p>
+        </p:txBody>
       </p:sp>
       <p:sp>
         <p:nvSpPr>
@@ -14361,6 +19215,13 @@
             <a:prstDash val="solid"/>
           </a:ln>
         </p:spPr>
+        <p:txBody>
+          <a:bodyPr/>
+          <a:lstStyle/>
+          <a:p>
+            <a:endParaRPr lang="en-US"/>
+          </a:p>
+        </p:txBody>
       </p:sp>
       <p:sp>
         <p:nvSpPr>
@@ -14381,6 +19242,13 @@
           </a:solidFill>
           <a:ln/>
         </p:spPr>
+        <p:txBody>
+          <a:bodyPr/>
+          <a:lstStyle/>
+          <a:p>
+            <a:endParaRPr lang="en-US"/>
+          </a:p>
+        </p:txBody>
       </p:sp>
       <p:sp>
         <p:nvSpPr>
@@ -14628,6 +19496,13 @@
           </a:solidFill>
           <a:ln/>
         </p:spPr>
+        <p:txBody>
+          <a:bodyPr/>
+          <a:lstStyle/>
+          <a:p>
+            <a:endParaRPr lang="en-US"/>
+          </a:p>
+        </p:txBody>
       </p:sp>
       <p:pic>
         <p:nvPicPr>
@@ -14713,6 +19588,13 @@
           </a:solidFill>
           <a:ln/>
         </p:spPr>
+        <p:txBody>
+          <a:bodyPr/>
+          <a:lstStyle/>
+          <a:p>
+            <a:endParaRPr lang="en-US"/>
+          </a:p>
+        </p:txBody>
       </p:sp>
       <p:sp>
         <p:nvSpPr>
@@ -14857,6 +19739,13 @@
             <a:prstDash val="solid"/>
           </a:ln>
         </p:spPr>
+        <p:txBody>
+          <a:bodyPr/>
+          <a:lstStyle/>
+          <a:p>
+            <a:endParaRPr lang="en-US"/>
+          </a:p>
+        </p:txBody>
       </p:sp>
       <p:sp>
         <p:nvSpPr>
@@ -14971,6 +19860,13 @@
           </a:solidFill>
           <a:ln/>
         </p:spPr>
+        <p:txBody>
+          <a:bodyPr/>
+          <a:lstStyle/>
+          <a:p>
+            <a:endParaRPr lang="en-US"/>
+          </a:p>
+        </p:txBody>
       </p:sp>
       <p:sp>
         <p:nvSpPr>
@@ -15033,6 +19929,13 @@
           </a:solidFill>
           <a:ln/>
         </p:spPr>
+        <p:txBody>
+          <a:bodyPr/>
+          <a:lstStyle/>
+          <a:p>
+            <a:endParaRPr lang="en-US"/>
+          </a:p>
+        </p:txBody>
       </p:sp>
       <p:sp>
         <p:nvSpPr>
@@ -15053,6 +19956,13 @@
           </a:solidFill>
           <a:ln/>
         </p:spPr>
+        <p:txBody>
+          <a:bodyPr/>
+          <a:lstStyle/>
+          <a:p>
+            <a:endParaRPr lang="en-US"/>
+          </a:p>
+        </p:txBody>
       </p:sp>
       <p:sp>
         <p:nvSpPr>
@@ -15073,6 +19983,13 @@
           </a:solidFill>
           <a:ln/>
         </p:spPr>
+        <p:txBody>
+          <a:bodyPr/>
+          <a:lstStyle/>
+          <a:p>
+            <a:endParaRPr lang="en-US"/>
+          </a:p>
+        </p:txBody>
       </p:sp>
       <p:sp>
         <p:nvSpPr>
@@ -15093,6 +20010,13 @@
           </a:solidFill>
           <a:ln/>
         </p:spPr>
+        <p:txBody>
+          <a:bodyPr/>
+          <a:lstStyle/>
+          <a:p>
+            <a:endParaRPr lang="en-US"/>
+          </a:p>
+        </p:txBody>
       </p:sp>
       <p:sp>
         <p:nvSpPr>
@@ -15276,6 +20200,13 @@
             <a:prstDash val="solid"/>
           </a:ln>
         </p:spPr>
+        <p:txBody>
+          <a:bodyPr/>
+          <a:lstStyle/>
+          <a:p>
+            <a:endParaRPr lang="en-US"/>
+          </a:p>
+        </p:txBody>
       </p:sp>
       <p:sp>
         <p:nvSpPr>
@@ -15384,6 +20315,13 @@
             <a:prstDash val="solid"/>
           </a:ln>
         </p:spPr>
+        <p:txBody>
+          <a:bodyPr/>
+          <a:lstStyle/>
+          <a:p>
+            <a:endParaRPr lang="en-US"/>
+          </a:p>
+        </p:txBody>
       </p:sp>
       <p:sp>
         <p:nvSpPr>
@@ -15453,6 +20391,13 @@
             <a:prstDash val="solid"/>
           </a:ln>
         </p:spPr>
+        <p:txBody>
+          <a:bodyPr/>
+          <a:lstStyle/>
+          <a:p>
+            <a:endParaRPr lang="en-US"/>
+          </a:p>
+        </p:txBody>
       </p:sp>
       <p:sp>
         <p:nvSpPr>
@@ -15561,6 +20506,13 @@
             <a:prstDash val="solid"/>
           </a:ln>
         </p:spPr>
+        <p:txBody>
+          <a:bodyPr/>
+          <a:lstStyle/>
+          <a:p>
+            <a:endParaRPr lang="en-US"/>
+          </a:p>
+        </p:txBody>
       </p:sp>
       <p:sp>
         <p:nvSpPr>
@@ -15623,6 +20575,13 @@
           </a:solidFill>
           <a:ln/>
         </p:spPr>
+        <p:txBody>
+          <a:bodyPr/>
+          <a:lstStyle/>
+          <a:p>
+            <a:endParaRPr lang="en-US"/>
+          </a:p>
+        </p:txBody>
       </p:sp>
       <p:sp>
         <p:nvSpPr>
@@ -15643,6 +20602,13 @@
           </a:solidFill>
           <a:ln/>
         </p:spPr>
+        <p:txBody>
+          <a:bodyPr/>
+          <a:lstStyle/>
+          <a:p>
+            <a:endParaRPr lang="en-US"/>
+          </a:p>
+        </p:txBody>
       </p:sp>
       <p:sp>
         <p:nvSpPr>
@@ -15663,6 +20629,13 @@
           </a:solidFill>
           <a:ln/>
         </p:spPr>
+        <p:txBody>
+          <a:bodyPr/>
+          <a:lstStyle/>
+          <a:p>
+            <a:endParaRPr lang="en-US"/>
+          </a:p>
+        </p:txBody>
       </p:sp>
       <p:sp>
         <p:nvSpPr>
@@ -15683,6 +20656,13 @@
           </a:solidFill>
           <a:ln/>
         </p:spPr>
+        <p:txBody>
+          <a:bodyPr/>
+          <a:lstStyle/>
+          <a:p>
+            <a:endParaRPr lang="en-US"/>
+          </a:p>
+        </p:txBody>
       </p:sp>
       <p:sp>
         <p:nvSpPr>
@@ -15744,6 +20724,13 @@
           </a:solidFill>
           <a:ln/>
         </p:spPr>
+        <p:txBody>
+          <a:bodyPr/>
+          <a:lstStyle/>
+          <a:p>
+            <a:endParaRPr lang="en-US"/>
+          </a:p>
+        </p:txBody>
       </p:sp>
       <p:sp>
         <p:nvSpPr>
@@ -15941,6 +20928,13 @@
           </a:solidFill>
           <a:ln/>
         </p:spPr>
+        <p:txBody>
+          <a:bodyPr/>
+          <a:lstStyle/>
+          <a:p>
+            <a:endParaRPr lang="en-US"/>
+          </a:p>
+        </p:txBody>
       </p:sp>
       <p:pic>
         <p:nvPicPr>
@@ -16026,6 +21020,13 @@
           </a:solidFill>
           <a:ln/>
         </p:spPr>
+        <p:txBody>
+          <a:bodyPr/>
+          <a:lstStyle/>
+          <a:p>
+            <a:endParaRPr lang="en-US"/>
+          </a:p>
+        </p:txBody>
       </p:sp>
       <p:sp>
         <p:nvSpPr>
@@ -16163,6 +21164,13 @@
           </a:solidFill>
           <a:ln/>
         </p:spPr>
+        <p:txBody>
+          <a:bodyPr/>
+          <a:lstStyle/>
+          <a:p>
+            <a:endParaRPr lang="en-US"/>
+          </a:p>
+        </p:txBody>
       </p:sp>
       <p:pic>
         <p:nvPicPr>
@@ -16319,6 +21327,13 @@
           </a:solidFill>
           <a:ln/>
         </p:spPr>
+        <p:txBody>
+          <a:bodyPr/>
+          <a:lstStyle/>
+          <a:p>
+            <a:endParaRPr lang="en-US"/>
+          </a:p>
+        </p:txBody>
       </p:sp>
       <p:pic>
         <p:nvPicPr>
@@ -16499,6 +21514,13 @@
           </a:solidFill>
           <a:ln/>
         </p:spPr>
+        <p:txBody>
+          <a:bodyPr/>
+          <a:lstStyle/>
+          <a:p>
+            <a:endParaRPr lang="en-US"/>
+          </a:p>
+        </p:txBody>
       </p:sp>
       <p:pic>
         <p:nvPicPr>
@@ -16655,6 +21677,13 @@
           </a:solidFill>
           <a:ln/>
         </p:spPr>
+        <p:txBody>
+          <a:bodyPr/>
+          <a:lstStyle/>
+          <a:p>
+            <a:endParaRPr lang="en-US"/>
+          </a:p>
+        </p:txBody>
       </p:sp>
       <p:pic>
         <p:nvPicPr>
@@ -16811,6 +21840,13 @@
           </a:solidFill>
           <a:ln/>
         </p:spPr>
+        <p:txBody>
+          <a:bodyPr/>
+          <a:lstStyle/>
+          <a:p>
+            <a:endParaRPr lang="en-US"/>
+          </a:p>
+        </p:txBody>
       </p:sp>
       <p:pic>
         <p:nvPicPr>
@@ -16993,6 +22029,13 @@
           </a:solidFill>
           <a:ln/>
         </p:spPr>
+        <p:txBody>
+          <a:bodyPr/>
+          <a:lstStyle/>
+          <a:p>
+            <a:endParaRPr lang="en-US"/>
+          </a:p>
+        </p:txBody>
       </p:sp>
       <p:sp>
         <p:nvSpPr>
@@ -17422,6 +22465,13 @@
           </a:solidFill>
           <a:ln/>
         </p:spPr>
+        <p:txBody>
+          <a:bodyPr/>
+          <a:lstStyle/>
+          <a:p>
+            <a:endParaRPr lang="en-US"/>
+          </a:p>
+        </p:txBody>
       </p:sp>
       <p:sp>
         <p:nvSpPr>
@@ -17758,6 +22808,13 @@
           </a:solidFill>
           <a:ln/>
         </p:spPr>
+        <p:txBody>
+          <a:bodyPr/>
+          <a:lstStyle/>
+          <a:p>
+            <a:endParaRPr lang="en-US"/>
+          </a:p>
+        </p:txBody>
       </p:sp>
       <p:pic>
         <p:nvPicPr>
@@ -17921,6 +22978,13 @@
           </a:solidFill>
           <a:ln/>
         </p:spPr>
+        <p:txBody>
+          <a:bodyPr/>
+          <a:lstStyle/>
+          <a:p>
+            <a:endParaRPr lang="en-US"/>
+          </a:p>
+        </p:txBody>
       </p:sp>
       <p:sp>
         <p:nvSpPr>
@@ -17941,6 +23005,13 @@
           </a:solidFill>
           <a:ln/>
         </p:spPr>
+        <p:txBody>
+          <a:bodyPr/>
+          <a:lstStyle/>
+          <a:p>
+            <a:endParaRPr lang="en-US"/>
+          </a:p>
+        </p:txBody>
       </p:sp>
       <p:pic>
         <p:nvPicPr>
@@ -18031,6 +23102,13 @@
             <a:prstDash val="solid"/>
           </a:ln>
         </p:spPr>
+        <p:txBody>
+          <a:bodyPr/>
+          <a:lstStyle/>
+          <a:p>
+            <a:endParaRPr lang="en-US"/>
+          </a:p>
+        </p:txBody>
       </p:sp>
       <p:sp>
         <p:nvSpPr>
@@ -18051,6 +23129,13 @@
           </a:solidFill>
           <a:ln/>
         </p:spPr>
+        <p:txBody>
+          <a:bodyPr/>
+          <a:lstStyle/>
+          <a:p>
+            <a:endParaRPr lang="en-US"/>
+          </a:p>
+        </p:txBody>
       </p:sp>
       <p:sp>
         <p:nvSpPr>
@@ -18209,6 +23294,13 @@
             <a:prstDash val="solid"/>
           </a:ln>
         </p:spPr>
+        <p:txBody>
+          <a:bodyPr/>
+          <a:lstStyle/>
+          <a:p>
+            <a:endParaRPr lang="en-US"/>
+          </a:p>
+        </p:txBody>
       </p:sp>
       <p:sp>
         <p:nvSpPr>
@@ -18229,6 +23321,13 @@
           </a:solidFill>
           <a:ln/>
         </p:spPr>
+        <p:txBody>
+          <a:bodyPr/>
+          <a:lstStyle/>
+          <a:p>
+            <a:endParaRPr lang="en-US"/>
+          </a:p>
+        </p:txBody>
       </p:sp>
       <p:sp>
         <p:nvSpPr>
@@ -18387,6 +23486,13 @@
             <a:prstDash val="solid"/>
           </a:ln>
         </p:spPr>
+        <p:txBody>
+          <a:bodyPr/>
+          <a:lstStyle/>
+          <a:p>
+            <a:endParaRPr lang="en-US"/>
+          </a:p>
+        </p:txBody>
       </p:sp>
       <p:sp>
         <p:nvSpPr>
@@ -18407,6 +23513,13 @@
           </a:solidFill>
           <a:ln/>
         </p:spPr>
+        <p:txBody>
+          <a:bodyPr/>
+          <a:lstStyle/>
+          <a:p>
+            <a:endParaRPr lang="en-US"/>
+          </a:p>
+        </p:txBody>
       </p:sp>
       <p:sp>
         <p:nvSpPr>
@@ -18565,6 +23678,13 @@
             <a:prstDash val="solid"/>
           </a:ln>
         </p:spPr>
+        <p:txBody>
+          <a:bodyPr/>
+          <a:lstStyle/>
+          <a:p>
+            <a:endParaRPr lang="en-US"/>
+          </a:p>
+        </p:txBody>
       </p:sp>
       <p:sp>
         <p:nvSpPr>
@@ -18585,6 +23705,13 @@
           </a:solidFill>
           <a:ln/>
         </p:spPr>
+        <p:txBody>
+          <a:bodyPr/>
+          <a:lstStyle/>
+          <a:p>
+            <a:endParaRPr lang="en-US"/>
+          </a:p>
+        </p:txBody>
       </p:sp>
       <p:sp>
         <p:nvSpPr>
@@ -18832,6 +23959,13 @@
           </a:solidFill>
           <a:ln/>
         </p:spPr>
+        <p:txBody>
+          <a:bodyPr/>
+          <a:lstStyle/>
+          <a:p>
+            <a:endParaRPr lang="en-US"/>
+          </a:p>
+        </p:txBody>
       </p:sp>
       <p:pic>
         <p:nvPicPr>
@@ -19000,6 +24134,13 @@
             <a:prstDash val="solid"/>
           </a:ln>
         </p:spPr>
+        <p:txBody>
+          <a:bodyPr/>
+          <a:lstStyle/>
+          <a:p>
+            <a:endParaRPr lang="en-US"/>
+          </a:p>
+        </p:txBody>
       </p:sp>
       <p:sp>
         <p:nvSpPr>
@@ -19114,6 +24255,13 @@
           </a:solidFill>
           <a:ln/>
         </p:spPr>
+        <p:txBody>
+          <a:bodyPr/>
+          <a:lstStyle/>
+          <a:p>
+            <a:endParaRPr lang="en-US"/>
+          </a:p>
+        </p:txBody>
       </p:sp>
       <p:sp>
         <p:nvSpPr>
@@ -19176,6 +24324,13 @@
           </a:solidFill>
           <a:ln/>
         </p:spPr>
+        <p:txBody>
+          <a:bodyPr/>
+          <a:lstStyle/>
+          <a:p>
+            <a:endParaRPr lang="en-US"/>
+          </a:p>
+        </p:txBody>
       </p:sp>
       <p:sp>
         <p:nvSpPr>
@@ -19196,6 +24351,13 @@
           </a:solidFill>
           <a:ln/>
         </p:spPr>
+        <p:txBody>
+          <a:bodyPr/>
+          <a:lstStyle/>
+          <a:p>
+            <a:endParaRPr lang="en-US"/>
+          </a:p>
+        </p:txBody>
       </p:sp>
       <p:sp>
         <p:nvSpPr>
@@ -19216,6 +24378,13 @@
           </a:solidFill>
           <a:ln/>
         </p:spPr>
+        <p:txBody>
+          <a:bodyPr/>
+          <a:lstStyle/>
+          <a:p>
+            <a:endParaRPr lang="en-US"/>
+          </a:p>
+        </p:txBody>
       </p:sp>
       <p:sp>
         <p:nvSpPr>
@@ -19236,6 +24405,13 @@
           </a:solidFill>
           <a:ln/>
         </p:spPr>
+        <p:txBody>
+          <a:bodyPr/>
+          <a:lstStyle/>
+          <a:p>
+            <a:endParaRPr lang="en-US"/>
+          </a:p>
+        </p:txBody>
       </p:sp>
       <p:sp>
         <p:nvSpPr>
@@ -19419,6 +24595,13 @@
             <a:prstDash val="solid"/>
           </a:ln>
         </p:spPr>
+        <p:txBody>
+          <a:bodyPr/>
+          <a:lstStyle/>
+          <a:p>
+            <a:endParaRPr lang="en-US"/>
+          </a:p>
+        </p:txBody>
       </p:sp>
       <p:sp>
         <p:nvSpPr>
@@ -19527,6 +24710,13 @@
             <a:prstDash val="solid"/>
           </a:ln>
         </p:spPr>
+        <p:txBody>
+          <a:bodyPr/>
+          <a:lstStyle/>
+          <a:p>
+            <a:endParaRPr lang="en-US"/>
+          </a:p>
+        </p:txBody>
       </p:sp>
       <p:sp>
         <p:nvSpPr>
@@ -19596,6 +24786,13 @@
             <a:prstDash val="solid"/>
           </a:ln>
         </p:spPr>
+        <p:txBody>
+          <a:bodyPr/>
+          <a:lstStyle/>
+          <a:p>
+            <a:endParaRPr lang="en-US"/>
+          </a:p>
+        </p:txBody>
       </p:sp>
       <p:sp>
         <p:nvSpPr>
@@ -19704,6 +24901,13 @@
             <a:prstDash val="solid"/>
           </a:ln>
         </p:spPr>
+        <p:txBody>
+          <a:bodyPr/>
+          <a:lstStyle/>
+          <a:p>
+            <a:endParaRPr lang="en-US"/>
+          </a:p>
+        </p:txBody>
       </p:sp>
       <p:sp>
         <p:nvSpPr>
@@ -19766,6 +24970,13 @@
           </a:solidFill>
           <a:ln/>
         </p:spPr>
+        <p:txBody>
+          <a:bodyPr/>
+          <a:lstStyle/>
+          <a:p>
+            <a:endParaRPr lang="en-US"/>
+          </a:p>
+        </p:txBody>
       </p:sp>
       <p:sp>
         <p:nvSpPr>
@@ -19786,6 +24997,13 @@
           </a:solidFill>
           <a:ln/>
         </p:spPr>
+        <p:txBody>
+          <a:bodyPr/>
+          <a:lstStyle/>
+          <a:p>
+            <a:endParaRPr lang="en-US"/>
+          </a:p>
+        </p:txBody>
       </p:sp>
       <p:sp>
         <p:nvSpPr>
@@ -19806,6 +25024,13 @@
           </a:solidFill>
           <a:ln/>
         </p:spPr>
+        <p:txBody>
+          <a:bodyPr/>
+          <a:lstStyle/>
+          <a:p>
+            <a:endParaRPr lang="en-US"/>
+          </a:p>
+        </p:txBody>
       </p:sp>
       <p:sp>
         <p:nvSpPr>
@@ -19826,6 +25051,13 @@
           </a:solidFill>
           <a:ln/>
         </p:spPr>
+        <p:txBody>
+          <a:bodyPr/>
+          <a:lstStyle/>
+          <a:p>
+            <a:endParaRPr lang="en-US"/>
+          </a:p>
+        </p:txBody>
       </p:sp>
       <p:sp>
         <p:nvSpPr>
@@ -19887,6 +25119,13 @@
           </a:solidFill>
           <a:ln/>
         </p:spPr>
+        <p:txBody>
+          <a:bodyPr/>
+          <a:lstStyle/>
+          <a:p>
+            <a:endParaRPr lang="en-US"/>
+          </a:p>
+        </p:txBody>
       </p:sp>
       <p:sp>
         <p:nvSpPr>
@@ -20084,6 +25323,13 @@
           </a:solidFill>
           <a:ln/>
         </p:spPr>
+        <p:txBody>
+          <a:bodyPr/>
+          <a:lstStyle/>
+          <a:p>
+            <a:endParaRPr lang="en-US"/>
+          </a:p>
+        </p:txBody>
       </p:sp>
       <p:pic>
         <p:nvPicPr>
@@ -20245,6 +25491,13 @@
           </a:solidFill>
           <a:ln/>
         </p:spPr>
+        <p:txBody>
+          <a:bodyPr/>
+          <a:lstStyle/>
+          <a:p>
+            <a:endParaRPr lang="en-US"/>
+          </a:p>
+        </p:txBody>
       </p:sp>
       <p:pic>
         <p:nvPicPr>
@@ -20401,6 +25654,13 @@
           </a:solidFill>
           <a:ln/>
         </p:spPr>
+        <p:txBody>
+          <a:bodyPr/>
+          <a:lstStyle/>
+          <a:p>
+            <a:endParaRPr lang="en-US"/>
+          </a:p>
+        </p:txBody>
       </p:sp>
       <p:pic>
         <p:nvPicPr>
@@ -20557,6 +25817,13 @@
           </a:solidFill>
           <a:ln/>
         </p:spPr>
+        <p:txBody>
+          <a:bodyPr/>
+          <a:lstStyle/>
+          <a:p>
+            <a:endParaRPr lang="en-US"/>
+          </a:p>
+        </p:txBody>
       </p:sp>
       <p:pic>
         <p:nvPicPr>
@@ -20713,6 +25980,13 @@
           </a:solidFill>
           <a:ln/>
         </p:spPr>
+        <p:txBody>
+          <a:bodyPr/>
+          <a:lstStyle/>
+          <a:p>
+            <a:endParaRPr lang="en-US"/>
+          </a:p>
+        </p:txBody>
       </p:sp>
       <p:pic>
         <p:nvPicPr>
@@ -20869,6 +26143,13 @@
           </a:solidFill>
           <a:ln/>
         </p:spPr>
+        <p:txBody>
+          <a:bodyPr/>
+          <a:lstStyle/>
+          <a:p>
+            <a:endParaRPr lang="en-US"/>
+          </a:p>
+        </p:txBody>
       </p:sp>
       <p:pic>
         <p:nvPicPr>
@@ -21027,6 +26308,13 @@
           </a:solidFill>
           <a:ln/>
         </p:spPr>
+        <p:txBody>
+          <a:bodyPr/>
+          <a:lstStyle/>
+          <a:p>
+            <a:endParaRPr lang="en-US"/>
+          </a:p>
+        </p:txBody>
       </p:sp>
       <p:sp>
         <p:nvSpPr>
@@ -21130,6 +26418,13 @@
           </a:solidFill>
           <a:ln/>
         </p:spPr>
+        <p:txBody>
+          <a:bodyPr/>
+          <a:lstStyle/>
+          <a:p>
+            <a:endParaRPr lang="en-US"/>
+          </a:p>
+        </p:txBody>
       </p:sp>
       <p:sp>
         <p:nvSpPr>
@@ -21366,6 +26661,13 @@
           </a:solidFill>
           <a:ln/>
         </p:spPr>
+        <p:txBody>
+          <a:bodyPr/>
+          <a:lstStyle/>
+          <a:p>
+            <a:endParaRPr lang="en-US"/>
+          </a:p>
+        </p:txBody>
       </p:sp>
       <p:pic>
         <p:nvPicPr>
@@ -21451,6 +26753,13 @@
           </a:solidFill>
           <a:ln/>
         </p:spPr>
+        <p:txBody>
+          <a:bodyPr/>
+          <a:lstStyle/>
+          <a:p>
+            <a:endParaRPr lang="en-US"/>
+          </a:p>
+        </p:txBody>
       </p:sp>
       <p:sp>
         <p:nvSpPr>
@@ -21590,6 +26899,13 @@
           </a:solidFill>
           <a:ln/>
         </p:spPr>
+        <p:txBody>
+          <a:bodyPr/>
+          <a:lstStyle/>
+          <a:p>
+            <a:endParaRPr lang="en-US"/>
+          </a:p>
+        </p:txBody>
       </p:sp>
       <p:sp>
         <p:nvSpPr>
@@ -21610,6 +26926,13 @@
           </a:solidFill>
           <a:ln/>
         </p:spPr>
+        <p:txBody>
+          <a:bodyPr/>
+          <a:lstStyle/>
+          <a:p>
+            <a:endParaRPr lang="en-US"/>
+          </a:p>
+        </p:txBody>
       </p:sp>
       <p:pic>
         <p:nvPicPr>
@@ -21714,6 +27037,13 @@
             <a:prstDash val="solid"/>
           </a:ln>
         </p:spPr>
+        <p:txBody>
+          <a:bodyPr/>
+          <a:lstStyle/>
+          <a:p>
+            <a:endParaRPr lang="en-US"/>
+          </a:p>
+        </p:txBody>
       </p:sp>
       <p:sp>
         <p:nvSpPr>
@@ -21734,6 +27064,13 @@
           </a:solidFill>
           <a:ln/>
         </p:spPr>
+        <p:txBody>
+          <a:bodyPr/>
+          <a:lstStyle/>
+          <a:p>
+            <a:endParaRPr lang="en-US"/>
+          </a:p>
+        </p:txBody>
       </p:sp>
       <p:sp>
         <p:nvSpPr>
@@ -21920,6 +27257,13 @@
             <a:prstDash val="solid"/>
           </a:ln>
         </p:spPr>
+        <p:txBody>
+          <a:bodyPr/>
+          <a:lstStyle/>
+          <a:p>
+            <a:endParaRPr lang="en-US"/>
+          </a:p>
+        </p:txBody>
       </p:sp>
       <p:sp>
         <p:nvSpPr>
@@ -21940,6 +27284,13 @@
           </a:solidFill>
           <a:ln/>
         </p:spPr>
+        <p:txBody>
+          <a:bodyPr/>
+          <a:lstStyle/>
+          <a:p>
+            <a:endParaRPr lang="en-US"/>
+          </a:p>
+        </p:txBody>
       </p:sp>
       <p:sp>
         <p:nvSpPr>
@@ -22126,6 +27477,13 @@
             <a:prstDash val="solid"/>
           </a:ln>
         </p:spPr>
+        <p:txBody>
+          <a:bodyPr/>
+          <a:lstStyle/>
+          <a:p>
+            <a:endParaRPr lang="en-US"/>
+          </a:p>
+        </p:txBody>
       </p:sp>
       <p:sp>
         <p:nvSpPr>
@@ -22146,6 +27504,13 @@
           </a:solidFill>
           <a:ln/>
         </p:spPr>
+        <p:txBody>
+          <a:bodyPr/>
+          <a:lstStyle/>
+          <a:p>
+            <a:endParaRPr lang="en-US"/>
+          </a:p>
+        </p:txBody>
       </p:sp>
       <p:sp>
         <p:nvSpPr>
@@ -22332,6 +27697,13 @@
             <a:prstDash val="solid"/>
           </a:ln>
         </p:spPr>
+        <p:txBody>
+          <a:bodyPr/>
+          <a:lstStyle/>
+          <a:p>
+            <a:endParaRPr lang="en-US"/>
+          </a:p>
+        </p:txBody>
       </p:sp>
       <p:sp>
         <p:nvSpPr>
@@ -22352,6 +27724,13 @@
           </a:solidFill>
           <a:ln/>
         </p:spPr>
+        <p:txBody>
+          <a:bodyPr/>
+          <a:lstStyle/>
+          <a:p>
+            <a:endParaRPr lang="en-US"/>
+          </a:p>
+        </p:txBody>
       </p:sp>
       <p:sp>
         <p:nvSpPr>
@@ -22538,6 +27917,13 @@
             <a:prstDash val="solid"/>
           </a:ln>
         </p:spPr>
+        <p:txBody>
+          <a:bodyPr/>
+          <a:lstStyle/>
+          <a:p>
+            <a:endParaRPr lang="en-US"/>
+          </a:p>
+        </p:txBody>
       </p:sp>
       <p:sp>
         <p:nvSpPr>
@@ -22558,6 +27944,13 @@
           </a:solidFill>
           <a:ln/>
         </p:spPr>
+        <p:txBody>
+          <a:bodyPr/>
+          <a:lstStyle/>
+          <a:p>
+            <a:endParaRPr lang="en-US"/>
+          </a:p>
+        </p:txBody>
       </p:sp>
       <p:sp>
         <p:nvSpPr>
@@ -22700,6 +28093,13 @@
           </a:solidFill>
           <a:ln/>
         </p:spPr>
+        <p:txBody>
+          <a:bodyPr/>
+          <a:lstStyle/>
+          <a:p>
+            <a:endParaRPr lang="en-US"/>
+          </a:p>
+        </p:txBody>
       </p:sp>
       <p:sp>
         <p:nvSpPr>
@@ -23060,6 +28460,13 @@
           </a:solidFill>
           <a:ln/>
         </p:spPr>
+        <p:txBody>
+          <a:bodyPr/>
+          <a:lstStyle/>
+          <a:p>
+            <a:endParaRPr lang="en-US"/>
+          </a:p>
+        </p:txBody>
       </p:sp>
       <p:sp>
         <p:nvSpPr>
